--- a/content/05-teaching-resources/slides/core/02-maintenance-repair-and-installation.pptx
+++ b/content/05-teaching-resources/slides/core/02-maintenance-repair-and-installation.pptx
@@ -10,10 +10,14 @@
     <p:sldId id="258" r:id="rId9"/>
     <p:sldId id="259" r:id="rId10"/>
     <p:sldId id="260" r:id="rId11"/>
-    <p:sldId id="261" r:id="rId12"/>
+    <p:sldId id="261" r:id="rId13"/>
     <p:sldId id="262" r:id="rId14"/>
     <p:sldId id="263" r:id="rId15"/>
     <p:sldId id="264" r:id="rId16"/>
+    <p:sldId id="265" r:id="rId17"/>
+    <p:sldId id="266" r:id="rId18"/>
+    <p:sldId id="267" r:id="rId19"/>
+    <p:sldId id="268" r:id="rId20"/>
   </p:sldIdLst>
   <p:sldSz cx="12191695" cy="6858000" type="screen4x3"/>
   <p:notesSz cx="6858000" cy="9144000"/>
@@ -510,7 +514,22 @@
           <a:lstStyle/>
           <a:p>
             <a:r>
-              <a:t>Give students a few minutes to answer on mini whiteboards or paper, then reveal the answers on the next slide.</a:t>
+              <a:t>Answers:</a:t>
+            </a:r>
+          </a:p>
+          <a:p>
+            <a:r>
+              <a:t>1. Reactive.</a:t>
+            </a:r>
+          </a:p>
+          <a:p>
+            <a:r>
+              <a:t>2. Sensor data, e.g. vibration or temperature.</a:t>
+            </a:r>
+          </a:p>
+          <a:p>
+            <a:r>
+              <a:t>3. Parts may be replaced before they need to be.</a:t>
             </a:r>
           </a:p>
         </p:txBody>
@@ -580,7 +599,22 @@
           <a:lstStyle/>
           <a:p>
             <a:r>
-              <a:t>Talk through any answers the class found difficult.</a:t>
+              <a:t>Answers:</a:t>
+            </a:r>
+          </a:p>
+          <a:p>
+            <a:r>
+              <a:t>1. Checking new equipment works safely and as intended before use.</a:t>
+            </a:r>
+          </a:p>
+          <a:p>
+            <a:r>
+              <a:t>2. The maintenance manager.</a:t>
+            </a:r>
+          </a:p>
+          <a:p>
+            <a:r>
+              <a:t>3. Efficient machines use less energy and create less waste.</a:t>
             </a:r>
           </a:p>
         </p:txBody>
@@ -606,6 +640,146 @@
 </file>
 
 <file path=ppt/notesSlides/notesSlide3.xml><?xml version="1.0" encoding="utf-8"?>
+<p:notes xmlns:a="http://schemas.openxmlformats.org/drawingml/2006/main" xmlns:p="http://schemas.openxmlformats.org/presentationml/2006/main" xmlns:r="http://schemas.openxmlformats.org/officeDocument/2006/relationships">
+  <p:cSld>
+    <p:spTree>
+      <p:nvGrpSpPr>
+        <p:cNvPr id="1" name=""/>
+        <p:cNvGrpSpPr/>
+        <p:nvPr/>
+      </p:nvGrpSpPr>
+      <p:grpSpPr>
+        <a:xfrm>
+          <a:off x="0" y="0"/>
+          <a:ext cx="0" cy="0"/>
+          <a:chOff x="0" y="0"/>
+          <a:chExt cx="0" cy="0"/>
+        </a:xfrm>
+      </p:grpSpPr>
+      <p:sp>
+        <p:nvSpPr>
+          <p:cNvPr id="2" name="Slide Image Placeholder 1"/>
+          <p:cNvSpPr>
+            <a:spLocks noGrp="1"/>
+          </p:cNvSpPr>
+          <p:nvPr>
+            <p:ph type="sldImg" idx="2"/>
+          </p:nvPr>
+        </p:nvSpPr>
+        <p:spPr/>
+      </p:sp>
+      <p:sp>
+        <p:nvSpPr>
+          <p:cNvPr id="3" name="Notes Placeholder 2"/>
+          <p:cNvSpPr>
+            <a:spLocks noGrp="1"/>
+          </p:cNvSpPr>
+          <p:nvPr>
+            <p:ph type="body" idx="3" sz="quarter"/>
+          </p:nvPr>
+        </p:nvSpPr>
+        <p:spPr/>
+        <p:txBody>
+          <a:bodyPr/>
+          <a:lstStyle/>
+          <a:p>
+            <a:r>
+              <a:t>Give students a few minutes to answer on mini whiteboards or paper, then reveal the answers on the next slide.</a:t>
+            </a:r>
+          </a:p>
+        </p:txBody>
+      </p:sp>
+      <p:sp>
+        <p:nvSpPr>
+          <p:cNvPr id="4" name="Slide Number Placeholder 3"/>
+          <p:cNvSpPr>
+            <a:spLocks noGrp="1"/>
+          </p:cNvSpPr>
+          <p:nvPr>
+            <p:ph type="sldNum" idx="5" sz="quarter"/>
+          </p:nvPr>
+        </p:nvSpPr>
+        <p:spPr/>
+      </p:sp>
+    </p:spTree>
+  </p:cSld>
+  <p:clrMapOvr>
+    <a:masterClrMapping/>
+  </p:clrMapOvr>
+</p:notes>
+</file>
+
+<file path=ppt/notesSlides/notesSlide4.xml><?xml version="1.0" encoding="utf-8"?>
+<p:notes xmlns:a="http://schemas.openxmlformats.org/drawingml/2006/main" xmlns:p="http://schemas.openxmlformats.org/presentationml/2006/main" xmlns:r="http://schemas.openxmlformats.org/officeDocument/2006/relationships">
+  <p:cSld>
+    <p:spTree>
+      <p:nvGrpSpPr>
+        <p:cNvPr id="1" name=""/>
+        <p:cNvGrpSpPr/>
+        <p:nvPr/>
+      </p:nvGrpSpPr>
+      <p:grpSpPr>
+        <a:xfrm>
+          <a:off x="0" y="0"/>
+          <a:ext cx="0" cy="0"/>
+          <a:chOff x="0" y="0"/>
+          <a:chExt cx="0" cy="0"/>
+        </a:xfrm>
+      </p:grpSpPr>
+      <p:sp>
+        <p:nvSpPr>
+          <p:cNvPr id="2" name="Slide Image Placeholder 1"/>
+          <p:cNvSpPr>
+            <a:spLocks noGrp="1"/>
+          </p:cNvSpPr>
+          <p:nvPr>
+            <p:ph type="sldImg" idx="2"/>
+          </p:nvPr>
+        </p:nvSpPr>
+        <p:spPr/>
+      </p:sp>
+      <p:sp>
+        <p:nvSpPr>
+          <p:cNvPr id="3" name="Notes Placeholder 2"/>
+          <p:cNvSpPr>
+            <a:spLocks noGrp="1"/>
+          </p:cNvSpPr>
+          <p:nvPr>
+            <p:ph type="body" idx="3" sz="quarter"/>
+          </p:nvPr>
+        </p:nvSpPr>
+        <p:spPr/>
+        <p:txBody>
+          <a:bodyPr/>
+          <a:lstStyle/>
+          <a:p>
+            <a:r>
+              <a:t>Talk through any answers the class found difficult.</a:t>
+            </a:r>
+          </a:p>
+        </p:txBody>
+      </p:sp>
+      <p:sp>
+        <p:nvSpPr>
+          <p:cNvPr id="4" name="Slide Number Placeholder 3"/>
+          <p:cNvSpPr>
+            <a:spLocks noGrp="1"/>
+          </p:cNvSpPr>
+          <p:nvPr>
+            <p:ph type="sldNum" idx="5" sz="quarter"/>
+          </p:nvPr>
+        </p:nvSpPr>
+        <p:spPr/>
+      </p:sp>
+    </p:spTree>
+  </p:cSld>
+  <p:clrMapOvr>
+    <a:masterClrMapping/>
+  </p:clrMapOvr>
+</p:notes>
+</file>
+
+<file path=ppt/notesSlides/notesSlide5.xml><?xml version="1.0" encoding="utf-8"?>
 <p:notes xmlns:a="http://schemas.openxmlformats.org/drawingml/2006/main" xmlns:p="http://schemas.openxmlformats.org/presentationml/2006/main" xmlns:r="http://schemas.openxmlformats.org/officeDocument/2006/relationships">
   <p:cSld>
     <p:spTree>
@@ -3975,6 +4149,2355 @@
 </p:sld>
 </file>
 
+<file path=ppt/slides/slide10.xml><?xml version="1.0" encoding="utf-8"?>
+<p:sld xmlns:a="http://schemas.openxmlformats.org/drawingml/2006/main" xmlns:p="http://schemas.openxmlformats.org/presentationml/2006/main" xmlns:r="http://schemas.openxmlformats.org/officeDocument/2006/relationships">
+  <p:cSld>
+    <p:bg>
+      <p:bgPr>
+        <a:solidFill>
+          <a:srgbClr val="FFFFFF"/>
+        </a:solidFill>
+        <a:effectLst/>
+      </p:bgPr>
+    </p:bg>
+    <p:spTree>
+      <p:nvGrpSpPr>
+        <p:cNvPr id="1" name=""/>
+        <p:cNvGrpSpPr/>
+        <p:nvPr/>
+      </p:nvGrpSpPr>
+      <p:grpSpPr/>
+      <p:sp>
+        <p:nvSpPr>
+          <p:cNvPr id="2" name="TextBox 1"/>
+          <p:cNvSpPr txBox="1"/>
+          <p:nvPr/>
+        </p:nvSpPr>
+        <p:spPr>
+          <a:xfrm>
+            <a:off x="548640" y="320040"/>
+            <a:ext cx="11094415" cy="274320"/>
+          </a:xfrm>
+          <a:prstGeom prst="rect">
+            <a:avLst/>
+          </a:prstGeom>
+          <a:noFill/>
+        </p:spPr>
+        <p:txBody>
+          <a:bodyPr wrap="square" anchor="t" lIns="0" rIns="0" tIns="0" bIns="0"/>
+          <a:lstStyle/>
+          <a:p>
+            <a:pPr algn="l"/>
+            <a:r>
+              <a:rPr sz="1100" b="1" i="0">
+                <a:solidFill>
+                  <a:srgbClr val="54595D"/>
+                </a:solidFill>
+                <a:latin typeface="Calibri"/>
+              </a:rPr>
+              <a:t>ENGINEERING CORE  ·  Core topic 1</a:t>
+            </a:r>
+          </a:p>
+        </p:txBody>
+      </p:sp>
+      <p:sp>
+        <p:nvSpPr>
+          <p:cNvPr id="3" name="TextBox 2"/>
+          <p:cNvSpPr txBox="1"/>
+          <p:nvPr/>
+        </p:nvSpPr>
+        <p:spPr>
+          <a:xfrm>
+            <a:off x="548640" y="566928"/>
+            <a:ext cx="11094415" cy="822960"/>
+          </a:xfrm>
+          <a:prstGeom prst="rect">
+            <a:avLst/>
+          </a:prstGeom>
+          <a:noFill/>
+        </p:spPr>
+        <p:txBody>
+          <a:bodyPr wrap="square" anchor="ctr" lIns="0" rIns="0" tIns="0" bIns="0"/>
+          <a:lstStyle/>
+          <a:p>
+            <a:pPr algn="l"/>
+            <a:r>
+              <a:rPr sz="3200" b="1" i="0">
+                <a:solidFill>
+                  <a:srgbClr val="03306E"/>
+                </a:solidFill>
+                <a:latin typeface="Cambria"/>
+              </a:rPr>
+              <a:t>Check your understanding</a:t>
+            </a:r>
+          </a:p>
+        </p:txBody>
+      </p:sp>
+      <p:sp>
+        <p:nvSpPr>
+          <p:cNvPr id="4" name="TextBox 3"/>
+          <p:cNvSpPr txBox="1"/>
+          <p:nvPr/>
+        </p:nvSpPr>
+        <p:spPr>
+          <a:xfrm>
+            <a:off x="548640" y="6446520"/>
+            <a:ext cx="8229600" cy="274320"/>
+          </a:xfrm>
+          <a:prstGeom prst="rect">
+            <a:avLst/>
+          </a:prstGeom>
+          <a:noFill/>
+        </p:spPr>
+        <p:txBody>
+          <a:bodyPr wrap="square" anchor="t" lIns="0" rIns="0" tIns="0" bIns="0"/>
+          <a:lstStyle/>
+          <a:p>
+            <a:pPr algn="l"/>
+            <a:r>
+              <a:rPr sz="1000" b="0" i="0">
+                <a:solidFill>
+                  <a:srgbClr val="54595D"/>
+                </a:solidFill>
+                <a:latin typeface="Calibri"/>
+              </a:rPr>
+              <a:t>Design and Development for Engineering and Manufacturing T Level  ·  Maintenance, Repair and Installation</a:t>
+            </a:r>
+          </a:p>
+        </p:txBody>
+      </p:sp>
+      <p:sp>
+        <p:nvSpPr>
+          <p:cNvPr id="5" name="TextBox 4"/>
+          <p:cNvSpPr txBox="1"/>
+          <p:nvPr/>
+        </p:nvSpPr>
+        <p:spPr>
+          <a:xfrm>
+            <a:off x="10728655" y="6446520"/>
+            <a:ext cx="914400" cy="274320"/>
+          </a:xfrm>
+          <a:prstGeom prst="rect">
+            <a:avLst/>
+          </a:prstGeom>
+          <a:noFill/>
+        </p:spPr>
+        <p:txBody>
+          <a:bodyPr wrap="square" anchor="t" lIns="0" rIns="0" tIns="0" bIns="0"/>
+          <a:lstStyle/>
+          <a:p>
+            <a:pPr algn="r"/>
+            <a:r>
+              <a:rPr sz="1000" b="0" i="0">
+                <a:solidFill>
+                  <a:srgbClr val="54595D"/>
+                </a:solidFill>
+                <a:latin typeface="Calibri"/>
+              </a:rPr>
+              <a:t>10</a:t>
+            </a:r>
+          </a:p>
+        </p:txBody>
+      </p:sp>
+      <p:sp>
+        <p:nvSpPr>
+          <p:cNvPr id="6" name="Oval 5"/>
+          <p:cNvSpPr/>
+          <p:nvPr/>
+        </p:nvSpPr>
+        <p:spPr>
+          <a:xfrm>
+            <a:off x="548640" y="1618488"/>
+            <a:ext cx="411480" cy="411480"/>
+          </a:xfrm>
+          <a:prstGeom prst="ellipse">
+            <a:avLst/>
+          </a:prstGeom>
+          <a:solidFill>
+            <a:srgbClr val="F2B705"/>
+          </a:solidFill>
+          <a:ln>
+            <a:noFill/>
+          </a:ln>
+          <a:effectLst/>
+        </p:spPr>
+        <p:style>
+          <a:lnRef idx="1">
+            <a:schemeClr val="accent1"/>
+          </a:lnRef>
+          <a:fillRef idx="3">
+            <a:schemeClr val="accent1"/>
+          </a:fillRef>
+          <a:effectRef idx="2">
+            <a:schemeClr val="accent1"/>
+          </a:effectRef>
+          <a:fontRef idx="minor">
+            <a:schemeClr val="lt1"/>
+          </a:fontRef>
+        </p:style>
+        <p:txBody>
+          <a:bodyPr rtlCol="0" anchor="ctr" lIns="0" rIns="0" tIns="0" bIns="0"/>
+          <a:lstStyle/>
+          <a:p>
+            <a:pPr algn="ctr"/>
+            <a:r>
+              <a:rPr sz="1400" b="1">
+                <a:solidFill>
+                  <a:srgbClr val="202122"/>
+                </a:solidFill>
+                <a:latin typeface="Calibri"/>
+              </a:rPr>
+              <a:t>1</a:t>
+            </a:r>
+          </a:p>
+        </p:txBody>
+      </p:sp>
+      <p:sp>
+        <p:nvSpPr>
+          <p:cNvPr id="7" name="TextBox 6"/>
+          <p:cNvSpPr txBox="1"/>
+          <p:nvPr/>
+        </p:nvSpPr>
+        <p:spPr>
+          <a:xfrm>
+            <a:off x="1234440" y="1600200"/>
+            <a:ext cx="10408615" cy="1030986"/>
+          </a:xfrm>
+          <a:prstGeom prst="rect">
+            <a:avLst/>
+          </a:prstGeom>
+          <a:noFill/>
+        </p:spPr>
+        <p:txBody>
+          <a:bodyPr wrap="square" anchor="t" lIns="0" rIns="0" tIns="0" bIns="0"/>
+          <a:lstStyle/>
+          <a:p>
+            <a:pPr algn="l"/>
+            <a:r>
+              <a:rPr sz="2200" b="0" i="0">
+                <a:solidFill>
+                  <a:srgbClr val="202122"/>
+                </a:solidFill>
+                <a:latin typeface="Calibri"/>
+              </a:rPr>
+              <a:t>Which maintenance type waits until something breaks?</a:t>
+            </a:r>
+          </a:p>
+        </p:txBody>
+      </p:sp>
+      <p:sp>
+        <p:nvSpPr>
+          <p:cNvPr id="8" name="Oval 7"/>
+          <p:cNvSpPr/>
+          <p:nvPr/>
+        </p:nvSpPr>
+        <p:spPr>
+          <a:xfrm>
+            <a:off x="548640" y="2814066"/>
+            <a:ext cx="411480" cy="411480"/>
+          </a:xfrm>
+          <a:prstGeom prst="ellipse">
+            <a:avLst/>
+          </a:prstGeom>
+          <a:solidFill>
+            <a:srgbClr val="F2B705"/>
+          </a:solidFill>
+          <a:ln>
+            <a:noFill/>
+          </a:ln>
+          <a:effectLst/>
+        </p:spPr>
+        <p:style>
+          <a:lnRef idx="1">
+            <a:schemeClr val="accent1"/>
+          </a:lnRef>
+          <a:fillRef idx="3">
+            <a:schemeClr val="accent1"/>
+          </a:fillRef>
+          <a:effectRef idx="2">
+            <a:schemeClr val="accent1"/>
+          </a:effectRef>
+          <a:fontRef idx="minor">
+            <a:schemeClr val="lt1"/>
+          </a:fontRef>
+        </p:style>
+        <p:txBody>
+          <a:bodyPr rtlCol="0" anchor="ctr" lIns="0" rIns="0" tIns="0" bIns="0"/>
+          <a:lstStyle/>
+          <a:p>
+            <a:pPr algn="ctr"/>
+            <a:r>
+              <a:rPr sz="1400" b="1">
+                <a:solidFill>
+                  <a:srgbClr val="202122"/>
+                </a:solidFill>
+                <a:latin typeface="Calibri"/>
+              </a:rPr>
+              <a:t>2</a:t>
+            </a:r>
+          </a:p>
+        </p:txBody>
+      </p:sp>
+      <p:sp>
+        <p:nvSpPr>
+          <p:cNvPr id="9" name="TextBox 8"/>
+          <p:cNvSpPr txBox="1"/>
+          <p:nvPr/>
+        </p:nvSpPr>
+        <p:spPr>
+          <a:xfrm>
+            <a:off x="1234440" y="2795778"/>
+            <a:ext cx="10408615" cy="1030986"/>
+          </a:xfrm>
+          <a:prstGeom prst="rect">
+            <a:avLst/>
+          </a:prstGeom>
+          <a:noFill/>
+        </p:spPr>
+        <p:txBody>
+          <a:bodyPr wrap="square" anchor="t" lIns="0" rIns="0" tIns="0" bIns="0"/>
+          <a:lstStyle/>
+          <a:p>
+            <a:pPr algn="l"/>
+            <a:r>
+              <a:rPr sz="2200" b="0" i="0">
+                <a:solidFill>
+                  <a:srgbClr val="202122"/>
+                </a:solidFill>
+                <a:latin typeface="Calibri"/>
+              </a:rPr>
+              <a:t>What is condition-based monitoring?</a:t>
+            </a:r>
+          </a:p>
+        </p:txBody>
+      </p:sp>
+      <p:sp>
+        <p:nvSpPr>
+          <p:cNvPr id="10" name="Oval 9"/>
+          <p:cNvSpPr/>
+          <p:nvPr/>
+        </p:nvSpPr>
+        <p:spPr>
+          <a:xfrm>
+            <a:off x="548640" y="4009644"/>
+            <a:ext cx="411480" cy="411480"/>
+          </a:xfrm>
+          <a:prstGeom prst="ellipse">
+            <a:avLst/>
+          </a:prstGeom>
+          <a:solidFill>
+            <a:srgbClr val="F2B705"/>
+          </a:solidFill>
+          <a:ln>
+            <a:noFill/>
+          </a:ln>
+          <a:effectLst/>
+        </p:spPr>
+        <p:style>
+          <a:lnRef idx="1">
+            <a:schemeClr val="accent1"/>
+          </a:lnRef>
+          <a:fillRef idx="3">
+            <a:schemeClr val="accent1"/>
+          </a:fillRef>
+          <a:effectRef idx="2">
+            <a:schemeClr val="accent1"/>
+          </a:effectRef>
+          <a:fontRef idx="minor">
+            <a:schemeClr val="lt1"/>
+          </a:fontRef>
+        </p:style>
+        <p:txBody>
+          <a:bodyPr rtlCol="0" anchor="ctr" lIns="0" rIns="0" tIns="0" bIns="0"/>
+          <a:lstStyle/>
+          <a:p>
+            <a:pPr algn="ctr"/>
+            <a:r>
+              <a:rPr sz="1400" b="1">
+                <a:solidFill>
+                  <a:srgbClr val="202122"/>
+                </a:solidFill>
+                <a:latin typeface="Calibri"/>
+              </a:rPr>
+              <a:t>3</a:t>
+            </a:r>
+          </a:p>
+        </p:txBody>
+      </p:sp>
+      <p:sp>
+        <p:nvSpPr>
+          <p:cNvPr id="11" name="TextBox 10"/>
+          <p:cNvSpPr txBox="1"/>
+          <p:nvPr/>
+        </p:nvSpPr>
+        <p:spPr>
+          <a:xfrm>
+            <a:off x="1234440" y="3991356"/>
+            <a:ext cx="10408615" cy="1030986"/>
+          </a:xfrm>
+          <a:prstGeom prst="rect">
+            <a:avLst/>
+          </a:prstGeom>
+          <a:noFill/>
+        </p:spPr>
+        <p:txBody>
+          <a:bodyPr wrap="square" anchor="t" lIns="0" rIns="0" tIns="0" bIns="0"/>
+          <a:lstStyle/>
+          <a:p>
+            <a:pPr algn="l"/>
+            <a:r>
+              <a:rPr sz="2200" b="0" i="0">
+                <a:solidFill>
+                  <a:srgbClr val="202122"/>
+                </a:solidFill>
+                <a:latin typeface="Calibri"/>
+              </a:rPr>
+              <a:t>Why commission new equipment?</a:t>
+            </a:r>
+          </a:p>
+        </p:txBody>
+      </p:sp>
+      <p:sp>
+        <p:nvSpPr>
+          <p:cNvPr id="12" name="Oval 11"/>
+          <p:cNvSpPr/>
+          <p:nvPr/>
+        </p:nvSpPr>
+        <p:spPr>
+          <a:xfrm>
+            <a:off x="548640" y="5205221"/>
+            <a:ext cx="411480" cy="411480"/>
+          </a:xfrm>
+          <a:prstGeom prst="ellipse">
+            <a:avLst/>
+          </a:prstGeom>
+          <a:solidFill>
+            <a:srgbClr val="F2B705"/>
+          </a:solidFill>
+          <a:ln>
+            <a:noFill/>
+          </a:ln>
+          <a:effectLst/>
+        </p:spPr>
+        <p:style>
+          <a:lnRef idx="1">
+            <a:schemeClr val="accent1"/>
+          </a:lnRef>
+          <a:fillRef idx="3">
+            <a:schemeClr val="accent1"/>
+          </a:fillRef>
+          <a:effectRef idx="2">
+            <a:schemeClr val="accent1"/>
+          </a:effectRef>
+          <a:fontRef idx="minor">
+            <a:schemeClr val="lt1"/>
+          </a:fontRef>
+        </p:style>
+        <p:txBody>
+          <a:bodyPr rtlCol="0" anchor="ctr" lIns="0" rIns="0" tIns="0" bIns="0"/>
+          <a:lstStyle/>
+          <a:p>
+            <a:pPr algn="ctr"/>
+            <a:r>
+              <a:rPr sz="1400" b="1">
+                <a:solidFill>
+                  <a:srgbClr val="202122"/>
+                </a:solidFill>
+                <a:latin typeface="Calibri"/>
+              </a:rPr>
+              <a:t>4</a:t>
+            </a:r>
+          </a:p>
+        </p:txBody>
+      </p:sp>
+      <p:sp>
+        <p:nvSpPr>
+          <p:cNvPr id="13" name="TextBox 12"/>
+          <p:cNvSpPr txBox="1"/>
+          <p:nvPr/>
+        </p:nvSpPr>
+        <p:spPr>
+          <a:xfrm>
+            <a:off x="1234440" y="5186933"/>
+            <a:ext cx="10408615" cy="1030986"/>
+          </a:xfrm>
+          <a:prstGeom prst="rect">
+            <a:avLst/>
+          </a:prstGeom>
+          <a:noFill/>
+        </p:spPr>
+        <p:txBody>
+          <a:bodyPr wrap="square" anchor="t" lIns="0" rIns="0" tIns="0" bIns="0"/>
+          <a:lstStyle/>
+          <a:p>
+            <a:pPr algn="l"/>
+            <a:r>
+              <a:rPr sz="2200" b="0" i="0">
+                <a:solidFill>
+                  <a:srgbClr val="202122"/>
+                </a:solidFill>
+                <a:latin typeface="Calibri"/>
+              </a:rPr>
+              <a:t>Who plans maintenance schedules?</a:t>
+            </a:r>
+          </a:p>
+        </p:txBody>
+      </p:sp>
+    </p:spTree>
+  </p:cSld>
+  <p:clrMapOvr>
+    <a:masterClrMapping/>
+  </p:clrMapOvr>
+</p:sld>
+</file>
+
+<file path=ppt/slides/slide11.xml><?xml version="1.0" encoding="utf-8"?>
+<p:sld xmlns:a="http://schemas.openxmlformats.org/drawingml/2006/main" xmlns:p="http://schemas.openxmlformats.org/presentationml/2006/main" xmlns:r="http://schemas.openxmlformats.org/officeDocument/2006/relationships">
+  <p:cSld>
+    <p:bg>
+      <p:bgPr>
+        <a:solidFill>
+          <a:srgbClr val="FFFFFF"/>
+        </a:solidFill>
+        <a:effectLst/>
+      </p:bgPr>
+    </p:bg>
+    <p:spTree>
+      <p:nvGrpSpPr>
+        <p:cNvPr id="1" name=""/>
+        <p:cNvGrpSpPr/>
+        <p:nvPr/>
+      </p:nvGrpSpPr>
+      <p:grpSpPr/>
+      <p:sp>
+        <p:nvSpPr>
+          <p:cNvPr id="2" name="TextBox 1"/>
+          <p:cNvSpPr txBox="1"/>
+          <p:nvPr/>
+        </p:nvSpPr>
+        <p:spPr>
+          <a:xfrm>
+            <a:off x="548640" y="320040"/>
+            <a:ext cx="11094415" cy="274320"/>
+          </a:xfrm>
+          <a:prstGeom prst="rect">
+            <a:avLst/>
+          </a:prstGeom>
+          <a:noFill/>
+        </p:spPr>
+        <p:txBody>
+          <a:bodyPr wrap="square" anchor="t" lIns="0" rIns="0" tIns="0" bIns="0"/>
+          <a:lstStyle/>
+          <a:p>
+            <a:pPr algn="l"/>
+            <a:r>
+              <a:rPr sz="1100" b="1" i="0">
+                <a:solidFill>
+                  <a:srgbClr val="54595D"/>
+                </a:solidFill>
+                <a:latin typeface="Calibri"/>
+              </a:rPr>
+              <a:t>ENGINEERING CORE  ·  Core topic 1</a:t>
+            </a:r>
+          </a:p>
+        </p:txBody>
+      </p:sp>
+      <p:sp>
+        <p:nvSpPr>
+          <p:cNvPr id="3" name="TextBox 2"/>
+          <p:cNvSpPr txBox="1"/>
+          <p:nvPr/>
+        </p:nvSpPr>
+        <p:spPr>
+          <a:xfrm>
+            <a:off x="548640" y="566928"/>
+            <a:ext cx="11094415" cy="822960"/>
+          </a:xfrm>
+          <a:prstGeom prst="rect">
+            <a:avLst/>
+          </a:prstGeom>
+          <a:noFill/>
+        </p:spPr>
+        <p:txBody>
+          <a:bodyPr wrap="square" anchor="ctr" lIns="0" rIns="0" tIns="0" bIns="0"/>
+          <a:lstStyle/>
+          <a:p>
+            <a:pPr algn="l"/>
+            <a:r>
+              <a:rPr sz="3200" b="1" i="0">
+                <a:solidFill>
+                  <a:srgbClr val="03306E"/>
+                </a:solidFill>
+                <a:latin typeface="Cambria"/>
+              </a:rPr>
+              <a:t>Answers</a:t>
+            </a:r>
+          </a:p>
+        </p:txBody>
+      </p:sp>
+      <p:sp>
+        <p:nvSpPr>
+          <p:cNvPr id="4" name="TextBox 3"/>
+          <p:cNvSpPr txBox="1"/>
+          <p:nvPr/>
+        </p:nvSpPr>
+        <p:spPr>
+          <a:xfrm>
+            <a:off x="548640" y="6446520"/>
+            <a:ext cx="8229600" cy="274320"/>
+          </a:xfrm>
+          <a:prstGeom prst="rect">
+            <a:avLst/>
+          </a:prstGeom>
+          <a:noFill/>
+        </p:spPr>
+        <p:txBody>
+          <a:bodyPr wrap="square" anchor="t" lIns="0" rIns="0" tIns="0" bIns="0"/>
+          <a:lstStyle/>
+          <a:p>
+            <a:pPr algn="l"/>
+            <a:r>
+              <a:rPr sz="1000" b="0" i="0">
+                <a:solidFill>
+                  <a:srgbClr val="54595D"/>
+                </a:solidFill>
+                <a:latin typeface="Calibri"/>
+              </a:rPr>
+              <a:t>Design and Development for Engineering and Manufacturing T Level  ·  Maintenance, Repair and Installation</a:t>
+            </a:r>
+          </a:p>
+        </p:txBody>
+      </p:sp>
+      <p:sp>
+        <p:nvSpPr>
+          <p:cNvPr id="5" name="TextBox 4"/>
+          <p:cNvSpPr txBox="1"/>
+          <p:nvPr/>
+        </p:nvSpPr>
+        <p:spPr>
+          <a:xfrm>
+            <a:off x="10728655" y="6446520"/>
+            <a:ext cx="914400" cy="274320"/>
+          </a:xfrm>
+          <a:prstGeom prst="rect">
+            <a:avLst/>
+          </a:prstGeom>
+          <a:noFill/>
+        </p:spPr>
+        <p:txBody>
+          <a:bodyPr wrap="square" anchor="t" lIns="0" rIns="0" tIns="0" bIns="0"/>
+          <a:lstStyle/>
+          <a:p>
+            <a:pPr algn="r"/>
+            <a:r>
+              <a:rPr sz="1000" b="0" i="0">
+                <a:solidFill>
+                  <a:srgbClr val="54595D"/>
+                </a:solidFill>
+                <a:latin typeface="Calibri"/>
+              </a:rPr>
+              <a:t>11</a:t>
+            </a:r>
+          </a:p>
+        </p:txBody>
+      </p:sp>
+      <p:sp>
+        <p:nvSpPr>
+          <p:cNvPr id="6" name="Oval 5"/>
+          <p:cNvSpPr/>
+          <p:nvPr/>
+        </p:nvSpPr>
+        <p:spPr>
+          <a:xfrm>
+            <a:off x="548640" y="1618488"/>
+            <a:ext cx="411480" cy="411480"/>
+          </a:xfrm>
+          <a:prstGeom prst="ellipse">
+            <a:avLst/>
+          </a:prstGeom>
+          <a:solidFill>
+            <a:srgbClr val="F2B705"/>
+          </a:solidFill>
+          <a:ln>
+            <a:noFill/>
+          </a:ln>
+          <a:effectLst/>
+        </p:spPr>
+        <p:style>
+          <a:lnRef idx="1">
+            <a:schemeClr val="accent1"/>
+          </a:lnRef>
+          <a:fillRef idx="3">
+            <a:schemeClr val="accent1"/>
+          </a:fillRef>
+          <a:effectRef idx="2">
+            <a:schemeClr val="accent1"/>
+          </a:effectRef>
+          <a:fontRef idx="minor">
+            <a:schemeClr val="lt1"/>
+          </a:fontRef>
+        </p:style>
+        <p:txBody>
+          <a:bodyPr rtlCol="0" anchor="ctr" lIns="0" rIns="0" tIns="0" bIns="0"/>
+          <a:lstStyle/>
+          <a:p>
+            <a:pPr algn="ctr"/>
+            <a:r>
+              <a:rPr sz="1400" b="1">
+                <a:solidFill>
+                  <a:srgbClr val="202122"/>
+                </a:solidFill>
+                <a:latin typeface="Calibri"/>
+              </a:rPr>
+              <a:t>1</a:t>
+            </a:r>
+          </a:p>
+        </p:txBody>
+      </p:sp>
+      <p:sp>
+        <p:nvSpPr>
+          <p:cNvPr id="7" name="TextBox 6"/>
+          <p:cNvSpPr txBox="1"/>
+          <p:nvPr/>
+        </p:nvSpPr>
+        <p:spPr>
+          <a:xfrm>
+            <a:off x="1234440" y="1600200"/>
+            <a:ext cx="10408615" cy="1030986"/>
+          </a:xfrm>
+          <a:prstGeom prst="rect">
+            <a:avLst/>
+          </a:prstGeom>
+          <a:noFill/>
+        </p:spPr>
+        <p:txBody>
+          <a:bodyPr wrap="square" anchor="t" lIns="0" rIns="0" tIns="0" bIns="0"/>
+          <a:lstStyle/>
+          <a:p>
+            <a:pPr algn="l"/>
+            <a:r>
+              <a:rPr sz="1800" b="0" i="0">
+                <a:solidFill>
+                  <a:srgbClr val="54595D"/>
+                </a:solidFill>
+                <a:latin typeface="Calibri"/>
+              </a:rPr>
+              <a:t>Which maintenance type waits until something breaks?</a:t>
+            </a:r>
+          </a:p>
+          <a:p>
+            <a:r>
+              <a:rPr sz="1800" b="1">
+                <a:solidFill>
+                  <a:srgbClr val="03306E"/>
+                </a:solidFill>
+                <a:latin typeface="Calibri"/>
+              </a:rPr>
+              <a:t>Reactive.</a:t>
+            </a:r>
+          </a:p>
+        </p:txBody>
+      </p:sp>
+      <p:sp>
+        <p:nvSpPr>
+          <p:cNvPr id="8" name="Oval 7"/>
+          <p:cNvSpPr/>
+          <p:nvPr/>
+        </p:nvSpPr>
+        <p:spPr>
+          <a:xfrm>
+            <a:off x="548640" y="2814066"/>
+            <a:ext cx="411480" cy="411480"/>
+          </a:xfrm>
+          <a:prstGeom prst="ellipse">
+            <a:avLst/>
+          </a:prstGeom>
+          <a:solidFill>
+            <a:srgbClr val="F2B705"/>
+          </a:solidFill>
+          <a:ln>
+            <a:noFill/>
+          </a:ln>
+          <a:effectLst/>
+        </p:spPr>
+        <p:style>
+          <a:lnRef idx="1">
+            <a:schemeClr val="accent1"/>
+          </a:lnRef>
+          <a:fillRef idx="3">
+            <a:schemeClr val="accent1"/>
+          </a:fillRef>
+          <a:effectRef idx="2">
+            <a:schemeClr val="accent1"/>
+          </a:effectRef>
+          <a:fontRef idx="minor">
+            <a:schemeClr val="lt1"/>
+          </a:fontRef>
+        </p:style>
+        <p:txBody>
+          <a:bodyPr rtlCol="0" anchor="ctr" lIns="0" rIns="0" tIns="0" bIns="0"/>
+          <a:lstStyle/>
+          <a:p>
+            <a:pPr algn="ctr"/>
+            <a:r>
+              <a:rPr sz="1400" b="1">
+                <a:solidFill>
+                  <a:srgbClr val="202122"/>
+                </a:solidFill>
+                <a:latin typeface="Calibri"/>
+              </a:rPr>
+              <a:t>2</a:t>
+            </a:r>
+          </a:p>
+        </p:txBody>
+      </p:sp>
+      <p:sp>
+        <p:nvSpPr>
+          <p:cNvPr id="9" name="TextBox 8"/>
+          <p:cNvSpPr txBox="1"/>
+          <p:nvPr/>
+        </p:nvSpPr>
+        <p:spPr>
+          <a:xfrm>
+            <a:off x="1234440" y="2795778"/>
+            <a:ext cx="10408615" cy="1030986"/>
+          </a:xfrm>
+          <a:prstGeom prst="rect">
+            <a:avLst/>
+          </a:prstGeom>
+          <a:noFill/>
+        </p:spPr>
+        <p:txBody>
+          <a:bodyPr wrap="square" anchor="t" lIns="0" rIns="0" tIns="0" bIns="0"/>
+          <a:lstStyle/>
+          <a:p>
+            <a:pPr algn="l"/>
+            <a:r>
+              <a:rPr sz="1800" b="0" i="0">
+                <a:solidFill>
+                  <a:srgbClr val="54595D"/>
+                </a:solidFill>
+                <a:latin typeface="Calibri"/>
+              </a:rPr>
+              <a:t>What is condition-based monitoring?</a:t>
+            </a:r>
+          </a:p>
+          <a:p>
+            <a:r>
+              <a:rPr sz="1800" b="1">
+                <a:solidFill>
+                  <a:srgbClr val="03306E"/>
+                </a:solidFill>
+                <a:latin typeface="Calibri"/>
+              </a:rPr>
+              <a:t>Watching equipment readings and acting when they change.</a:t>
+            </a:r>
+          </a:p>
+        </p:txBody>
+      </p:sp>
+      <p:sp>
+        <p:nvSpPr>
+          <p:cNvPr id="10" name="Oval 9"/>
+          <p:cNvSpPr/>
+          <p:nvPr/>
+        </p:nvSpPr>
+        <p:spPr>
+          <a:xfrm>
+            <a:off x="548640" y="4009644"/>
+            <a:ext cx="411480" cy="411480"/>
+          </a:xfrm>
+          <a:prstGeom prst="ellipse">
+            <a:avLst/>
+          </a:prstGeom>
+          <a:solidFill>
+            <a:srgbClr val="F2B705"/>
+          </a:solidFill>
+          <a:ln>
+            <a:noFill/>
+          </a:ln>
+          <a:effectLst/>
+        </p:spPr>
+        <p:style>
+          <a:lnRef idx="1">
+            <a:schemeClr val="accent1"/>
+          </a:lnRef>
+          <a:fillRef idx="3">
+            <a:schemeClr val="accent1"/>
+          </a:fillRef>
+          <a:effectRef idx="2">
+            <a:schemeClr val="accent1"/>
+          </a:effectRef>
+          <a:fontRef idx="minor">
+            <a:schemeClr val="lt1"/>
+          </a:fontRef>
+        </p:style>
+        <p:txBody>
+          <a:bodyPr rtlCol="0" anchor="ctr" lIns="0" rIns="0" tIns="0" bIns="0"/>
+          <a:lstStyle/>
+          <a:p>
+            <a:pPr algn="ctr"/>
+            <a:r>
+              <a:rPr sz="1400" b="1">
+                <a:solidFill>
+                  <a:srgbClr val="202122"/>
+                </a:solidFill>
+                <a:latin typeface="Calibri"/>
+              </a:rPr>
+              <a:t>3</a:t>
+            </a:r>
+          </a:p>
+        </p:txBody>
+      </p:sp>
+      <p:sp>
+        <p:nvSpPr>
+          <p:cNvPr id="11" name="TextBox 10"/>
+          <p:cNvSpPr txBox="1"/>
+          <p:nvPr/>
+        </p:nvSpPr>
+        <p:spPr>
+          <a:xfrm>
+            <a:off x="1234440" y="3991356"/>
+            <a:ext cx="10408615" cy="1030986"/>
+          </a:xfrm>
+          <a:prstGeom prst="rect">
+            <a:avLst/>
+          </a:prstGeom>
+          <a:noFill/>
+        </p:spPr>
+        <p:txBody>
+          <a:bodyPr wrap="square" anchor="t" lIns="0" rIns="0" tIns="0" bIns="0"/>
+          <a:lstStyle/>
+          <a:p>
+            <a:pPr algn="l"/>
+            <a:r>
+              <a:rPr sz="1800" b="0" i="0">
+                <a:solidFill>
+                  <a:srgbClr val="54595D"/>
+                </a:solidFill>
+                <a:latin typeface="Calibri"/>
+              </a:rPr>
+              <a:t>Why commission new equipment?</a:t>
+            </a:r>
+          </a:p>
+          <a:p>
+            <a:r>
+              <a:rPr sz="1800" b="1">
+                <a:solidFill>
+                  <a:srgbClr val="03306E"/>
+                </a:solidFill>
+                <a:latin typeface="Calibri"/>
+              </a:rPr>
+              <a:t>To prove it works safely and as specified before use.</a:t>
+            </a:r>
+          </a:p>
+        </p:txBody>
+      </p:sp>
+      <p:sp>
+        <p:nvSpPr>
+          <p:cNvPr id="12" name="Oval 11"/>
+          <p:cNvSpPr/>
+          <p:nvPr/>
+        </p:nvSpPr>
+        <p:spPr>
+          <a:xfrm>
+            <a:off x="548640" y="5205221"/>
+            <a:ext cx="411480" cy="411480"/>
+          </a:xfrm>
+          <a:prstGeom prst="ellipse">
+            <a:avLst/>
+          </a:prstGeom>
+          <a:solidFill>
+            <a:srgbClr val="F2B705"/>
+          </a:solidFill>
+          <a:ln>
+            <a:noFill/>
+          </a:ln>
+          <a:effectLst/>
+        </p:spPr>
+        <p:style>
+          <a:lnRef idx="1">
+            <a:schemeClr val="accent1"/>
+          </a:lnRef>
+          <a:fillRef idx="3">
+            <a:schemeClr val="accent1"/>
+          </a:fillRef>
+          <a:effectRef idx="2">
+            <a:schemeClr val="accent1"/>
+          </a:effectRef>
+          <a:fontRef idx="minor">
+            <a:schemeClr val="lt1"/>
+          </a:fontRef>
+        </p:style>
+        <p:txBody>
+          <a:bodyPr rtlCol="0" anchor="ctr" lIns="0" rIns="0" tIns="0" bIns="0"/>
+          <a:lstStyle/>
+          <a:p>
+            <a:pPr algn="ctr"/>
+            <a:r>
+              <a:rPr sz="1400" b="1">
+                <a:solidFill>
+                  <a:srgbClr val="202122"/>
+                </a:solidFill>
+                <a:latin typeface="Calibri"/>
+              </a:rPr>
+              <a:t>4</a:t>
+            </a:r>
+          </a:p>
+        </p:txBody>
+      </p:sp>
+      <p:sp>
+        <p:nvSpPr>
+          <p:cNvPr id="13" name="TextBox 12"/>
+          <p:cNvSpPr txBox="1"/>
+          <p:nvPr/>
+        </p:nvSpPr>
+        <p:spPr>
+          <a:xfrm>
+            <a:off x="1234440" y="5186933"/>
+            <a:ext cx="10408615" cy="1030986"/>
+          </a:xfrm>
+          <a:prstGeom prst="rect">
+            <a:avLst/>
+          </a:prstGeom>
+          <a:noFill/>
+        </p:spPr>
+        <p:txBody>
+          <a:bodyPr wrap="square" anchor="t" lIns="0" rIns="0" tIns="0" bIns="0"/>
+          <a:lstStyle/>
+          <a:p>
+            <a:pPr algn="l"/>
+            <a:r>
+              <a:rPr sz="1800" b="0" i="0">
+                <a:solidFill>
+                  <a:srgbClr val="54595D"/>
+                </a:solidFill>
+                <a:latin typeface="Calibri"/>
+              </a:rPr>
+              <a:t>Who plans maintenance schedules?</a:t>
+            </a:r>
+          </a:p>
+          <a:p>
+            <a:r>
+              <a:rPr sz="1800" b="1">
+                <a:solidFill>
+                  <a:srgbClr val="03306E"/>
+                </a:solidFill>
+                <a:latin typeface="Calibri"/>
+              </a:rPr>
+              <a:t>The maintenance manager.</a:t>
+            </a:r>
+          </a:p>
+        </p:txBody>
+      </p:sp>
+    </p:spTree>
+  </p:cSld>
+  <p:clrMapOvr>
+    <a:masterClrMapping/>
+  </p:clrMapOvr>
+</p:sld>
+</file>
+
+<file path=ppt/slides/slide12.xml><?xml version="1.0" encoding="utf-8"?>
+<p:sld xmlns:a="http://schemas.openxmlformats.org/drawingml/2006/main" xmlns:p="http://schemas.openxmlformats.org/presentationml/2006/main" xmlns:r="http://schemas.openxmlformats.org/officeDocument/2006/relationships">
+  <p:cSld>
+    <p:bg>
+      <p:bgPr>
+        <a:solidFill>
+          <a:srgbClr val="FFFFFF"/>
+        </a:solidFill>
+        <a:effectLst/>
+      </p:bgPr>
+    </p:bg>
+    <p:spTree>
+      <p:nvGrpSpPr>
+        <p:cNvPr id="1" name=""/>
+        <p:cNvGrpSpPr/>
+        <p:nvPr/>
+      </p:nvGrpSpPr>
+      <p:grpSpPr/>
+      <p:sp>
+        <p:nvSpPr>
+          <p:cNvPr id="2" name="TextBox 1"/>
+          <p:cNvSpPr txBox="1"/>
+          <p:nvPr/>
+        </p:nvSpPr>
+        <p:spPr>
+          <a:xfrm>
+            <a:off x="548640" y="320040"/>
+            <a:ext cx="11094415" cy="274320"/>
+          </a:xfrm>
+          <a:prstGeom prst="rect">
+            <a:avLst/>
+          </a:prstGeom>
+          <a:noFill/>
+        </p:spPr>
+        <p:txBody>
+          <a:bodyPr wrap="square" anchor="t" lIns="0" rIns="0" tIns="0" bIns="0"/>
+          <a:lstStyle/>
+          <a:p>
+            <a:pPr algn="l"/>
+            <a:r>
+              <a:rPr sz="1100" b="1" i="0">
+                <a:solidFill>
+                  <a:srgbClr val="54595D"/>
+                </a:solidFill>
+                <a:latin typeface="Calibri"/>
+              </a:rPr>
+              <a:t>ENGINEERING CORE  ·  Core topic 1</a:t>
+            </a:r>
+          </a:p>
+        </p:txBody>
+      </p:sp>
+      <p:sp>
+        <p:nvSpPr>
+          <p:cNvPr id="3" name="TextBox 2"/>
+          <p:cNvSpPr txBox="1"/>
+          <p:nvPr/>
+        </p:nvSpPr>
+        <p:spPr>
+          <a:xfrm>
+            <a:off x="548640" y="566928"/>
+            <a:ext cx="11094415" cy="822960"/>
+          </a:xfrm>
+          <a:prstGeom prst="rect">
+            <a:avLst/>
+          </a:prstGeom>
+          <a:noFill/>
+        </p:spPr>
+        <p:txBody>
+          <a:bodyPr wrap="square" anchor="ctr" lIns="0" rIns="0" tIns="0" bIns="0"/>
+          <a:lstStyle/>
+          <a:p>
+            <a:pPr algn="l"/>
+            <a:r>
+              <a:rPr sz="3200" b="1" i="0">
+                <a:solidFill>
+                  <a:srgbClr val="03306E"/>
+                </a:solidFill>
+                <a:latin typeface="Cambria"/>
+              </a:rPr>
+              <a:t>Activity: Maintenance plan</a:t>
+            </a:r>
+          </a:p>
+        </p:txBody>
+      </p:sp>
+      <p:sp>
+        <p:nvSpPr>
+          <p:cNvPr id="4" name="TextBox 3"/>
+          <p:cNvSpPr txBox="1"/>
+          <p:nvPr/>
+        </p:nvSpPr>
+        <p:spPr>
+          <a:xfrm>
+            <a:off x="548640" y="6446520"/>
+            <a:ext cx="8229600" cy="274320"/>
+          </a:xfrm>
+          <a:prstGeom prst="rect">
+            <a:avLst/>
+          </a:prstGeom>
+          <a:noFill/>
+        </p:spPr>
+        <p:txBody>
+          <a:bodyPr wrap="square" anchor="t" lIns="0" rIns="0" tIns="0" bIns="0"/>
+          <a:lstStyle/>
+          <a:p>
+            <a:pPr algn="l"/>
+            <a:r>
+              <a:rPr sz="1000" b="0" i="0">
+                <a:solidFill>
+                  <a:srgbClr val="54595D"/>
+                </a:solidFill>
+                <a:latin typeface="Calibri"/>
+              </a:rPr>
+              <a:t>Design and Development for Engineering and Manufacturing T Level  ·  Maintenance, Repair and Installation</a:t>
+            </a:r>
+          </a:p>
+        </p:txBody>
+      </p:sp>
+      <p:sp>
+        <p:nvSpPr>
+          <p:cNvPr id="5" name="TextBox 4"/>
+          <p:cNvSpPr txBox="1"/>
+          <p:nvPr/>
+        </p:nvSpPr>
+        <p:spPr>
+          <a:xfrm>
+            <a:off x="10728655" y="6446520"/>
+            <a:ext cx="914400" cy="274320"/>
+          </a:xfrm>
+          <a:prstGeom prst="rect">
+            <a:avLst/>
+          </a:prstGeom>
+          <a:noFill/>
+        </p:spPr>
+        <p:txBody>
+          <a:bodyPr wrap="square" anchor="t" lIns="0" rIns="0" tIns="0" bIns="0"/>
+          <a:lstStyle/>
+          <a:p>
+            <a:pPr algn="r"/>
+            <a:r>
+              <a:rPr sz="1000" b="0" i="0">
+                <a:solidFill>
+                  <a:srgbClr val="54595D"/>
+                </a:solidFill>
+                <a:latin typeface="Calibri"/>
+              </a:rPr>
+              <a:t>12</a:t>
+            </a:r>
+          </a:p>
+        </p:txBody>
+      </p:sp>
+      <p:sp>
+        <p:nvSpPr>
+          <p:cNvPr id="6" name="Rounded Rectangle 5"/>
+          <p:cNvSpPr/>
+          <p:nvPr/>
+        </p:nvSpPr>
+        <p:spPr>
+          <a:xfrm>
+            <a:off x="548640" y="1508760"/>
+            <a:ext cx="2011680" cy="457200"/>
+          </a:xfrm>
+          <a:prstGeom prst="roundRect">
+            <a:avLst>
+              <a:gd name="adj" fmla="val 50000"/>
+            </a:avLst>
+          </a:prstGeom>
+          <a:solidFill>
+            <a:srgbClr val="F2B705"/>
+          </a:solidFill>
+          <a:ln>
+            <a:noFill/>
+          </a:ln>
+          <a:effectLst/>
+        </p:spPr>
+        <p:style>
+          <a:lnRef idx="1">
+            <a:schemeClr val="accent1"/>
+          </a:lnRef>
+          <a:fillRef idx="3">
+            <a:schemeClr val="accent1"/>
+          </a:fillRef>
+          <a:effectRef idx="2">
+            <a:schemeClr val="accent1"/>
+          </a:effectRef>
+          <a:fontRef idx="minor">
+            <a:schemeClr val="lt1"/>
+          </a:fontRef>
+        </p:style>
+        <p:txBody>
+          <a:bodyPr rtlCol="0" anchor="ctr"/>
+          <a:lstStyle/>
+          <a:p/>
+        </p:txBody>
+      </p:sp>
+      <p:sp>
+        <p:nvSpPr>
+          <p:cNvPr id="7" name="TextBox 6"/>
+          <p:cNvSpPr txBox="1"/>
+          <p:nvPr/>
+        </p:nvSpPr>
+        <p:spPr>
+          <a:xfrm>
+            <a:off x="548640" y="1508760"/>
+            <a:ext cx="2011680" cy="457200"/>
+          </a:xfrm>
+          <a:prstGeom prst="rect">
+            <a:avLst/>
+          </a:prstGeom>
+          <a:noFill/>
+        </p:spPr>
+        <p:txBody>
+          <a:bodyPr wrap="square" anchor="ctr" lIns="0" rIns="0" tIns="0" bIns="0"/>
+          <a:lstStyle/>
+          <a:p>
+            <a:pPr algn="ctr"/>
+            <a:r>
+              <a:rPr sz="1400" b="1" i="0">
+                <a:solidFill>
+                  <a:srgbClr val="202122"/>
+                </a:solidFill>
+                <a:latin typeface="Calibri"/>
+              </a:rPr>
+              <a:t>20 minutes</a:t>
+            </a:r>
+          </a:p>
+        </p:txBody>
+      </p:sp>
+      <p:sp>
+        <p:nvSpPr>
+          <p:cNvPr id="8" name="TextBox 7"/>
+          <p:cNvSpPr txBox="1"/>
+          <p:nvPr/>
+        </p:nvSpPr>
+        <p:spPr>
+          <a:xfrm>
+            <a:off x="2743200" y="1508760"/>
+            <a:ext cx="4754880" cy="457200"/>
+          </a:xfrm>
+          <a:prstGeom prst="rect">
+            <a:avLst/>
+          </a:prstGeom>
+          <a:noFill/>
+        </p:spPr>
+        <p:txBody>
+          <a:bodyPr wrap="square" anchor="ctr" lIns="0" rIns="0" tIns="0" bIns="0"/>
+          <a:lstStyle/>
+          <a:p>
+            <a:pPr algn="l"/>
+            <a:r>
+              <a:rPr sz="1400" b="0" i="1">
+                <a:solidFill>
+                  <a:srgbClr val="54595D"/>
+                </a:solidFill>
+                <a:latin typeface="Calibri"/>
+              </a:rPr>
+              <a:t>Pairs</a:t>
+            </a:r>
+          </a:p>
+        </p:txBody>
+      </p:sp>
+      <p:sp>
+        <p:nvSpPr>
+          <p:cNvPr id="9" name="Oval 8"/>
+          <p:cNvSpPr/>
+          <p:nvPr/>
+        </p:nvSpPr>
+        <p:spPr>
+          <a:xfrm>
+            <a:off x="548640" y="2482596"/>
+            <a:ext cx="384048" cy="384048"/>
+          </a:xfrm>
+          <a:prstGeom prst="ellipse">
+            <a:avLst/>
+          </a:prstGeom>
+          <a:solidFill>
+            <a:srgbClr val="0645AD"/>
+          </a:solidFill>
+          <a:ln>
+            <a:noFill/>
+          </a:ln>
+          <a:effectLst/>
+        </p:spPr>
+        <p:style>
+          <a:lnRef idx="1">
+            <a:schemeClr val="accent1"/>
+          </a:lnRef>
+          <a:fillRef idx="3">
+            <a:schemeClr val="accent1"/>
+          </a:fillRef>
+          <a:effectRef idx="2">
+            <a:schemeClr val="accent1"/>
+          </a:effectRef>
+          <a:fontRef idx="minor">
+            <a:schemeClr val="lt1"/>
+          </a:fontRef>
+        </p:style>
+        <p:txBody>
+          <a:bodyPr rtlCol="0" anchor="ctr" lIns="0" rIns="0" tIns="0" bIns="0"/>
+          <a:lstStyle/>
+          <a:p>
+            <a:pPr algn="ctr"/>
+            <a:r>
+              <a:rPr sz="1300" b="1">
+                <a:solidFill>
+                  <a:srgbClr val="FFFFFF"/>
+                </a:solidFill>
+                <a:latin typeface="Calibri"/>
+              </a:rPr>
+              <a:t>1</a:t>
+            </a:r>
+          </a:p>
+        </p:txBody>
+      </p:sp>
+      <p:sp>
+        <p:nvSpPr>
+          <p:cNvPr id="10" name="TextBox 9"/>
+          <p:cNvSpPr txBox="1"/>
+          <p:nvPr/>
+        </p:nvSpPr>
+        <p:spPr>
+          <a:xfrm>
+            <a:off x="1143000" y="2240280"/>
+            <a:ext cx="5943600" cy="868680"/>
+          </a:xfrm>
+          <a:prstGeom prst="rect">
+            <a:avLst/>
+          </a:prstGeom>
+          <a:noFill/>
+        </p:spPr>
+        <p:txBody>
+          <a:bodyPr wrap="square" anchor="ctr" lIns="0" rIns="0" tIns="0" bIns="0"/>
+          <a:lstStyle/>
+          <a:p>
+            <a:pPr algn="l"/>
+            <a:r>
+              <a:rPr sz="1700" b="0" i="0">
+                <a:solidFill>
+                  <a:srgbClr val="202122"/>
+                </a:solidFill>
+                <a:latin typeface="Calibri"/>
+              </a:rPr>
+              <a:t>Choose a workshop machine such as a pillar drill or lathe.</a:t>
+            </a:r>
+          </a:p>
+        </p:txBody>
+      </p:sp>
+      <p:sp>
+        <p:nvSpPr>
+          <p:cNvPr id="11" name="Oval 10"/>
+          <p:cNvSpPr/>
+          <p:nvPr/>
+        </p:nvSpPr>
+        <p:spPr>
+          <a:xfrm>
+            <a:off x="548640" y="3461004"/>
+            <a:ext cx="384048" cy="384048"/>
+          </a:xfrm>
+          <a:prstGeom prst="ellipse">
+            <a:avLst/>
+          </a:prstGeom>
+          <a:solidFill>
+            <a:srgbClr val="0645AD"/>
+          </a:solidFill>
+          <a:ln>
+            <a:noFill/>
+          </a:ln>
+          <a:effectLst/>
+        </p:spPr>
+        <p:style>
+          <a:lnRef idx="1">
+            <a:schemeClr val="accent1"/>
+          </a:lnRef>
+          <a:fillRef idx="3">
+            <a:schemeClr val="accent1"/>
+          </a:fillRef>
+          <a:effectRef idx="2">
+            <a:schemeClr val="accent1"/>
+          </a:effectRef>
+          <a:fontRef idx="minor">
+            <a:schemeClr val="lt1"/>
+          </a:fontRef>
+        </p:style>
+        <p:txBody>
+          <a:bodyPr rtlCol="0" anchor="ctr" lIns="0" rIns="0" tIns="0" bIns="0"/>
+          <a:lstStyle/>
+          <a:p>
+            <a:pPr algn="ctr"/>
+            <a:r>
+              <a:rPr sz="1300" b="1">
+                <a:solidFill>
+                  <a:srgbClr val="FFFFFF"/>
+                </a:solidFill>
+                <a:latin typeface="Calibri"/>
+              </a:rPr>
+              <a:t>2</a:t>
+            </a:r>
+          </a:p>
+        </p:txBody>
+      </p:sp>
+      <p:sp>
+        <p:nvSpPr>
+          <p:cNvPr id="12" name="TextBox 11"/>
+          <p:cNvSpPr txBox="1"/>
+          <p:nvPr/>
+        </p:nvSpPr>
+        <p:spPr>
+          <a:xfrm>
+            <a:off x="1143000" y="3218688"/>
+            <a:ext cx="5943600" cy="868680"/>
+          </a:xfrm>
+          <a:prstGeom prst="rect">
+            <a:avLst/>
+          </a:prstGeom>
+          <a:noFill/>
+        </p:spPr>
+        <p:txBody>
+          <a:bodyPr wrap="square" anchor="ctr" lIns="0" rIns="0" tIns="0" bIns="0"/>
+          <a:lstStyle/>
+          <a:p>
+            <a:pPr algn="l"/>
+            <a:r>
+              <a:rPr sz="1700" b="0" i="0">
+                <a:solidFill>
+                  <a:srgbClr val="202122"/>
+                </a:solidFill>
+                <a:latin typeface="Calibri"/>
+              </a:rPr>
+              <a:t>Write a preventative maintenance schedule.</a:t>
+            </a:r>
+          </a:p>
+        </p:txBody>
+      </p:sp>
+      <p:sp>
+        <p:nvSpPr>
+          <p:cNvPr id="13" name="Oval 12"/>
+          <p:cNvSpPr/>
+          <p:nvPr/>
+        </p:nvSpPr>
+        <p:spPr>
+          <a:xfrm>
+            <a:off x="548640" y="4439412"/>
+            <a:ext cx="384048" cy="384048"/>
+          </a:xfrm>
+          <a:prstGeom prst="ellipse">
+            <a:avLst/>
+          </a:prstGeom>
+          <a:solidFill>
+            <a:srgbClr val="0645AD"/>
+          </a:solidFill>
+          <a:ln>
+            <a:noFill/>
+          </a:ln>
+          <a:effectLst/>
+        </p:spPr>
+        <p:style>
+          <a:lnRef idx="1">
+            <a:schemeClr val="accent1"/>
+          </a:lnRef>
+          <a:fillRef idx="3">
+            <a:schemeClr val="accent1"/>
+          </a:fillRef>
+          <a:effectRef idx="2">
+            <a:schemeClr val="accent1"/>
+          </a:effectRef>
+          <a:fontRef idx="minor">
+            <a:schemeClr val="lt1"/>
+          </a:fontRef>
+        </p:style>
+        <p:txBody>
+          <a:bodyPr rtlCol="0" anchor="ctr" lIns="0" rIns="0" tIns="0" bIns="0"/>
+          <a:lstStyle/>
+          <a:p>
+            <a:pPr algn="ctr"/>
+            <a:r>
+              <a:rPr sz="1300" b="1">
+                <a:solidFill>
+                  <a:srgbClr val="FFFFFF"/>
+                </a:solidFill>
+                <a:latin typeface="Calibri"/>
+              </a:rPr>
+              <a:t>3</a:t>
+            </a:r>
+          </a:p>
+        </p:txBody>
+      </p:sp>
+      <p:sp>
+        <p:nvSpPr>
+          <p:cNvPr id="14" name="TextBox 13"/>
+          <p:cNvSpPr txBox="1"/>
+          <p:nvPr/>
+        </p:nvSpPr>
+        <p:spPr>
+          <a:xfrm>
+            <a:off x="1143000" y="4197096"/>
+            <a:ext cx="5943600" cy="868680"/>
+          </a:xfrm>
+          <a:prstGeom prst="rect">
+            <a:avLst/>
+          </a:prstGeom>
+          <a:noFill/>
+        </p:spPr>
+        <p:txBody>
+          <a:bodyPr wrap="square" anchor="ctr" lIns="0" rIns="0" tIns="0" bIns="0"/>
+          <a:lstStyle/>
+          <a:p>
+            <a:pPr algn="l"/>
+            <a:r>
+              <a:rPr sz="1700" b="0" i="0">
+                <a:solidFill>
+                  <a:srgbClr val="202122"/>
+                </a:solidFill>
+                <a:latin typeface="Calibri"/>
+              </a:rPr>
+              <a:t>Suggest one condition you could monitor.</a:t>
+            </a:r>
+          </a:p>
+        </p:txBody>
+      </p:sp>
+      <p:sp>
+        <p:nvSpPr>
+          <p:cNvPr id="15" name="Oval 14"/>
+          <p:cNvSpPr/>
+          <p:nvPr/>
+        </p:nvSpPr>
+        <p:spPr>
+          <a:xfrm>
+            <a:off x="548640" y="5417820"/>
+            <a:ext cx="384048" cy="384048"/>
+          </a:xfrm>
+          <a:prstGeom prst="ellipse">
+            <a:avLst/>
+          </a:prstGeom>
+          <a:solidFill>
+            <a:srgbClr val="0645AD"/>
+          </a:solidFill>
+          <a:ln>
+            <a:noFill/>
+          </a:ln>
+          <a:effectLst/>
+        </p:spPr>
+        <p:style>
+          <a:lnRef idx="1">
+            <a:schemeClr val="accent1"/>
+          </a:lnRef>
+          <a:fillRef idx="3">
+            <a:schemeClr val="accent1"/>
+          </a:fillRef>
+          <a:effectRef idx="2">
+            <a:schemeClr val="accent1"/>
+          </a:effectRef>
+          <a:fontRef idx="minor">
+            <a:schemeClr val="lt1"/>
+          </a:fontRef>
+        </p:style>
+        <p:txBody>
+          <a:bodyPr rtlCol="0" anchor="ctr" lIns="0" rIns="0" tIns="0" bIns="0"/>
+          <a:lstStyle/>
+          <a:p>
+            <a:pPr algn="ctr"/>
+            <a:r>
+              <a:rPr sz="1300" b="1">
+                <a:solidFill>
+                  <a:srgbClr val="FFFFFF"/>
+                </a:solidFill>
+                <a:latin typeface="Calibri"/>
+              </a:rPr>
+              <a:t>4</a:t>
+            </a:r>
+          </a:p>
+        </p:txBody>
+      </p:sp>
+      <p:sp>
+        <p:nvSpPr>
+          <p:cNvPr id="16" name="TextBox 15"/>
+          <p:cNvSpPr txBox="1"/>
+          <p:nvPr/>
+        </p:nvSpPr>
+        <p:spPr>
+          <a:xfrm>
+            <a:off x="1143000" y="5175504"/>
+            <a:ext cx="5943600" cy="868680"/>
+          </a:xfrm>
+          <a:prstGeom prst="rect">
+            <a:avLst/>
+          </a:prstGeom>
+          <a:noFill/>
+        </p:spPr>
+        <p:txBody>
+          <a:bodyPr wrap="square" anchor="ctr" lIns="0" rIns="0" tIns="0" bIns="0"/>
+          <a:lstStyle/>
+          <a:p>
+            <a:pPr algn="l"/>
+            <a:r>
+              <a:rPr sz="1700" b="0" i="0">
+                <a:solidFill>
+                  <a:srgbClr val="202122"/>
+                </a:solidFill>
+                <a:latin typeface="Calibri"/>
+              </a:rPr>
+              <a:t>Explain how your plan reduces environmental impact.</a:t>
+            </a:r>
+          </a:p>
+        </p:txBody>
+      </p:sp>
+      <p:sp>
+        <p:nvSpPr>
+          <p:cNvPr id="17" name="Rounded Rectangle 16"/>
+          <p:cNvSpPr/>
+          <p:nvPr/>
+        </p:nvSpPr>
+        <p:spPr>
+          <a:xfrm>
+            <a:off x="7772400" y="1508760"/>
+            <a:ext cx="3867912" cy="4572000"/>
+          </a:xfrm>
+          <a:prstGeom prst="roundRect">
+            <a:avLst>
+              <a:gd name="adj" fmla="val 8000"/>
+            </a:avLst>
+          </a:prstGeom>
+          <a:solidFill>
+            <a:srgbClr val="EAF3FF"/>
+          </a:solidFill>
+          <a:ln>
+            <a:noFill/>
+          </a:ln>
+          <a:effectLst/>
+        </p:spPr>
+        <p:style>
+          <a:lnRef idx="1">
+            <a:schemeClr val="accent1"/>
+          </a:lnRef>
+          <a:fillRef idx="3">
+            <a:schemeClr val="accent1"/>
+          </a:fillRef>
+          <a:effectRef idx="2">
+            <a:schemeClr val="accent1"/>
+          </a:effectRef>
+          <a:fontRef idx="minor">
+            <a:schemeClr val="lt1"/>
+          </a:fontRef>
+        </p:style>
+        <p:txBody>
+          <a:bodyPr rtlCol="0" anchor="ctr"/>
+          <a:lstStyle/>
+          <a:p/>
+        </p:txBody>
+      </p:sp>
+      <p:sp>
+        <p:nvSpPr>
+          <p:cNvPr id="18" name="TextBox 17"/>
+          <p:cNvSpPr txBox="1"/>
+          <p:nvPr/>
+        </p:nvSpPr>
+        <p:spPr>
+          <a:xfrm>
+            <a:off x="8046720" y="1737360"/>
+            <a:ext cx="3291840" cy="365760"/>
+          </a:xfrm>
+          <a:prstGeom prst="rect">
+            <a:avLst/>
+          </a:prstGeom>
+          <a:noFill/>
+        </p:spPr>
+        <p:txBody>
+          <a:bodyPr wrap="square" anchor="t" lIns="0" rIns="0" tIns="0" bIns="0"/>
+          <a:lstStyle/>
+          <a:p>
+            <a:pPr algn="l"/>
+            <a:r>
+              <a:rPr sz="1300" b="1" i="0">
+                <a:solidFill>
+                  <a:srgbClr val="0645AD"/>
+                </a:solidFill>
+                <a:latin typeface="Calibri"/>
+              </a:rPr>
+              <a:t>SUCCESS CRITERIA</a:t>
+            </a:r>
+          </a:p>
+        </p:txBody>
+      </p:sp>
+      <p:sp>
+        <p:nvSpPr>
+          <p:cNvPr id="19" name="TextBox 18"/>
+          <p:cNvSpPr txBox="1"/>
+          <p:nvPr/>
+        </p:nvSpPr>
+        <p:spPr>
+          <a:xfrm>
+            <a:off x="8046720" y="2240280"/>
+            <a:ext cx="3337560" cy="3657600"/>
+          </a:xfrm>
+          <a:prstGeom prst="rect">
+            <a:avLst/>
+          </a:prstGeom>
+          <a:noFill/>
+        </p:spPr>
+        <p:txBody>
+          <a:bodyPr wrap="square" lIns="0" rIns="0" tIns="0" bIns="0">
+            <a:spAutoFit/>
+          </a:bodyPr>
+          <a:lstStyle/>
+          <a:p>
+            <a:pPr marL="274320" indent="-274320">
+              <a:spcAft>
+                <a:spcPts val="810"/>
+              </a:spcAft>
+              <a:buClr>
+                <a:srgbClr val="0645AD"/>
+              </a:buClr>
+              <a:buFont typeface="Arial"/>
+              <a:buChar char="•"/>
+            </a:pPr>
+            <a:r>
+              <a:rPr sz="1800" b="0">
+                <a:solidFill>
+                  <a:srgbClr val="202122"/>
+                </a:solidFill>
+                <a:latin typeface="Calibri"/>
+              </a:rPr>
+              <a:t>Tasks and frequencies realistic</a:t>
+            </a:r>
+          </a:p>
+          <a:p>
+            <a:pPr marL="274320" indent="-274320">
+              <a:spcAft>
+                <a:spcPts val="810"/>
+              </a:spcAft>
+              <a:buClr>
+                <a:srgbClr val="0645AD"/>
+              </a:buClr>
+              <a:buFont typeface="Arial"/>
+              <a:buChar char="•"/>
+            </a:pPr>
+            <a:r>
+              <a:rPr sz="1800" b="0">
+                <a:solidFill>
+                  <a:srgbClr val="202122"/>
+                </a:solidFill>
+                <a:latin typeface="Calibri"/>
+              </a:rPr>
+              <a:t>Monitoring idea is practical</a:t>
+            </a:r>
+          </a:p>
+          <a:p>
+            <a:pPr marL="274320" indent="-274320">
+              <a:spcAft>
+                <a:spcPts val="810"/>
+              </a:spcAft>
+              <a:buClr>
+                <a:srgbClr val="0645AD"/>
+              </a:buClr>
+              <a:buFont typeface="Arial"/>
+              <a:buChar char="•"/>
+            </a:pPr>
+            <a:r>
+              <a:rPr sz="1800" b="0">
+                <a:solidFill>
+                  <a:srgbClr val="202122"/>
+                </a:solidFill>
+                <a:latin typeface="Calibri"/>
+              </a:rPr>
+              <a:t>Environmental benefit explained</a:t>
+            </a:r>
+          </a:p>
+        </p:txBody>
+      </p:sp>
+    </p:spTree>
+  </p:cSld>
+  <p:clrMapOvr>
+    <a:masterClrMapping/>
+  </p:clrMapOvr>
+</p:sld>
+</file>
+
+<file path=ppt/slides/slide13.xml><?xml version="1.0" encoding="utf-8"?>
+<p:sld xmlns:a="http://schemas.openxmlformats.org/drawingml/2006/main" xmlns:p="http://schemas.openxmlformats.org/presentationml/2006/main" xmlns:r="http://schemas.openxmlformats.org/officeDocument/2006/relationships">
+  <p:cSld>
+    <p:bg>
+      <p:bgPr>
+        <a:solidFill>
+          <a:srgbClr val="03306E"/>
+        </a:solidFill>
+        <a:effectLst/>
+      </p:bgPr>
+    </p:bg>
+    <p:spTree>
+      <p:nvGrpSpPr>
+        <p:cNvPr id="1" name=""/>
+        <p:cNvGrpSpPr/>
+        <p:nvPr/>
+      </p:nvGrpSpPr>
+      <p:grpSpPr/>
+      <p:sp>
+        <p:nvSpPr>
+          <p:cNvPr id="2" name="TextBox 1"/>
+          <p:cNvSpPr txBox="1"/>
+          <p:nvPr/>
+        </p:nvSpPr>
+        <p:spPr>
+          <a:xfrm>
+            <a:off x="548640" y="320040"/>
+            <a:ext cx="11094415" cy="274320"/>
+          </a:xfrm>
+          <a:prstGeom prst="rect">
+            <a:avLst/>
+          </a:prstGeom>
+          <a:noFill/>
+        </p:spPr>
+        <p:txBody>
+          <a:bodyPr wrap="square" anchor="t" lIns="0" rIns="0" tIns="0" bIns="0"/>
+          <a:lstStyle/>
+          <a:p>
+            <a:pPr algn="l"/>
+            <a:r>
+              <a:rPr sz="1100" b="1" i="0">
+                <a:solidFill>
+                  <a:srgbClr val="A9C8F0"/>
+                </a:solidFill>
+                <a:latin typeface="Calibri"/>
+              </a:rPr>
+              <a:t>ENGINEERING CORE  ·  Core topic 1</a:t>
+            </a:r>
+          </a:p>
+        </p:txBody>
+      </p:sp>
+      <p:sp>
+        <p:nvSpPr>
+          <p:cNvPr id="3" name="TextBox 2"/>
+          <p:cNvSpPr txBox="1"/>
+          <p:nvPr/>
+        </p:nvSpPr>
+        <p:spPr>
+          <a:xfrm>
+            <a:off x="548640" y="566928"/>
+            <a:ext cx="11094415" cy="822960"/>
+          </a:xfrm>
+          <a:prstGeom prst="rect">
+            <a:avLst/>
+          </a:prstGeom>
+          <a:noFill/>
+        </p:spPr>
+        <p:txBody>
+          <a:bodyPr wrap="square" anchor="ctr" lIns="0" rIns="0" tIns="0" bIns="0"/>
+          <a:lstStyle/>
+          <a:p>
+            <a:pPr algn="l"/>
+            <a:r>
+              <a:rPr sz="3200" b="1" i="0">
+                <a:solidFill>
+                  <a:srgbClr val="FFFFFF"/>
+                </a:solidFill>
+                <a:latin typeface="Cambria"/>
+              </a:rPr>
+              <a:t>Exit ticket</a:t>
+            </a:r>
+          </a:p>
+        </p:txBody>
+      </p:sp>
+      <p:sp>
+        <p:nvSpPr>
+          <p:cNvPr id="4" name="Oval 3"/>
+          <p:cNvSpPr/>
+          <p:nvPr/>
+        </p:nvSpPr>
+        <p:spPr>
+          <a:xfrm>
+            <a:off x="548640" y="1737360"/>
+            <a:ext cx="502920" cy="502920"/>
+          </a:xfrm>
+          <a:prstGeom prst="ellipse">
+            <a:avLst/>
+          </a:prstGeom>
+          <a:solidFill>
+            <a:srgbClr val="F2B705"/>
+          </a:solidFill>
+          <a:ln>
+            <a:noFill/>
+          </a:ln>
+          <a:effectLst/>
+        </p:spPr>
+        <p:style>
+          <a:lnRef idx="1">
+            <a:schemeClr val="accent1"/>
+          </a:lnRef>
+          <a:fillRef idx="3">
+            <a:schemeClr val="accent1"/>
+          </a:fillRef>
+          <a:effectRef idx="2">
+            <a:schemeClr val="accent1"/>
+          </a:effectRef>
+          <a:fontRef idx="minor">
+            <a:schemeClr val="lt1"/>
+          </a:fontRef>
+        </p:style>
+        <p:txBody>
+          <a:bodyPr rtlCol="0" anchor="ctr" lIns="0" rIns="0" tIns="0" bIns="0"/>
+          <a:lstStyle/>
+          <a:p>
+            <a:pPr algn="ctr"/>
+            <a:r>
+              <a:rPr sz="1700" b="1">
+                <a:solidFill>
+                  <a:srgbClr val="202122"/>
+                </a:solidFill>
+                <a:latin typeface="Calibri"/>
+              </a:rPr>
+              <a:t>1</a:t>
+            </a:r>
+          </a:p>
+        </p:txBody>
+      </p:sp>
+      <p:sp>
+        <p:nvSpPr>
+          <p:cNvPr id="5" name="TextBox 4"/>
+          <p:cNvSpPr txBox="1"/>
+          <p:nvPr/>
+        </p:nvSpPr>
+        <p:spPr>
+          <a:xfrm>
+            <a:off x="1325880" y="1645920"/>
+            <a:ext cx="6583680" cy="822960"/>
+          </a:xfrm>
+          <a:prstGeom prst="rect">
+            <a:avLst/>
+          </a:prstGeom>
+          <a:noFill/>
+        </p:spPr>
+        <p:txBody>
+          <a:bodyPr wrap="square" anchor="ctr" lIns="0" rIns="0" tIns="0" bIns="0"/>
+          <a:lstStyle/>
+          <a:p>
+            <a:pPr algn="l"/>
+            <a:r>
+              <a:rPr sz="2000" b="0" i="0">
+                <a:solidFill>
+                  <a:srgbClr val="FFFFFF"/>
+                </a:solidFill>
+                <a:latin typeface="Calibri"/>
+              </a:rPr>
+              <a:t>When is reactive maintenance acceptable?</a:t>
+            </a:r>
+          </a:p>
+        </p:txBody>
+      </p:sp>
+      <p:sp>
+        <p:nvSpPr>
+          <p:cNvPr id="6" name="Oval 5"/>
+          <p:cNvSpPr/>
+          <p:nvPr/>
+        </p:nvSpPr>
+        <p:spPr>
+          <a:xfrm>
+            <a:off x="548640" y="2697480"/>
+            <a:ext cx="502920" cy="502920"/>
+          </a:xfrm>
+          <a:prstGeom prst="ellipse">
+            <a:avLst/>
+          </a:prstGeom>
+          <a:solidFill>
+            <a:srgbClr val="F2B705"/>
+          </a:solidFill>
+          <a:ln>
+            <a:noFill/>
+          </a:ln>
+          <a:effectLst/>
+        </p:spPr>
+        <p:style>
+          <a:lnRef idx="1">
+            <a:schemeClr val="accent1"/>
+          </a:lnRef>
+          <a:fillRef idx="3">
+            <a:schemeClr val="accent1"/>
+          </a:fillRef>
+          <a:effectRef idx="2">
+            <a:schemeClr val="accent1"/>
+          </a:effectRef>
+          <a:fontRef idx="minor">
+            <a:schemeClr val="lt1"/>
+          </a:fontRef>
+        </p:style>
+        <p:txBody>
+          <a:bodyPr rtlCol="0" anchor="ctr" lIns="0" rIns="0" tIns="0" bIns="0"/>
+          <a:lstStyle/>
+          <a:p>
+            <a:pPr algn="ctr"/>
+            <a:r>
+              <a:rPr sz="1700" b="1">
+                <a:solidFill>
+                  <a:srgbClr val="202122"/>
+                </a:solidFill>
+                <a:latin typeface="Calibri"/>
+              </a:rPr>
+              <a:t>2</a:t>
+            </a:r>
+          </a:p>
+        </p:txBody>
+      </p:sp>
+      <p:sp>
+        <p:nvSpPr>
+          <p:cNvPr id="7" name="TextBox 6"/>
+          <p:cNvSpPr txBox="1"/>
+          <p:nvPr/>
+        </p:nvSpPr>
+        <p:spPr>
+          <a:xfrm>
+            <a:off x="1325880" y="2606040"/>
+            <a:ext cx="6583680" cy="822960"/>
+          </a:xfrm>
+          <a:prstGeom prst="rect">
+            <a:avLst/>
+          </a:prstGeom>
+          <a:noFill/>
+        </p:spPr>
+        <p:txBody>
+          <a:bodyPr wrap="square" anchor="ctr" lIns="0" rIns="0" tIns="0" bIns="0"/>
+          <a:lstStyle/>
+          <a:p>
+            <a:pPr algn="l"/>
+            <a:r>
+              <a:rPr sz="2000" b="0" i="0">
+                <a:solidFill>
+                  <a:srgbClr val="FFFFFF"/>
+                </a:solidFill>
+                <a:latin typeface="Calibri"/>
+              </a:rPr>
+              <a:t>What happens during a shutdown?</a:t>
+            </a:r>
+          </a:p>
+        </p:txBody>
+      </p:sp>
+      <p:sp>
+        <p:nvSpPr>
+          <p:cNvPr id="8" name="Oval 7"/>
+          <p:cNvSpPr/>
+          <p:nvPr/>
+        </p:nvSpPr>
+        <p:spPr>
+          <a:xfrm>
+            <a:off x="548640" y="3657600"/>
+            <a:ext cx="502920" cy="502920"/>
+          </a:xfrm>
+          <a:prstGeom prst="ellipse">
+            <a:avLst/>
+          </a:prstGeom>
+          <a:solidFill>
+            <a:srgbClr val="F2B705"/>
+          </a:solidFill>
+          <a:ln>
+            <a:noFill/>
+          </a:ln>
+          <a:effectLst/>
+        </p:spPr>
+        <p:style>
+          <a:lnRef idx="1">
+            <a:schemeClr val="accent1"/>
+          </a:lnRef>
+          <a:fillRef idx="3">
+            <a:schemeClr val="accent1"/>
+          </a:fillRef>
+          <a:effectRef idx="2">
+            <a:schemeClr val="accent1"/>
+          </a:effectRef>
+          <a:fontRef idx="minor">
+            <a:schemeClr val="lt1"/>
+          </a:fontRef>
+        </p:style>
+        <p:txBody>
+          <a:bodyPr rtlCol="0" anchor="ctr" lIns="0" rIns="0" tIns="0" bIns="0"/>
+          <a:lstStyle/>
+          <a:p>
+            <a:pPr algn="ctr"/>
+            <a:r>
+              <a:rPr sz="1700" b="1">
+                <a:solidFill>
+                  <a:srgbClr val="202122"/>
+                </a:solidFill>
+                <a:latin typeface="Calibri"/>
+              </a:rPr>
+              <a:t>3</a:t>
+            </a:r>
+          </a:p>
+        </p:txBody>
+      </p:sp>
+      <p:sp>
+        <p:nvSpPr>
+          <p:cNvPr id="9" name="TextBox 8"/>
+          <p:cNvSpPr txBox="1"/>
+          <p:nvPr/>
+        </p:nvSpPr>
+        <p:spPr>
+          <a:xfrm>
+            <a:off x="1325880" y="3566160"/>
+            <a:ext cx="6583680" cy="822960"/>
+          </a:xfrm>
+          <a:prstGeom prst="rect">
+            <a:avLst/>
+          </a:prstGeom>
+          <a:noFill/>
+        </p:spPr>
+        <p:txBody>
+          <a:bodyPr wrap="square" anchor="ctr" lIns="0" rIns="0" tIns="0" bIns="0"/>
+          <a:lstStyle/>
+          <a:p>
+            <a:pPr algn="l"/>
+            <a:r>
+              <a:rPr sz="2000" b="0" i="0">
+                <a:solidFill>
+                  <a:srgbClr val="FFFFFF"/>
+                </a:solidFill>
+                <a:latin typeface="Calibri"/>
+              </a:rPr>
+              <a:t>Name one tool used in maintenance.</a:t>
+            </a:r>
+          </a:p>
+        </p:txBody>
+      </p:sp>
+      <p:sp>
+        <p:nvSpPr>
+          <p:cNvPr id="10" name="Rounded Rectangle 9"/>
+          <p:cNvSpPr/>
+          <p:nvPr/>
+        </p:nvSpPr>
+        <p:spPr>
+          <a:xfrm>
+            <a:off x="8229600" y="1645920"/>
+            <a:ext cx="3410712" cy="2926080"/>
+          </a:xfrm>
+          <a:prstGeom prst="roundRect">
+            <a:avLst>
+              <a:gd name="adj" fmla="val 8000"/>
+            </a:avLst>
+          </a:prstGeom>
+          <a:solidFill>
+            <a:srgbClr val="0645AD"/>
+          </a:solidFill>
+          <a:ln>
+            <a:noFill/>
+          </a:ln>
+          <a:effectLst/>
+        </p:spPr>
+        <p:style>
+          <a:lnRef idx="1">
+            <a:schemeClr val="accent1"/>
+          </a:lnRef>
+          <a:fillRef idx="3">
+            <a:schemeClr val="accent1"/>
+          </a:fillRef>
+          <a:effectRef idx="2">
+            <a:schemeClr val="accent1"/>
+          </a:effectRef>
+          <a:fontRef idx="minor">
+            <a:schemeClr val="lt1"/>
+          </a:fontRef>
+        </p:style>
+        <p:txBody>
+          <a:bodyPr rtlCol="0" anchor="ctr"/>
+          <a:lstStyle/>
+          <a:p/>
+        </p:txBody>
+      </p:sp>
+      <p:sp>
+        <p:nvSpPr>
+          <p:cNvPr id="11" name="TextBox 10"/>
+          <p:cNvSpPr txBox="1"/>
+          <p:nvPr/>
+        </p:nvSpPr>
+        <p:spPr>
+          <a:xfrm>
+            <a:off x="8503920" y="1874519"/>
+            <a:ext cx="2926080" cy="365760"/>
+          </a:xfrm>
+          <a:prstGeom prst="rect">
+            <a:avLst/>
+          </a:prstGeom>
+          <a:noFill/>
+        </p:spPr>
+        <p:txBody>
+          <a:bodyPr wrap="square" anchor="t" lIns="0" rIns="0" tIns="0" bIns="0"/>
+          <a:lstStyle/>
+          <a:p>
+            <a:pPr algn="l"/>
+            <a:r>
+              <a:rPr sz="1300" b="1" i="0">
+                <a:solidFill>
+                  <a:srgbClr val="A9C8F0"/>
+                </a:solidFill>
+                <a:latin typeface="Calibri"/>
+              </a:rPr>
+              <a:t>REVISE THIS TOPIC</a:t>
+            </a:r>
+          </a:p>
+        </p:txBody>
+      </p:sp>
+      <p:sp>
+        <p:nvSpPr>
+          <p:cNvPr id="12" name="TextBox 11"/>
+          <p:cNvSpPr txBox="1"/>
+          <p:nvPr/>
+        </p:nvSpPr>
+        <p:spPr>
+          <a:xfrm>
+            <a:off x="8503920" y="2286000"/>
+            <a:ext cx="2926080" cy="548640"/>
+          </a:xfrm>
+          <a:prstGeom prst="rect">
+            <a:avLst/>
+          </a:prstGeom>
+          <a:noFill/>
+        </p:spPr>
+        <p:txBody>
+          <a:bodyPr wrap="square" anchor="t" lIns="0" rIns="0" tIns="0" bIns="0"/>
+          <a:lstStyle/>
+          <a:p>
+            <a:pPr algn="l"/>
+            <a:r>
+              <a:rPr sz="1400" b="0" i="0">
+                <a:solidFill>
+                  <a:srgbClr val="FFFFFF"/>
+                </a:solidFill>
+                <a:latin typeface="Calibri"/>
+              </a:rPr>
+              <a:t>Revision notes for this lesson are on the study wiki:</a:t>
+            </a:r>
+          </a:p>
+        </p:txBody>
+      </p:sp>
+      <p:sp>
+        <p:nvSpPr>
+          <p:cNvPr id="13" name="TextBox 12"/>
+          <p:cNvSpPr txBox="1"/>
+          <p:nvPr/>
+        </p:nvSpPr>
+        <p:spPr>
+          <a:xfrm>
+            <a:off x="8503920" y="2926080"/>
+            <a:ext cx="2926080" cy="1463040"/>
+          </a:xfrm>
+          <a:prstGeom prst="rect">
+            <a:avLst/>
+          </a:prstGeom>
+          <a:noFill/>
+        </p:spPr>
+        <p:txBody>
+          <a:bodyPr wrap="square" anchor="t" lIns="0" rIns="0" tIns="0" bIns="0"/>
+          <a:lstStyle/>
+          <a:p>
+            <a:pPr algn="l"/>
+            <a:r>
+              <a:rPr sz="2000" b="1" i="0">
+                <a:solidFill>
+                  <a:srgbClr val="FFFFFF"/>
+                </a:solidFill>
+                <a:latin typeface="Cambria"/>
+              </a:rPr>
+              <a:t>Engineering Core, Part 1</a:t>
+            </a:r>
+          </a:p>
+        </p:txBody>
+      </p:sp>
+      <p:sp>
+        <p:nvSpPr>
+          <p:cNvPr id="14" name="TextBox 13"/>
+          <p:cNvSpPr txBox="1"/>
+          <p:nvPr/>
+        </p:nvSpPr>
+        <p:spPr>
+          <a:xfrm>
+            <a:off x="548640" y="5669280"/>
+            <a:ext cx="11094415" cy="548640"/>
+          </a:xfrm>
+          <a:prstGeom prst="rect">
+            <a:avLst/>
+          </a:prstGeom>
+          <a:noFill/>
+        </p:spPr>
+        <p:txBody>
+          <a:bodyPr wrap="square" anchor="t" lIns="0" rIns="0" tIns="0" bIns="0"/>
+          <a:lstStyle/>
+          <a:p>
+            <a:pPr algn="l"/>
+            <a:r>
+              <a:rPr sz="1200" b="0" i="0">
+                <a:solidFill>
+                  <a:srgbClr val="A9C8F0"/>
+                </a:solidFill>
+                <a:latin typeface="Calibri"/>
+              </a:rPr>
+              <a:t>https://lana6478.github.io/T-level-Design-Development-Engineering-Manufacturing/#/01-core-component/01-engineering-core-part1.md</a:t>
+            </a:r>
+          </a:p>
+        </p:txBody>
+      </p:sp>
+    </p:spTree>
+  </p:cSld>
+  <p:clrMapOvr>
+    <a:masterClrMapping/>
+  </p:clrMapOvr>
+</p:sld>
+</file>
+
 <file path=ppt/slides/slide2.xml><?xml version="1.0" encoding="utf-8"?>
 <p:sld xmlns:a="http://schemas.openxmlformats.org/drawingml/2006/main" xmlns:p="http://schemas.openxmlformats.org/presentationml/2006/main" xmlns:r="http://schemas.openxmlformats.org/officeDocument/2006/relationships">
   <p:cSld>
@@ -4766,6 +7289,414 @@
                 <a:latin typeface="Calibri"/>
               </a:rPr>
               <a:t>3</a:t>
+            </a:r>
+          </a:p>
+        </p:txBody>
+      </p:sp>
+      <p:sp>
+        <p:nvSpPr>
+          <p:cNvPr id="6" name="TextBox 5"/>
+          <p:cNvSpPr txBox="1"/>
+          <p:nvPr/>
+        </p:nvSpPr>
+        <p:spPr>
+          <a:xfrm>
+            <a:off x="548640" y="1554480"/>
+            <a:ext cx="6720840" cy="4617720"/>
+          </a:xfrm>
+          <a:prstGeom prst="rect">
+            <a:avLst/>
+          </a:prstGeom>
+          <a:noFill/>
+        </p:spPr>
+        <p:txBody>
+          <a:bodyPr wrap="square" lIns="0" rIns="0" tIns="0" bIns="0">
+            <a:spAutoFit/>
+          </a:bodyPr>
+          <a:lstStyle/>
+          <a:p>
+            <a:pPr>
+              <a:spcAft>
+                <a:spcPts val="1200"/>
+              </a:spcAft>
+            </a:pPr>
+            <a:r>
+              <a:rPr sz="2000" b="0">
+                <a:solidFill>
+                  <a:srgbClr val="202122"/>
+                </a:solidFill>
+                <a:latin typeface="Calibri"/>
+              </a:rPr>
+              <a:t>Planned maintenance is scheduled in advance, such as servicing a machine every 500 hours. It's predictable but may replace parts that still had life left.</a:t>
+            </a:r>
+          </a:p>
+          <a:p>
+            <a:pPr>
+              <a:spcAft>
+                <a:spcPts val="1200"/>
+              </a:spcAft>
+            </a:pPr>
+            <a:r>
+              <a:rPr sz="2000" b="0">
+                <a:solidFill>
+                  <a:srgbClr val="202122"/>
+                </a:solidFill>
+                <a:latin typeface="Calibri"/>
+              </a:rPr>
+              <a:t>Reactive maintenance fixes things when they break. There's no upfront cost, but breakdowns are unplanned and can stop production.</a:t>
+            </a:r>
+          </a:p>
+          <a:p>
+            <a:pPr>
+              <a:spcAft>
+                <a:spcPts val="1200"/>
+              </a:spcAft>
+            </a:pPr>
+            <a:r>
+              <a:rPr sz="2000" b="0">
+                <a:solidFill>
+                  <a:srgbClr val="202122"/>
+                </a:solidFill>
+                <a:latin typeface="Calibri"/>
+              </a:rPr>
+              <a:t>Preventative maintenance carries out regular checks and servicing to stop failures happening.</a:t>
+            </a:r>
+          </a:p>
+          <a:p>
+            <a:pPr>
+              <a:spcAft>
+                <a:spcPts val="1200"/>
+              </a:spcAft>
+            </a:pPr>
+            <a:r>
+              <a:rPr sz="2000" b="0">
+                <a:solidFill>
+                  <a:srgbClr val="202122"/>
+                </a:solidFill>
+                <a:latin typeface="Calibri"/>
+              </a:rPr>
+              <a:t>Condition-based monitoring uses sensors, such as for vibration or temperature, to spot early signs of wear, so work is done only when needed. It's efficient but needs sensors and data analysis.</a:t>
+            </a:r>
+          </a:p>
+        </p:txBody>
+      </p:sp>
+      <p:sp>
+        <p:nvSpPr>
+          <p:cNvPr id="7" name="Rounded Rectangle 6"/>
+          <p:cNvSpPr/>
+          <p:nvPr/>
+        </p:nvSpPr>
+        <p:spPr>
+          <a:xfrm>
+            <a:off x="7772400" y="1554480"/>
+            <a:ext cx="3867912" cy="4526280"/>
+          </a:xfrm>
+          <a:prstGeom prst="roundRect">
+            <a:avLst>
+              <a:gd name="adj" fmla="val 8000"/>
+            </a:avLst>
+          </a:prstGeom>
+          <a:solidFill>
+            <a:srgbClr val="03306E"/>
+          </a:solidFill>
+          <a:ln>
+            <a:noFill/>
+          </a:ln>
+          <a:effectLst/>
+        </p:spPr>
+        <p:style>
+          <a:lnRef idx="1">
+            <a:schemeClr val="accent1"/>
+          </a:lnRef>
+          <a:fillRef idx="3">
+            <a:schemeClr val="accent1"/>
+          </a:fillRef>
+          <a:effectRef idx="2">
+            <a:schemeClr val="accent1"/>
+          </a:effectRef>
+          <a:fontRef idx="minor">
+            <a:schemeClr val="lt1"/>
+          </a:fontRef>
+        </p:style>
+        <p:txBody>
+          <a:bodyPr rtlCol="0" anchor="ctr"/>
+          <a:lstStyle/>
+          <a:p/>
+        </p:txBody>
+      </p:sp>
+      <p:sp>
+        <p:nvSpPr>
+          <p:cNvPr id="8" name="Oval 7"/>
+          <p:cNvSpPr/>
+          <p:nvPr/>
+        </p:nvSpPr>
+        <p:spPr>
+          <a:xfrm>
+            <a:off x="8046720" y="1828800"/>
+            <a:ext cx="548640" cy="548640"/>
+          </a:xfrm>
+          <a:prstGeom prst="ellipse">
+            <a:avLst/>
+          </a:prstGeom>
+          <a:solidFill>
+            <a:srgbClr val="F2B705"/>
+          </a:solidFill>
+          <a:ln>
+            <a:noFill/>
+          </a:ln>
+          <a:effectLst/>
+        </p:spPr>
+        <p:style>
+          <a:lnRef idx="1">
+            <a:schemeClr val="accent1"/>
+          </a:lnRef>
+          <a:fillRef idx="3">
+            <a:schemeClr val="accent1"/>
+          </a:fillRef>
+          <a:effectRef idx="2">
+            <a:schemeClr val="accent1"/>
+          </a:effectRef>
+          <a:fontRef idx="minor">
+            <a:schemeClr val="lt1"/>
+          </a:fontRef>
+        </p:style>
+        <p:txBody>
+          <a:bodyPr rtlCol="0" anchor="ctr" lIns="0" rIns="0" tIns="0" bIns="0"/>
+          <a:lstStyle/>
+          <a:p>
+            <a:pPr algn="ctr"/>
+            <a:r>
+              <a:rPr sz="1300" b="1">
+                <a:solidFill>
+                  <a:srgbClr val="202122"/>
+                </a:solidFill>
+                <a:latin typeface="Calibri"/>
+              </a:rPr>
+              <a:t>e.g.</a:t>
+            </a:r>
+          </a:p>
+        </p:txBody>
+      </p:sp>
+      <p:sp>
+        <p:nvSpPr>
+          <p:cNvPr id="9" name="TextBox 8"/>
+          <p:cNvSpPr txBox="1"/>
+          <p:nvPr/>
+        </p:nvSpPr>
+        <p:spPr>
+          <a:xfrm>
+            <a:off x="8046720" y="2560320"/>
+            <a:ext cx="3291840" cy="365760"/>
+          </a:xfrm>
+          <a:prstGeom prst="rect">
+            <a:avLst/>
+          </a:prstGeom>
+          <a:noFill/>
+        </p:spPr>
+        <p:txBody>
+          <a:bodyPr wrap="square" anchor="t" lIns="0" rIns="0" tIns="0" bIns="0"/>
+          <a:lstStyle/>
+          <a:p>
+            <a:pPr algn="l"/>
+            <a:r>
+              <a:rPr sz="1300" b="1" i="0">
+                <a:solidFill>
+                  <a:srgbClr val="A9C8F0"/>
+                </a:solidFill>
+                <a:latin typeface="Calibri"/>
+              </a:rPr>
+              <a:t>EXAMPLE</a:t>
+            </a:r>
+          </a:p>
+        </p:txBody>
+      </p:sp>
+      <p:sp>
+        <p:nvSpPr>
+          <p:cNvPr id="10" name="TextBox 9"/>
+          <p:cNvSpPr txBox="1"/>
+          <p:nvPr/>
+        </p:nvSpPr>
+        <p:spPr>
+          <a:xfrm>
+            <a:off x="8046720" y="2971800"/>
+            <a:ext cx="3291840" cy="2971800"/>
+          </a:xfrm>
+          <a:prstGeom prst="rect">
+            <a:avLst/>
+          </a:prstGeom>
+          <a:noFill/>
+        </p:spPr>
+        <p:txBody>
+          <a:bodyPr wrap="square" anchor="t" lIns="0" rIns="0" tIns="0" bIns="0"/>
+          <a:lstStyle/>
+          <a:p>
+            <a:pPr algn="l"/>
+            <a:r>
+              <a:rPr sz="1900" b="0" i="0">
+                <a:solidFill>
+                  <a:srgbClr val="FFFFFF"/>
+                </a:solidFill>
+                <a:latin typeface="Cambria"/>
+              </a:rPr>
+              <a:t>A vibration sensor on a pump shows a rising trend. The bearing is replaced at the next planned stop, before it fails mid-shift.</a:t>
+            </a:r>
+          </a:p>
+        </p:txBody>
+      </p:sp>
+    </p:spTree>
+  </p:cSld>
+  <p:clrMapOvr>
+    <a:masterClrMapping/>
+  </p:clrMapOvr>
+</p:sld>
+</file>
+
+<file path=ppt/slides/slide4.xml><?xml version="1.0" encoding="utf-8"?>
+<p:sld xmlns:a="http://schemas.openxmlformats.org/drawingml/2006/main" xmlns:p="http://schemas.openxmlformats.org/presentationml/2006/main" xmlns:r="http://schemas.openxmlformats.org/officeDocument/2006/relationships">
+  <p:cSld>
+    <p:bg>
+      <p:bgPr>
+        <a:solidFill>
+          <a:srgbClr val="FFFFFF"/>
+        </a:solidFill>
+        <a:effectLst/>
+      </p:bgPr>
+    </p:bg>
+    <p:spTree>
+      <p:nvGrpSpPr>
+        <p:cNvPr id="1" name=""/>
+        <p:cNvGrpSpPr/>
+        <p:nvPr/>
+      </p:nvGrpSpPr>
+      <p:grpSpPr/>
+      <p:sp>
+        <p:nvSpPr>
+          <p:cNvPr id="2" name="TextBox 1"/>
+          <p:cNvSpPr txBox="1"/>
+          <p:nvPr/>
+        </p:nvSpPr>
+        <p:spPr>
+          <a:xfrm>
+            <a:off x="548640" y="320040"/>
+            <a:ext cx="11094415" cy="274320"/>
+          </a:xfrm>
+          <a:prstGeom prst="rect">
+            <a:avLst/>
+          </a:prstGeom>
+          <a:noFill/>
+        </p:spPr>
+        <p:txBody>
+          <a:bodyPr wrap="square" anchor="t" lIns="0" rIns="0" tIns="0" bIns="0"/>
+          <a:lstStyle/>
+          <a:p>
+            <a:pPr algn="l"/>
+            <a:r>
+              <a:rPr sz="1100" b="1" i="0">
+                <a:solidFill>
+                  <a:srgbClr val="54595D"/>
+                </a:solidFill>
+                <a:latin typeface="Calibri"/>
+              </a:rPr>
+              <a:t>ENGINEERING CORE  ·  Core topic 1</a:t>
+            </a:r>
+          </a:p>
+        </p:txBody>
+      </p:sp>
+      <p:sp>
+        <p:nvSpPr>
+          <p:cNvPr id="3" name="TextBox 2"/>
+          <p:cNvSpPr txBox="1"/>
+          <p:nvPr/>
+        </p:nvSpPr>
+        <p:spPr>
+          <a:xfrm>
+            <a:off x="548640" y="566928"/>
+            <a:ext cx="11094415" cy="822960"/>
+          </a:xfrm>
+          <a:prstGeom prst="rect">
+            <a:avLst/>
+          </a:prstGeom>
+          <a:noFill/>
+        </p:spPr>
+        <p:txBody>
+          <a:bodyPr wrap="square" anchor="ctr" lIns="0" rIns="0" tIns="0" bIns="0"/>
+          <a:lstStyle/>
+          <a:p>
+            <a:pPr algn="l"/>
+            <a:r>
+              <a:rPr sz="3200" b="1" i="0">
+                <a:solidFill>
+                  <a:srgbClr val="03306E"/>
+                </a:solidFill>
+                <a:latin typeface="Cambria"/>
+              </a:rPr>
+              <a:t>Types of maintenance</a:t>
+            </a:r>
+          </a:p>
+        </p:txBody>
+      </p:sp>
+      <p:sp>
+        <p:nvSpPr>
+          <p:cNvPr id="4" name="TextBox 3"/>
+          <p:cNvSpPr txBox="1"/>
+          <p:nvPr/>
+        </p:nvSpPr>
+        <p:spPr>
+          <a:xfrm>
+            <a:off x="548640" y="6446520"/>
+            <a:ext cx="8229600" cy="274320"/>
+          </a:xfrm>
+          <a:prstGeom prst="rect">
+            <a:avLst/>
+          </a:prstGeom>
+          <a:noFill/>
+        </p:spPr>
+        <p:txBody>
+          <a:bodyPr wrap="square" anchor="t" lIns="0" rIns="0" tIns="0" bIns="0"/>
+          <a:lstStyle/>
+          <a:p>
+            <a:pPr algn="l"/>
+            <a:r>
+              <a:rPr sz="1000" b="0" i="0">
+                <a:solidFill>
+                  <a:srgbClr val="54595D"/>
+                </a:solidFill>
+                <a:latin typeface="Calibri"/>
+              </a:rPr>
+              <a:t>Design and Development for Engineering and Manufacturing T Level  ·  Maintenance, Repair and Installation</a:t>
+            </a:r>
+          </a:p>
+        </p:txBody>
+      </p:sp>
+      <p:sp>
+        <p:nvSpPr>
+          <p:cNvPr id="5" name="TextBox 4"/>
+          <p:cNvSpPr txBox="1"/>
+          <p:nvPr/>
+        </p:nvSpPr>
+        <p:spPr>
+          <a:xfrm>
+            <a:off x="10728655" y="6446520"/>
+            <a:ext cx="914400" cy="274320"/>
+          </a:xfrm>
+          <a:prstGeom prst="rect">
+            <a:avLst/>
+          </a:prstGeom>
+          <a:noFill/>
+        </p:spPr>
+        <p:txBody>
+          <a:bodyPr wrap="square" anchor="t" lIns="0" rIns="0" tIns="0" bIns="0"/>
+          <a:lstStyle/>
+          <a:p>
+            <a:pPr algn="r"/>
+            <a:r>
+              <a:rPr sz="1000" b="0" i="0">
+                <a:solidFill>
+                  <a:srgbClr val="54595D"/>
+                </a:solidFill>
+                <a:latin typeface="Calibri"/>
+              </a:rPr>
+              <a:t>4</a:t>
             </a:r>
           </a:p>
         </p:txBody>
@@ -5145,816 +8076,6 @@
 </p:sld>
 </file>
 
-<file path=ppt/slides/slide4.xml><?xml version="1.0" encoding="utf-8"?>
-<p:sld xmlns:a="http://schemas.openxmlformats.org/drawingml/2006/main" xmlns:p="http://schemas.openxmlformats.org/presentationml/2006/main" xmlns:r="http://schemas.openxmlformats.org/officeDocument/2006/relationships">
-  <p:cSld>
-    <p:bg>
-      <p:bgPr>
-        <a:solidFill>
-          <a:srgbClr val="FFFFFF"/>
-        </a:solidFill>
-        <a:effectLst/>
-      </p:bgPr>
-    </p:bg>
-    <p:spTree>
-      <p:nvGrpSpPr>
-        <p:cNvPr id="1" name=""/>
-        <p:cNvGrpSpPr/>
-        <p:nvPr/>
-      </p:nvGrpSpPr>
-      <p:grpSpPr/>
-      <p:sp>
-        <p:nvSpPr>
-          <p:cNvPr id="2" name="TextBox 1"/>
-          <p:cNvSpPr txBox="1"/>
-          <p:nvPr/>
-        </p:nvSpPr>
-        <p:spPr>
-          <a:xfrm>
-            <a:off x="548640" y="320040"/>
-            <a:ext cx="11094415" cy="274320"/>
-          </a:xfrm>
-          <a:prstGeom prst="rect">
-            <a:avLst/>
-          </a:prstGeom>
-          <a:noFill/>
-        </p:spPr>
-        <p:txBody>
-          <a:bodyPr wrap="square" anchor="t" lIns="0" rIns="0" tIns="0" bIns="0"/>
-          <a:lstStyle/>
-          <a:p>
-            <a:pPr algn="l"/>
-            <a:r>
-              <a:rPr sz="1100" b="1" i="0">
-                <a:solidFill>
-                  <a:srgbClr val="54595D"/>
-                </a:solidFill>
-                <a:latin typeface="Calibri"/>
-              </a:rPr>
-              <a:t>ENGINEERING CORE  ·  Core topic 1</a:t>
-            </a:r>
-          </a:p>
-        </p:txBody>
-      </p:sp>
-      <p:sp>
-        <p:nvSpPr>
-          <p:cNvPr id="3" name="TextBox 2"/>
-          <p:cNvSpPr txBox="1"/>
-          <p:nvPr/>
-        </p:nvSpPr>
-        <p:spPr>
-          <a:xfrm>
-            <a:off x="548640" y="566928"/>
-            <a:ext cx="11094415" cy="822960"/>
-          </a:xfrm>
-          <a:prstGeom prst="rect">
-            <a:avLst/>
-          </a:prstGeom>
-          <a:noFill/>
-        </p:spPr>
-        <p:txBody>
-          <a:bodyPr wrap="square" anchor="ctr" lIns="0" rIns="0" tIns="0" bIns="0"/>
-          <a:lstStyle/>
-          <a:p>
-            <a:pPr algn="l"/>
-            <a:r>
-              <a:rPr sz="3200" b="1" i="0">
-                <a:solidFill>
-                  <a:srgbClr val="03306E"/>
-                </a:solidFill>
-                <a:latin typeface="Cambria"/>
-              </a:rPr>
-              <a:t>Roles and operations</a:t>
-            </a:r>
-          </a:p>
-        </p:txBody>
-      </p:sp>
-      <p:sp>
-        <p:nvSpPr>
-          <p:cNvPr id="4" name="TextBox 3"/>
-          <p:cNvSpPr txBox="1"/>
-          <p:nvPr/>
-        </p:nvSpPr>
-        <p:spPr>
-          <a:xfrm>
-            <a:off x="548640" y="6446520"/>
-            <a:ext cx="8229600" cy="274320"/>
-          </a:xfrm>
-          <a:prstGeom prst="rect">
-            <a:avLst/>
-          </a:prstGeom>
-          <a:noFill/>
-        </p:spPr>
-        <p:txBody>
-          <a:bodyPr wrap="square" anchor="t" lIns="0" rIns="0" tIns="0" bIns="0"/>
-          <a:lstStyle/>
-          <a:p>
-            <a:pPr algn="l"/>
-            <a:r>
-              <a:rPr sz="1000" b="0" i="0">
-                <a:solidFill>
-                  <a:srgbClr val="54595D"/>
-                </a:solidFill>
-                <a:latin typeface="Calibri"/>
-              </a:rPr>
-              <a:t>Design and Development for Engineering and Manufacturing T Level  ·  Maintenance, Repair and Installation</a:t>
-            </a:r>
-          </a:p>
-        </p:txBody>
-      </p:sp>
-      <p:sp>
-        <p:nvSpPr>
-          <p:cNvPr id="5" name="TextBox 4"/>
-          <p:cNvSpPr txBox="1"/>
-          <p:nvPr/>
-        </p:nvSpPr>
-        <p:spPr>
-          <a:xfrm>
-            <a:off x="10728655" y="6446520"/>
-            <a:ext cx="914400" cy="274320"/>
-          </a:xfrm>
-          <a:prstGeom prst="rect">
-            <a:avLst/>
-          </a:prstGeom>
-          <a:noFill/>
-        </p:spPr>
-        <p:txBody>
-          <a:bodyPr wrap="square" anchor="t" lIns="0" rIns="0" tIns="0" bIns="0"/>
-          <a:lstStyle/>
-          <a:p>
-            <a:pPr algn="r"/>
-            <a:r>
-              <a:rPr sz="1000" b="0" i="0">
-                <a:solidFill>
-                  <a:srgbClr val="54595D"/>
-                </a:solidFill>
-                <a:latin typeface="Calibri"/>
-              </a:rPr>
-              <a:t>4</a:t>
-            </a:r>
-          </a:p>
-        </p:txBody>
-      </p:sp>
-      <p:sp>
-        <p:nvSpPr>
-          <p:cNvPr id="6" name="Rounded Rectangle 5"/>
-          <p:cNvSpPr/>
-          <p:nvPr/>
-        </p:nvSpPr>
-        <p:spPr>
-          <a:xfrm>
-            <a:off x="548640" y="1600200"/>
-            <a:ext cx="5410047" cy="2148840"/>
-          </a:xfrm>
-          <a:prstGeom prst="roundRect">
-            <a:avLst>
-              <a:gd name="adj" fmla="val 6000"/>
-            </a:avLst>
-          </a:prstGeom>
-          <a:solidFill>
-            <a:srgbClr val="EAF3FF"/>
-          </a:solidFill>
-          <a:ln>
-            <a:noFill/>
-          </a:ln>
-          <a:effectLst/>
-        </p:spPr>
-        <p:style>
-          <a:lnRef idx="1">
-            <a:schemeClr val="accent1"/>
-          </a:lnRef>
-          <a:fillRef idx="3">
-            <a:schemeClr val="accent1"/>
-          </a:fillRef>
-          <a:effectRef idx="2">
-            <a:schemeClr val="accent1"/>
-          </a:effectRef>
-          <a:fontRef idx="minor">
-            <a:schemeClr val="lt1"/>
-          </a:fontRef>
-        </p:style>
-        <p:txBody>
-          <a:bodyPr rtlCol="0" anchor="ctr"/>
-          <a:lstStyle/>
-          <a:p/>
-        </p:txBody>
-      </p:sp>
-      <p:sp>
-        <p:nvSpPr>
-          <p:cNvPr id="7" name="Oval 6"/>
-          <p:cNvSpPr/>
-          <p:nvPr/>
-        </p:nvSpPr>
-        <p:spPr>
-          <a:xfrm>
-            <a:off x="777240" y="1828800"/>
-            <a:ext cx="457200" cy="457200"/>
-          </a:xfrm>
-          <a:prstGeom prst="ellipse">
-            <a:avLst/>
-          </a:prstGeom>
-          <a:solidFill>
-            <a:srgbClr val="F2B705"/>
-          </a:solidFill>
-          <a:ln>
-            <a:noFill/>
-          </a:ln>
-          <a:effectLst/>
-        </p:spPr>
-        <p:style>
-          <a:lnRef idx="1">
-            <a:schemeClr val="accent1"/>
-          </a:lnRef>
-          <a:fillRef idx="3">
-            <a:schemeClr val="accent1"/>
-          </a:fillRef>
-          <a:effectRef idx="2">
-            <a:schemeClr val="accent1"/>
-          </a:effectRef>
-          <a:fontRef idx="minor">
-            <a:schemeClr val="lt1"/>
-          </a:fontRef>
-        </p:style>
-        <p:txBody>
-          <a:bodyPr rtlCol="0" anchor="ctr" lIns="0" rIns="0" tIns="0" bIns="0"/>
-          <a:lstStyle/>
-          <a:p>
-            <a:pPr algn="ctr"/>
-            <a:r>
-              <a:rPr sz="1500" b="1">
-                <a:solidFill>
-                  <a:srgbClr val="202122"/>
-                </a:solidFill>
-                <a:latin typeface="Calibri"/>
-              </a:rPr>
-              <a:t>1</a:t>
-            </a:r>
-          </a:p>
-        </p:txBody>
-      </p:sp>
-      <p:sp>
-        <p:nvSpPr>
-          <p:cNvPr id="8" name="TextBox 7"/>
-          <p:cNvSpPr txBox="1"/>
-          <p:nvPr/>
-        </p:nvSpPr>
-        <p:spPr>
-          <a:xfrm>
-            <a:off x="1371600" y="1801368"/>
-            <a:ext cx="4404207" cy="512064"/>
-          </a:xfrm>
-          <a:prstGeom prst="rect">
-            <a:avLst/>
-          </a:prstGeom>
-          <a:noFill/>
-        </p:spPr>
-        <p:txBody>
-          <a:bodyPr wrap="square" anchor="ctr" lIns="0" rIns="0" tIns="0" bIns="0"/>
-          <a:lstStyle/>
-          <a:p>
-            <a:pPr algn="l"/>
-            <a:r>
-              <a:rPr sz="1900" b="1" i="0">
-                <a:solidFill>
-                  <a:srgbClr val="03306E"/>
-                </a:solidFill>
-                <a:latin typeface="Calibri"/>
-              </a:rPr>
-              <a:t>Machine operator</a:t>
-            </a:r>
-          </a:p>
-        </p:txBody>
-      </p:sp>
-      <p:sp>
-        <p:nvSpPr>
-          <p:cNvPr id="9" name="TextBox 8"/>
-          <p:cNvSpPr txBox="1"/>
-          <p:nvPr/>
-        </p:nvSpPr>
-        <p:spPr>
-          <a:xfrm>
-            <a:off x="777240" y="2468880"/>
-            <a:ext cx="4952847" cy="1143000"/>
-          </a:xfrm>
-          <a:prstGeom prst="rect">
-            <a:avLst/>
-          </a:prstGeom>
-          <a:noFill/>
-        </p:spPr>
-        <p:txBody>
-          <a:bodyPr wrap="square" anchor="t" lIns="0" rIns="0" tIns="0" bIns="0"/>
-          <a:lstStyle/>
-          <a:p>
-            <a:pPr algn="l"/>
-            <a:r>
-              <a:rPr sz="2000" b="0" i="0">
-                <a:solidFill>
-                  <a:srgbClr val="202122"/>
-                </a:solidFill>
-                <a:latin typeface="Calibri"/>
-              </a:rPr>
-              <a:t>Runs the equipment and reports faults.</a:t>
-            </a:r>
-          </a:p>
-        </p:txBody>
-      </p:sp>
-      <p:sp>
-        <p:nvSpPr>
-          <p:cNvPr id="10" name="Rounded Rectangle 9"/>
-          <p:cNvSpPr/>
-          <p:nvPr/>
-        </p:nvSpPr>
-        <p:spPr>
-          <a:xfrm>
-            <a:off x="6233007" y="1600200"/>
-            <a:ext cx="5410047" cy="2148840"/>
-          </a:xfrm>
-          <a:prstGeom prst="roundRect">
-            <a:avLst>
-              <a:gd name="adj" fmla="val 6000"/>
-            </a:avLst>
-          </a:prstGeom>
-          <a:solidFill>
-            <a:srgbClr val="EAF3FF"/>
-          </a:solidFill>
-          <a:ln>
-            <a:noFill/>
-          </a:ln>
-          <a:effectLst/>
-        </p:spPr>
-        <p:style>
-          <a:lnRef idx="1">
-            <a:schemeClr val="accent1"/>
-          </a:lnRef>
-          <a:fillRef idx="3">
-            <a:schemeClr val="accent1"/>
-          </a:fillRef>
-          <a:effectRef idx="2">
-            <a:schemeClr val="accent1"/>
-          </a:effectRef>
-          <a:fontRef idx="minor">
-            <a:schemeClr val="lt1"/>
-          </a:fontRef>
-        </p:style>
-        <p:txBody>
-          <a:bodyPr rtlCol="0" anchor="ctr"/>
-          <a:lstStyle/>
-          <a:p/>
-        </p:txBody>
-      </p:sp>
-      <p:sp>
-        <p:nvSpPr>
-          <p:cNvPr id="11" name="Oval 10"/>
-          <p:cNvSpPr/>
-          <p:nvPr/>
-        </p:nvSpPr>
-        <p:spPr>
-          <a:xfrm>
-            <a:off x="6461607" y="1828800"/>
-            <a:ext cx="457200" cy="457200"/>
-          </a:xfrm>
-          <a:prstGeom prst="ellipse">
-            <a:avLst/>
-          </a:prstGeom>
-          <a:solidFill>
-            <a:srgbClr val="F2B705"/>
-          </a:solidFill>
-          <a:ln>
-            <a:noFill/>
-          </a:ln>
-          <a:effectLst/>
-        </p:spPr>
-        <p:style>
-          <a:lnRef idx="1">
-            <a:schemeClr val="accent1"/>
-          </a:lnRef>
-          <a:fillRef idx="3">
-            <a:schemeClr val="accent1"/>
-          </a:fillRef>
-          <a:effectRef idx="2">
-            <a:schemeClr val="accent1"/>
-          </a:effectRef>
-          <a:fontRef idx="minor">
-            <a:schemeClr val="lt1"/>
-          </a:fontRef>
-        </p:style>
-        <p:txBody>
-          <a:bodyPr rtlCol="0" anchor="ctr" lIns="0" rIns="0" tIns="0" bIns="0"/>
-          <a:lstStyle/>
-          <a:p>
-            <a:pPr algn="ctr"/>
-            <a:r>
-              <a:rPr sz="1500" b="1">
-                <a:solidFill>
-                  <a:srgbClr val="202122"/>
-                </a:solidFill>
-                <a:latin typeface="Calibri"/>
-              </a:rPr>
-              <a:t>2</a:t>
-            </a:r>
-          </a:p>
-        </p:txBody>
-      </p:sp>
-      <p:sp>
-        <p:nvSpPr>
-          <p:cNvPr id="12" name="TextBox 11"/>
-          <p:cNvSpPr txBox="1"/>
-          <p:nvPr/>
-        </p:nvSpPr>
-        <p:spPr>
-          <a:xfrm>
-            <a:off x="7055967" y="1801368"/>
-            <a:ext cx="4404207" cy="512064"/>
-          </a:xfrm>
-          <a:prstGeom prst="rect">
-            <a:avLst/>
-          </a:prstGeom>
-          <a:noFill/>
-        </p:spPr>
-        <p:txBody>
-          <a:bodyPr wrap="square" anchor="ctr" lIns="0" rIns="0" tIns="0" bIns="0"/>
-          <a:lstStyle/>
-          <a:p>
-            <a:pPr algn="l"/>
-            <a:r>
-              <a:rPr sz="1900" b="1" i="0">
-                <a:solidFill>
-                  <a:srgbClr val="03306E"/>
-                </a:solidFill>
-                <a:latin typeface="Calibri"/>
-              </a:rPr>
-              <a:t>Maintenance engineer</a:t>
-            </a:r>
-          </a:p>
-        </p:txBody>
-      </p:sp>
-      <p:sp>
-        <p:nvSpPr>
-          <p:cNvPr id="13" name="TextBox 12"/>
-          <p:cNvSpPr txBox="1"/>
-          <p:nvPr/>
-        </p:nvSpPr>
-        <p:spPr>
-          <a:xfrm>
-            <a:off x="6461607" y="2468880"/>
-            <a:ext cx="4952847" cy="1143000"/>
-          </a:xfrm>
-          <a:prstGeom prst="rect">
-            <a:avLst/>
-          </a:prstGeom>
-          <a:noFill/>
-        </p:spPr>
-        <p:txBody>
-          <a:bodyPr wrap="square" anchor="t" lIns="0" rIns="0" tIns="0" bIns="0"/>
-          <a:lstStyle/>
-          <a:p>
-            <a:pPr algn="l"/>
-            <a:r>
-              <a:rPr sz="2000" b="0" i="0">
-                <a:solidFill>
-                  <a:srgbClr val="202122"/>
-                </a:solidFill>
-                <a:latin typeface="Calibri"/>
-              </a:rPr>
-              <a:t>Services, repairs and monitors equipment.</a:t>
-            </a:r>
-          </a:p>
-        </p:txBody>
-      </p:sp>
-      <p:sp>
-        <p:nvSpPr>
-          <p:cNvPr id="14" name="Rounded Rectangle 13"/>
-          <p:cNvSpPr/>
-          <p:nvPr/>
-        </p:nvSpPr>
-        <p:spPr>
-          <a:xfrm>
-            <a:off x="548640" y="4023360"/>
-            <a:ext cx="5410047" cy="2148840"/>
-          </a:xfrm>
-          <a:prstGeom prst="roundRect">
-            <a:avLst>
-              <a:gd name="adj" fmla="val 6000"/>
-            </a:avLst>
-          </a:prstGeom>
-          <a:solidFill>
-            <a:srgbClr val="EAF3FF"/>
-          </a:solidFill>
-          <a:ln>
-            <a:noFill/>
-          </a:ln>
-          <a:effectLst/>
-        </p:spPr>
-        <p:style>
-          <a:lnRef idx="1">
-            <a:schemeClr val="accent1"/>
-          </a:lnRef>
-          <a:fillRef idx="3">
-            <a:schemeClr val="accent1"/>
-          </a:fillRef>
-          <a:effectRef idx="2">
-            <a:schemeClr val="accent1"/>
-          </a:effectRef>
-          <a:fontRef idx="minor">
-            <a:schemeClr val="lt1"/>
-          </a:fontRef>
-        </p:style>
-        <p:txBody>
-          <a:bodyPr rtlCol="0" anchor="ctr"/>
-          <a:lstStyle/>
-          <a:p/>
-        </p:txBody>
-      </p:sp>
-      <p:sp>
-        <p:nvSpPr>
-          <p:cNvPr id="15" name="Oval 14"/>
-          <p:cNvSpPr/>
-          <p:nvPr/>
-        </p:nvSpPr>
-        <p:spPr>
-          <a:xfrm>
-            <a:off x="777240" y="4251960"/>
-            <a:ext cx="457200" cy="457200"/>
-          </a:xfrm>
-          <a:prstGeom prst="ellipse">
-            <a:avLst/>
-          </a:prstGeom>
-          <a:solidFill>
-            <a:srgbClr val="F2B705"/>
-          </a:solidFill>
-          <a:ln>
-            <a:noFill/>
-          </a:ln>
-          <a:effectLst/>
-        </p:spPr>
-        <p:style>
-          <a:lnRef idx="1">
-            <a:schemeClr val="accent1"/>
-          </a:lnRef>
-          <a:fillRef idx="3">
-            <a:schemeClr val="accent1"/>
-          </a:fillRef>
-          <a:effectRef idx="2">
-            <a:schemeClr val="accent1"/>
-          </a:effectRef>
-          <a:fontRef idx="minor">
-            <a:schemeClr val="lt1"/>
-          </a:fontRef>
-        </p:style>
-        <p:txBody>
-          <a:bodyPr rtlCol="0" anchor="ctr" lIns="0" rIns="0" tIns="0" bIns="0"/>
-          <a:lstStyle/>
-          <a:p>
-            <a:pPr algn="ctr"/>
-            <a:r>
-              <a:rPr sz="1500" b="1">
-                <a:solidFill>
-                  <a:srgbClr val="202122"/>
-                </a:solidFill>
-                <a:latin typeface="Calibri"/>
-              </a:rPr>
-              <a:t>3</a:t>
-            </a:r>
-          </a:p>
-        </p:txBody>
-      </p:sp>
-      <p:sp>
-        <p:nvSpPr>
-          <p:cNvPr id="16" name="TextBox 15"/>
-          <p:cNvSpPr txBox="1"/>
-          <p:nvPr/>
-        </p:nvSpPr>
-        <p:spPr>
-          <a:xfrm>
-            <a:off x="1371600" y="4224528"/>
-            <a:ext cx="4404207" cy="512064"/>
-          </a:xfrm>
-          <a:prstGeom prst="rect">
-            <a:avLst/>
-          </a:prstGeom>
-          <a:noFill/>
-        </p:spPr>
-        <p:txBody>
-          <a:bodyPr wrap="square" anchor="ctr" lIns="0" rIns="0" tIns="0" bIns="0"/>
-          <a:lstStyle/>
-          <a:p>
-            <a:pPr algn="l"/>
-            <a:r>
-              <a:rPr sz="1900" b="1" i="0">
-                <a:solidFill>
-                  <a:srgbClr val="03306E"/>
-                </a:solidFill>
-                <a:latin typeface="Calibri"/>
-              </a:rPr>
-              <a:t>Maintenance manager</a:t>
-            </a:r>
-          </a:p>
-        </p:txBody>
-      </p:sp>
-      <p:sp>
-        <p:nvSpPr>
-          <p:cNvPr id="17" name="TextBox 16"/>
-          <p:cNvSpPr txBox="1"/>
-          <p:nvPr/>
-        </p:nvSpPr>
-        <p:spPr>
-          <a:xfrm>
-            <a:off x="777240" y="4892040"/>
-            <a:ext cx="4952847" cy="1143000"/>
-          </a:xfrm>
-          <a:prstGeom prst="rect">
-            <a:avLst/>
-          </a:prstGeom>
-          <a:noFill/>
-        </p:spPr>
-        <p:txBody>
-          <a:bodyPr wrap="square" anchor="t" lIns="0" rIns="0" tIns="0" bIns="0"/>
-          <a:lstStyle/>
-          <a:p>
-            <a:pPr algn="l"/>
-            <a:r>
-              <a:rPr sz="2000" b="0" i="0">
-                <a:solidFill>
-                  <a:srgbClr val="202122"/>
-                </a:solidFill>
-                <a:latin typeface="Calibri"/>
-              </a:rPr>
-              <a:t>Plans schedules, resources and priorities.</a:t>
-            </a:r>
-          </a:p>
-        </p:txBody>
-      </p:sp>
-      <p:sp>
-        <p:nvSpPr>
-          <p:cNvPr id="18" name="Rounded Rectangle 17"/>
-          <p:cNvSpPr/>
-          <p:nvPr/>
-        </p:nvSpPr>
-        <p:spPr>
-          <a:xfrm>
-            <a:off x="6233007" y="4023360"/>
-            <a:ext cx="5410047" cy="2148840"/>
-          </a:xfrm>
-          <a:prstGeom prst="roundRect">
-            <a:avLst>
-              <a:gd name="adj" fmla="val 6000"/>
-            </a:avLst>
-          </a:prstGeom>
-          <a:solidFill>
-            <a:srgbClr val="EAF3FF"/>
-          </a:solidFill>
-          <a:ln>
-            <a:noFill/>
-          </a:ln>
-          <a:effectLst/>
-        </p:spPr>
-        <p:style>
-          <a:lnRef idx="1">
-            <a:schemeClr val="accent1"/>
-          </a:lnRef>
-          <a:fillRef idx="3">
-            <a:schemeClr val="accent1"/>
-          </a:fillRef>
-          <a:effectRef idx="2">
-            <a:schemeClr val="accent1"/>
-          </a:effectRef>
-          <a:fontRef idx="minor">
-            <a:schemeClr val="lt1"/>
-          </a:fontRef>
-        </p:style>
-        <p:txBody>
-          <a:bodyPr rtlCol="0" anchor="ctr"/>
-          <a:lstStyle/>
-          <a:p/>
-        </p:txBody>
-      </p:sp>
-      <p:sp>
-        <p:nvSpPr>
-          <p:cNvPr id="19" name="Oval 18"/>
-          <p:cNvSpPr/>
-          <p:nvPr/>
-        </p:nvSpPr>
-        <p:spPr>
-          <a:xfrm>
-            <a:off x="6461607" y="4251960"/>
-            <a:ext cx="457200" cy="457200"/>
-          </a:xfrm>
-          <a:prstGeom prst="ellipse">
-            <a:avLst/>
-          </a:prstGeom>
-          <a:solidFill>
-            <a:srgbClr val="F2B705"/>
-          </a:solidFill>
-          <a:ln>
-            <a:noFill/>
-          </a:ln>
-          <a:effectLst/>
-        </p:spPr>
-        <p:style>
-          <a:lnRef idx="1">
-            <a:schemeClr val="accent1"/>
-          </a:lnRef>
-          <a:fillRef idx="3">
-            <a:schemeClr val="accent1"/>
-          </a:fillRef>
-          <a:effectRef idx="2">
-            <a:schemeClr val="accent1"/>
-          </a:effectRef>
-          <a:fontRef idx="minor">
-            <a:schemeClr val="lt1"/>
-          </a:fontRef>
-        </p:style>
-        <p:txBody>
-          <a:bodyPr rtlCol="0" anchor="ctr" lIns="0" rIns="0" tIns="0" bIns="0"/>
-          <a:lstStyle/>
-          <a:p>
-            <a:pPr algn="ctr"/>
-            <a:r>
-              <a:rPr sz="1500" b="1">
-                <a:solidFill>
-                  <a:srgbClr val="202122"/>
-                </a:solidFill>
-                <a:latin typeface="Calibri"/>
-              </a:rPr>
-              <a:t>4</a:t>
-            </a:r>
-          </a:p>
-        </p:txBody>
-      </p:sp>
-      <p:sp>
-        <p:nvSpPr>
-          <p:cNvPr id="20" name="TextBox 19"/>
-          <p:cNvSpPr txBox="1"/>
-          <p:nvPr/>
-        </p:nvSpPr>
-        <p:spPr>
-          <a:xfrm>
-            <a:off x="7055967" y="4224528"/>
-            <a:ext cx="4404207" cy="512064"/>
-          </a:xfrm>
-          <a:prstGeom prst="rect">
-            <a:avLst/>
-          </a:prstGeom>
-          <a:noFill/>
-        </p:spPr>
-        <p:txBody>
-          <a:bodyPr wrap="square" anchor="ctr" lIns="0" rIns="0" tIns="0" bIns="0"/>
-          <a:lstStyle/>
-          <a:p>
-            <a:pPr algn="l"/>
-            <a:r>
-              <a:rPr sz="1900" b="1" i="0">
-                <a:solidFill>
-                  <a:srgbClr val="03306E"/>
-                </a:solidFill>
-                <a:latin typeface="Calibri"/>
-              </a:rPr>
-              <a:t>Operations</a:t>
-            </a:r>
-          </a:p>
-        </p:txBody>
-      </p:sp>
-      <p:sp>
-        <p:nvSpPr>
-          <p:cNvPr id="21" name="TextBox 20"/>
-          <p:cNvSpPr txBox="1"/>
-          <p:nvPr/>
-        </p:nvSpPr>
-        <p:spPr>
-          <a:xfrm>
-            <a:off x="6461607" y="4892040"/>
-            <a:ext cx="4952847" cy="1143000"/>
-          </a:xfrm>
-          <a:prstGeom prst="rect">
-            <a:avLst/>
-          </a:prstGeom>
-          <a:noFill/>
-        </p:spPr>
-        <p:txBody>
-          <a:bodyPr wrap="square" anchor="t" lIns="0" rIns="0" tIns="0" bIns="0"/>
-          <a:lstStyle/>
-          <a:p>
-            <a:pPr algn="l"/>
-            <a:r>
-              <a:rPr sz="2000" b="0" i="0">
-                <a:solidFill>
-                  <a:srgbClr val="202122"/>
-                </a:solidFill>
-                <a:latin typeface="Calibri"/>
-              </a:rPr>
-              <a:t>Monitoring, repair, shutdown and servicing.</a:t>
-            </a:r>
-          </a:p>
-        </p:txBody>
-      </p:sp>
-    </p:spTree>
-  </p:cSld>
-  <p:clrMapOvr>
-    <a:masterClrMapping/>
-  </p:clrMapOvr>
-</p:sld>
-</file>
-
 <file path=ppt/slides/slide5.xml><?xml version="1.0" encoding="utf-8"?>
 <p:sld xmlns:a="http://schemas.openxmlformats.org/drawingml/2006/main" xmlns:p="http://schemas.openxmlformats.org/presentationml/2006/main" xmlns:r="http://schemas.openxmlformats.org/officeDocument/2006/relationships">
   <p:cSld>
@@ -6034,7 +8155,7 @@
                 </a:solidFill>
                 <a:latin typeface="Cambria"/>
               </a:rPr>
-              <a:t>Installation and the future of maintenance</a:t>
+              <a:t>Quick check: Types of maintenance</a:t>
             </a:r>
           </a:p>
         </p:txBody>
@@ -6107,195 +8228,14 @@
       </p:sp>
       <p:sp>
         <p:nvSpPr>
-          <p:cNvPr id="6" name="TextBox 5"/>
-          <p:cNvSpPr txBox="1"/>
-          <p:nvPr/>
-        </p:nvSpPr>
-        <p:spPr>
-          <a:xfrm>
-            <a:off x="548640" y="1600200"/>
-            <a:ext cx="6675120" cy="4572000"/>
-          </a:xfrm>
-          <a:prstGeom prst="rect">
-            <a:avLst/>
-          </a:prstGeom>
-          <a:noFill/>
-        </p:spPr>
-        <p:txBody>
-          <a:bodyPr wrap="square" lIns="0" rIns="0" tIns="0" bIns="0">
-            <a:spAutoFit/>
-          </a:bodyPr>
-          <a:lstStyle/>
-          <a:p>
-            <a:pPr marL="274320" indent="-274320">
-              <a:spcAft>
-                <a:spcPts val="1080"/>
-              </a:spcAft>
-              <a:buClr>
-                <a:srgbClr val="0645AD"/>
-              </a:buClr>
-              <a:buFont typeface="Arial"/>
-              <a:buChar char="•"/>
-            </a:pPr>
-            <a:r>
-              <a:rPr sz="2400" b="0">
-                <a:solidFill>
-                  <a:srgbClr val="202122"/>
-                </a:solidFill>
-                <a:latin typeface="Calibri"/>
-              </a:rPr>
-              <a:t>Installation must meet customer, regulatory and manufacturer requirements.</a:t>
-            </a:r>
-          </a:p>
-          <a:p>
-            <a:pPr marL="274320" indent="-274320">
-              <a:spcAft>
-                <a:spcPts val="1080"/>
-              </a:spcAft>
-              <a:buClr>
-                <a:srgbClr val="0645AD"/>
-              </a:buClr>
-              <a:buFont typeface="Arial"/>
-              <a:buChar char="•"/>
-            </a:pPr>
-            <a:r>
-              <a:rPr sz="2400" b="0">
-                <a:solidFill>
-                  <a:srgbClr val="202122"/>
-                </a:solidFill>
-                <a:latin typeface="Calibri"/>
-              </a:rPr>
-              <a:t>Commissioning checks new equipment works safely and as specified before use.</a:t>
-            </a:r>
-          </a:p>
-          <a:p>
-            <a:pPr marL="274320" indent="-274320">
-              <a:spcAft>
-                <a:spcPts val="1080"/>
-              </a:spcAft>
-              <a:buClr>
-                <a:srgbClr val="0645AD"/>
-              </a:buClr>
-              <a:buFont typeface="Arial"/>
-              <a:buChar char="•"/>
-            </a:pPr>
-            <a:r>
-              <a:rPr sz="2400" b="1">
-                <a:solidFill>
-                  <a:srgbClr val="202122"/>
-                </a:solidFill>
-                <a:latin typeface="Calibri"/>
-              </a:rPr>
-              <a:t>New technology:</a:t>
-            </a:r>
-            <a:r>
-              <a:rPr sz="2400" b="0">
-                <a:solidFill>
-                  <a:srgbClr val="202122"/>
-                </a:solidFill>
-                <a:latin typeface="Calibri"/>
-              </a:rPr>
-              <a:t> sensors and data make condition-based monitoring easier.</a:t>
-            </a:r>
-          </a:p>
-          <a:p>
-            <a:pPr marL="274320" indent="-274320">
-              <a:spcAft>
-                <a:spcPts val="1080"/>
-              </a:spcAft>
-              <a:buClr>
-                <a:srgbClr val="0645AD"/>
-              </a:buClr>
-              <a:buFont typeface="Arial"/>
-              <a:buChar char="•"/>
-            </a:pPr>
-            <a:r>
-              <a:rPr sz="2400" b="0">
-                <a:solidFill>
-                  <a:srgbClr val="202122"/>
-                </a:solidFill>
-                <a:latin typeface="Calibri"/>
-              </a:rPr>
-              <a:t>Good maintenance reduces waste, energy use and environmental impact.</a:t>
-            </a:r>
-          </a:p>
-          <a:p>
-            <a:pPr marL="274320" indent="-274320">
-              <a:spcAft>
-                <a:spcPts val="1080"/>
-              </a:spcAft>
-              <a:buClr>
-                <a:srgbClr val="0645AD"/>
-              </a:buClr>
-              <a:buFont typeface="Arial"/>
-              <a:buChar char="•"/>
-            </a:pPr>
-            <a:r>
-              <a:rPr sz="2400" b="0">
-                <a:solidFill>
-                  <a:srgbClr val="202122"/>
-                </a:solidFill>
-                <a:latin typeface="Calibri"/>
-              </a:rPr>
-              <a:t>Waste from maintenance must be disposed of safely.</a:t>
-            </a:r>
-          </a:p>
-        </p:txBody>
-      </p:sp>
-      <p:sp>
-        <p:nvSpPr>
-          <p:cNvPr id="7" name="Rounded Rectangle 6"/>
+          <p:cNvPr id="6" name="Oval 5"/>
           <p:cNvSpPr/>
           <p:nvPr/>
         </p:nvSpPr>
         <p:spPr>
           <a:xfrm>
-            <a:off x="7772400" y="1600200"/>
-            <a:ext cx="3867912" cy="4434840"/>
-          </a:xfrm>
-          <a:prstGeom prst="roundRect">
-            <a:avLst>
-              <a:gd name="adj" fmla="val 8000"/>
-            </a:avLst>
-          </a:prstGeom>
-          <a:solidFill>
-            <a:srgbClr val="03306E"/>
-          </a:solidFill>
-          <a:ln>
-            <a:noFill/>
-          </a:ln>
-          <a:effectLst/>
-        </p:spPr>
-        <p:style>
-          <a:lnRef idx="1">
-            <a:schemeClr val="accent1"/>
-          </a:lnRef>
-          <a:fillRef idx="3">
-            <a:schemeClr val="accent1"/>
-          </a:fillRef>
-          <a:effectRef idx="2">
-            <a:schemeClr val="accent1"/>
-          </a:effectRef>
-          <a:fontRef idx="minor">
-            <a:schemeClr val="lt1"/>
-          </a:fontRef>
-        </p:style>
-        <p:txBody>
-          <a:bodyPr rtlCol="0" anchor="ctr"/>
-          <a:lstStyle/>
-          <a:p/>
-        </p:txBody>
-      </p:sp>
-      <p:sp>
-        <p:nvSpPr>
-          <p:cNvPr id="8" name="Oval 7"/>
-          <p:cNvSpPr/>
-          <p:nvPr/>
-        </p:nvSpPr>
-        <p:spPr>
-          <a:xfrm>
-            <a:off x="8046720" y="1874519"/>
-            <a:ext cx="548640" cy="548640"/>
+            <a:off x="548640" y="1691640"/>
+            <a:ext cx="502920" cy="502920"/>
           </a:xfrm>
           <a:prstGeom prst="ellipse">
             <a:avLst/>
@@ -6328,13 +8268,99 @@
           <a:p>
             <a:pPr algn="ctr"/>
             <a:r>
-              <a:rPr sz="2000" b="1">
+              <a:rPr sz="1600" b="1">
                 <a:solidFill>
                   <a:srgbClr val="202122"/>
                 </a:solidFill>
                 <a:latin typeface="Calibri"/>
               </a:rPr>
-              <a:t>!</a:t>
+              <a:t>1</a:t>
+            </a:r>
+          </a:p>
+        </p:txBody>
+      </p:sp>
+      <p:sp>
+        <p:nvSpPr>
+          <p:cNvPr id="7" name="TextBox 6"/>
+          <p:cNvSpPr txBox="1"/>
+          <p:nvPr/>
+        </p:nvSpPr>
+        <p:spPr>
+          <a:xfrm>
+            <a:off x="1371600" y="1645920"/>
+            <a:ext cx="10271455" cy="1188720"/>
+          </a:xfrm>
+          <a:prstGeom prst="rect">
+            <a:avLst/>
+          </a:prstGeom>
+          <a:noFill/>
+        </p:spPr>
+        <p:txBody>
+          <a:bodyPr wrap="square" anchor="t" lIns="0" rIns="0" tIns="0" bIns="0"/>
+          <a:lstStyle/>
+          <a:p>
+            <a:pPr algn="l"/>
+            <a:r>
+              <a:rPr sz="2400" b="0" i="0">
+                <a:solidFill>
+                  <a:srgbClr val="202122"/>
+                </a:solidFill>
+                <a:latin typeface="Calibri"/>
+              </a:rPr>
+              <a:t>Which maintenance type waits for a breakdown?</a:t>
+            </a:r>
+          </a:p>
+        </p:txBody>
+      </p:sp>
+      <p:sp>
+        <p:nvSpPr>
+          <p:cNvPr id="8" name="Oval 7"/>
+          <p:cNvSpPr/>
+          <p:nvPr/>
+        </p:nvSpPr>
+        <p:spPr>
+          <a:xfrm>
+            <a:off x="548640" y="3108960"/>
+            <a:ext cx="502920" cy="502920"/>
+          </a:xfrm>
+          <a:prstGeom prst="ellipse">
+            <a:avLst/>
+          </a:prstGeom>
+          <a:solidFill>
+            <a:srgbClr val="F2B705"/>
+          </a:solidFill>
+          <a:ln>
+            <a:noFill/>
+          </a:ln>
+          <a:effectLst/>
+        </p:spPr>
+        <p:style>
+          <a:lnRef idx="1">
+            <a:schemeClr val="accent1"/>
+          </a:lnRef>
+          <a:fillRef idx="3">
+            <a:schemeClr val="accent1"/>
+          </a:fillRef>
+          <a:effectRef idx="2">
+            <a:schemeClr val="accent1"/>
+          </a:effectRef>
+          <a:fontRef idx="minor">
+            <a:schemeClr val="lt1"/>
+          </a:fontRef>
+        </p:style>
+        <p:txBody>
+          <a:bodyPr rtlCol="0" anchor="ctr" lIns="0" rIns="0" tIns="0" bIns="0"/>
+          <a:lstStyle/>
+          <a:p>
+            <a:pPr algn="ctr"/>
+            <a:r>
+              <a:rPr sz="1600" b="1">
+                <a:solidFill>
+                  <a:srgbClr val="202122"/>
+                </a:solidFill>
+                <a:latin typeface="Calibri"/>
+              </a:rPr>
+              <a:t>2</a:t>
             </a:r>
           </a:p>
         </p:txBody>
@@ -6347,8 +8373,8 @@
         </p:nvSpPr>
         <p:spPr>
           <a:xfrm>
-            <a:off x="8046720" y="2606040"/>
-            <a:ext cx="3291840" cy="365760"/>
+            <a:off x="1371600" y="3063240"/>
+            <a:ext cx="10271455" cy="1188720"/>
           </a:xfrm>
           <a:prstGeom prst="rect">
             <a:avLst/>
@@ -6361,27 +8387,80 @@
           <a:p>
             <a:pPr algn="l"/>
             <a:r>
-              <a:rPr sz="1300" b="1" i="0">
-                <a:solidFill>
-                  <a:srgbClr val="A9C8F0"/>
-                </a:solidFill>
-                <a:latin typeface="Calibri"/>
-              </a:rPr>
-              <a:t>KEY IDEA</a:t>
-            </a:r>
-          </a:p>
-        </p:txBody>
-      </p:sp>
-      <p:sp>
-        <p:nvSpPr>
-          <p:cNvPr id="10" name="TextBox 9"/>
+              <a:rPr sz="2400" b="0" i="0">
+                <a:solidFill>
+                  <a:srgbClr val="202122"/>
+                </a:solidFill>
+                <a:latin typeface="Calibri"/>
+              </a:rPr>
+              <a:t>What does condition-based monitoring use?</a:t>
+            </a:r>
+          </a:p>
+        </p:txBody>
+      </p:sp>
+      <p:sp>
+        <p:nvSpPr>
+          <p:cNvPr id="10" name="Oval 9"/>
+          <p:cNvSpPr/>
+          <p:nvPr/>
+        </p:nvSpPr>
+        <p:spPr>
+          <a:xfrm>
+            <a:off x="548640" y="4526280"/>
+            <a:ext cx="502920" cy="502920"/>
+          </a:xfrm>
+          <a:prstGeom prst="ellipse">
+            <a:avLst/>
+          </a:prstGeom>
+          <a:solidFill>
+            <a:srgbClr val="F2B705"/>
+          </a:solidFill>
+          <a:ln>
+            <a:noFill/>
+          </a:ln>
+          <a:effectLst/>
+        </p:spPr>
+        <p:style>
+          <a:lnRef idx="1">
+            <a:schemeClr val="accent1"/>
+          </a:lnRef>
+          <a:fillRef idx="3">
+            <a:schemeClr val="accent1"/>
+          </a:fillRef>
+          <a:effectRef idx="2">
+            <a:schemeClr val="accent1"/>
+          </a:effectRef>
+          <a:fontRef idx="minor">
+            <a:schemeClr val="lt1"/>
+          </a:fontRef>
+        </p:style>
+        <p:txBody>
+          <a:bodyPr rtlCol="0" anchor="ctr" lIns="0" rIns="0" tIns="0" bIns="0"/>
+          <a:lstStyle/>
+          <a:p>
+            <a:pPr algn="ctr"/>
+            <a:r>
+              <a:rPr sz="1600" b="1">
+                <a:solidFill>
+                  <a:srgbClr val="202122"/>
+                </a:solidFill>
+                <a:latin typeface="Calibri"/>
+              </a:rPr>
+              <a:t>3</a:t>
+            </a:r>
+          </a:p>
+        </p:txBody>
+      </p:sp>
+      <p:sp>
+        <p:nvSpPr>
+          <p:cNvPr id="11" name="TextBox 10"/>
           <p:cNvSpPr txBox="1"/>
           <p:nvPr/>
         </p:nvSpPr>
         <p:spPr>
           <a:xfrm>
-            <a:off x="8046720" y="3017520"/>
-            <a:ext cx="3291840" cy="2926080"/>
+            <a:off x="1371600" y="4480560"/>
+            <a:ext cx="10271455" cy="1188720"/>
           </a:xfrm>
           <a:prstGeom prst="rect">
             <a:avLst/>
@@ -6394,13 +8473,46 @@
           <a:p>
             <a:pPr algn="l"/>
             <a:r>
-              <a:rPr sz="2200" b="0" i="0">
-                <a:solidFill>
-                  <a:srgbClr val="FFFFFF"/>
-                </a:solidFill>
-                <a:latin typeface="Cambria"/>
-              </a:rPr>
-              <a:t>Well-maintained machines last longer, waste less and are safer.</a:t>
+              <a:rPr sz="2400" b="0" i="0">
+                <a:solidFill>
+                  <a:srgbClr val="202122"/>
+                </a:solidFill>
+                <a:latin typeface="Calibri"/>
+              </a:rPr>
+              <a:t>Give one drawback of planned maintenance.</a:t>
+            </a:r>
+          </a:p>
+        </p:txBody>
+      </p:sp>
+      <p:sp>
+        <p:nvSpPr>
+          <p:cNvPr id="12" name="TextBox 11"/>
+          <p:cNvSpPr txBox="1"/>
+          <p:nvPr/>
+        </p:nvSpPr>
+        <p:spPr>
+          <a:xfrm>
+            <a:off x="548640" y="5852160"/>
+            <a:ext cx="11094415" cy="365760"/>
+          </a:xfrm>
+          <a:prstGeom prst="rect">
+            <a:avLst/>
+          </a:prstGeom>
+          <a:noFill/>
+        </p:spPr>
+        <p:txBody>
+          <a:bodyPr wrap="square" anchor="t" lIns="0" rIns="0" tIns="0" bIns="0"/>
+          <a:lstStyle/>
+          <a:p>
+            <a:pPr algn="l"/>
+            <a:r>
+              <a:rPr sz="1300" b="0" i="1">
+                <a:solidFill>
+                  <a:srgbClr val="54595D"/>
+                </a:solidFill>
+                <a:latin typeface="Calibri"/>
+              </a:rPr>
+              <a:t>Answer on mini whiteboards or in your book. Answers are in the speaker notes.</a:t>
             </a:r>
           </a:p>
         </p:txBody>
@@ -6492,7 +8604,7 @@
                 </a:solidFill>
                 <a:latin typeface="Cambria"/>
               </a:rPr>
-              <a:t>Check your understanding</a:t>
+              <a:t>Roles and operations</a:t>
             </a:r>
           </a:p>
         </p:txBody>
@@ -6565,14 +8677,58 @@
       </p:sp>
       <p:sp>
         <p:nvSpPr>
-          <p:cNvPr id="6" name="Oval 5"/>
+          <p:cNvPr id="6" name="Rounded Rectangle 5"/>
           <p:cNvSpPr/>
           <p:nvPr/>
         </p:nvSpPr>
         <p:spPr>
           <a:xfrm>
-            <a:off x="548640" y="1618488"/>
-            <a:ext cx="411480" cy="411480"/>
+            <a:off x="548640" y="1600200"/>
+            <a:ext cx="5410047" cy="2148840"/>
+          </a:xfrm>
+          <a:prstGeom prst="roundRect">
+            <a:avLst>
+              <a:gd name="adj" fmla="val 6000"/>
+            </a:avLst>
+          </a:prstGeom>
+          <a:solidFill>
+            <a:srgbClr val="EAF3FF"/>
+          </a:solidFill>
+          <a:ln>
+            <a:noFill/>
+          </a:ln>
+          <a:effectLst/>
+        </p:spPr>
+        <p:style>
+          <a:lnRef idx="1">
+            <a:schemeClr val="accent1"/>
+          </a:lnRef>
+          <a:fillRef idx="3">
+            <a:schemeClr val="accent1"/>
+          </a:fillRef>
+          <a:effectRef idx="2">
+            <a:schemeClr val="accent1"/>
+          </a:effectRef>
+          <a:fontRef idx="minor">
+            <a:schemeClr val="lt1"/>
+          </a:fontRef>
+        </p:style>
+        <p:txBody>
+          <a:bodyPr rtlCol="0" anchor="ctr"/>
+          <a:lstStyle/>
+          <a:p/>
+        </p:txBody>
+      </p:sp>
+      <p:sp>
+        <p:nvSpPr>
+          <p:cNvPr id="7" name="Oval 6"/>
+          <p:cNvSpPr/>
+          <p:nvPr/>
+        </p:nvSpPr>
+        <p:spPr>
+          <a:xfrm>
+            <a:off x="777240" y="1828800"/>
+            <a:ext cx="457200" cy="457200"/>
           </a:xfrm>
           <a:prstGeom prst="ellipse">
             <a:avLst/>
@@ -6605,7 +8761,7 @@
           <a:p>
             <a:pPr algn="ctr"/>
             <a:r>
-              <a:rPr sz="1400" b="1">
+              <a:rPr sz="1500" b="1">
                 <a:solidFill>
                   <a:srgbClr val="202122"/>
                 </a:solidFill>
@@ -6618,14 +8774,14 @@
       </p:sp>
       <p:sp>
         <p:nvSpPr>
-          <p:cNvPr id="7" name="TextBox 6"/>
+          <p:cNvPr id="8" name="TextBox 7"/>
           <p:cNvSpPr txBox="1"/>
           <p:nvPr/>
         </p:nvSpPr>
         <p:spPr>
           <a:xfrm>
-            <a:off x="1234440" y="1600200"/>
-            <a:ext cx="10408615" cy="1030986"/>
+            <a:off x="1371600" y="1801368"/>
+            <a:ext cx="4404207" cy="512064"/>
           </a:xfrm>
           <a:prstGeom prst="rect">
             <a:avLst/>
@@ -6633,32 +8789,109 @@
           <a:noFill/>
         </p:spPr>
         <p:txBody>
+          <a:bodyPr wrap="square" anchor="ctr" lIns="0" rIns="0" tIns="0" bIns="0"/>
+          <a:lstStyle/>
+          <a:p>
+            <a:pPr algn="l"/>
+            <a:r>
+              <a:rPr sz="1900" b="1" i="0">
+                <a:solidFill>
+                  <a:srgbClr val="03306E"/>
+                </a:solidFill>
+                <a:latin typeface="Calibri"/>
+              </a:rPr>
+              <a:t>Machine operator</a:t>
+            </a:r>
+          </a:p>
+        </p:txBody>
+      </p:sp>
+      <p:sp>
+        <p:nvSpPr>
+          <p:cNvPr id="9" name="TextBox 8"/>
+          <p:cNvSpPr txBox="1"/>
+          <p:nvPr/>
+        </p:nvSpPr>
+        <p:spPr>
+          <a:xfrm>
+            <a:off x="777240" y="2468880"/>
+            <a:ext cx="4952847" cy="1143000"/>
+          </a:xfrm>
+          <a:prstGeom prst="rect">
+            <a:avLst/>
+          </a:prstGeom>
+          <a:noFill/>
+        </p:spPr>
+        <p:txBody>
           <a:bodyPr wrap="square" anchor="t" lIns="0" rIns="0" tIns="0" bIns="0"/>
           <a:lstStyle/>
           <a:p>
             <a:pPr algn="l"/>
             <a:r>
-              <a:rPr sz="2200" b="0" i="0">
+              <a:rPr sz="2000" b="0" i="0">
                 <a:solidFill>
                   <a:srgbClr val="202122"/>
                 </a:solidFill>
                 <a:latin typeface="Calibri"/>
               </a:rPr>
-              <a:t>Which maintenance type waits until something breaks?</a:t>
-            </a:r>
-          </a:p>
-        </p:txBody>
-      </p:sp>
-      <p:sp>
-        <p:nvSpPr>
-          <p:cNvPr id="8" name="Oval 7"/>
+              <a:t>Runs the equipment and reports faults.</a:t>
+            </a:r>
+          </a:p>
+        </p:txBody>
+      </p:sp>
+      <p:sp>
+        <p:nvSpPr>
+          <p:cNvPr id="10" name="Rounded Rectangle 9"/>
           <p:cNvSpPr/>
           <p:nvPr/>
         </p:nvSpPr>
         <p:spPr>
           <a:xfrm>
-            <a:off x="548640" y="2814066"/>
-            <a:ext cx="411480" cy="411480"/>
+            <a:off x="6233007" y="1600200"/>
+            <a:ext cx="5410047" cy="2148840"/>
+          </a:xfrm>
+          <a:prstGeom prst="roundRect">
+            <a:avLst>
+              <a:gd name="adj" fmla="val 6000"/>
+            </a:avLst>
+          </a:prstGeom>
+          <a:solidFill>
+            <a:srgbClr val="EAF3FF"/>
+          </a:solidFill>
+          <a:ln>
+            <a:noFill/>
+          </a:ln>
+          <a:effectLst/>
+        </p:spPr>
+        <p:style>
+          <a:lnRef idx="1">
+            <a:schemeClr val="accent1"/>
+          </a:lnRef>
+          <a:fillRef idx="3">
+            <a:schemeClr val="accent1"/>
+          </a:fillRef>
+          <a:effectRef idx="2">
+            <a:schemeClr val="accent1"/>
+          </a:effectRef>
+          <a:fontRef idx="minor">
+            <a:schemeClr val="lt1"/>
+          </a:fontRef>
+        </p:style>
+        <p:txBody>
+          <a:bodyPr rtlCol="0" anchor="ctr"/>
+          <a:lstStyle/>
+          <a:p/>
+        </p:txBody>
+      </p:sp>
+      <p:sp>
+        <p:nvSpPr>
+          <p:cNvPr id="11" name="Oval 10"/>
+          <p:cNvSpPr/>
+          <p:nvPr/>
+        </p:nvSpPr>
+        <p:spPr>
+          <a:xfrm>
+            <a:off x="6461607" y="1828800"/>
+            <a:ext cx="457200" cy="457200"/>
           </a:xfrm>
           <a:prstGeom prst="ellipse">
             <a:avLst/>
@@ -6691,7 +8924,7 @@
           <a:p>
             <a:pPr algn="ctr"/>
             <a:r>
-              <a:rPr sz="1400" b="1">
+              <a:rPr sz="1500" b="1">
                 <a:solidFill>
                   <a:srgbClr val="202122"/>
                 </a:solidFill>
@@ -6704,14 +8937,14 @@
       </p:sp>
       <p:sp>
         <p:nvSpPr>
-          <p:cNvPr id="9" name="TextBox 8"/>
+          <p:cNvPr id="12" name="TextBox 11"/>
           <p:cNvSpPr txBox="1"/>
           <p:nvPr/>
         </p:nvSpPr>
         <p:spPr>
           <a:xfrm>
-            <a:off x="1234440" y="2795778"/>
-            <a:ext cx="10408615" cy="1030986"/>
+            <a:off x="7055967" y="1801368"/>
+            <a:ext cx="4404207" cy="512064"/>
           </a:xfrm>
           <a:prstGeom prst="rect">
             <a:avLst/>
@@ -6719,32 +8952,109 @@
           <a:noFill/>
         </p:spPr>
         <p:txBody>
+          <a:bodyPr wrap="square" anchor="ctr" lIns="0" rIns="0" tIns="0" bIns="0"/>
+          <a:lstStyle/>
+          <a:p>
+            <a:pPr algn="l"/>
+            <a:r>
+              <a:rPr sz="1900" b="1" i="0">
+                <a:solidFill>
+                  <a:srgbClr val="03306E"/>
+                </a:solidFill>
+                <a:latin typeface="Calibri"/>
+              </a:rPr>
+              <a:t>Maintenance engineer</a:t>
+            </a:r>
+          </a:p>
+        </p:txBody>
+      </p:sp>
+      <p:sp>
+        <p:nvSpPr>
+          <p:cNvPr id="13" name="TextBox 12"/>
+          <p:cNvSpPr txBox="1"/>
+          <p:nvPr/>
+        </p:nvSpPr>
+        <p:spPr>
+          <a:xfrm>
+            <a:off x="6461607" y="2468880"/>
+            <a:ext cx="4952847" cy="1143000"/>
+          </a:xfrm>
+          <a:prstGeom prst="rect">
+            <a:avLst/>
+          </a:prstGeom>
+          <a:noFill/>
+        </p:spPr>
+        <p:txBody>
           <a:bodyPr wrap="square" anchor="t" lIns="0" rIns="0" tIns="0" bIns="0"/>
           <a:lstStyle/>
           <a:p>
             <a:pPr algn="l"/>
             <a:r>
-              <a:rPr sz="2200" b="0" i="0">
+              <a:rPr sz="2000" b="0" i="0">
                 <a:solidFill>
                   <a:srgbClr val="202122"/>
                 </a:solidFill>
                 <a:latin typeface="Calibri"/>
               </a:rPr>
-              <a:t>What is condition-based monitoring?</a:t>
-            </a:r>
-          </a:p>
-        </p:txBody>
-      </p:sp>
-      <p:sp>
-        <p:nvSpPr>
-          <p:cNvPr id="10" name="Oval 9"/>
+              <a:t>Services, repairs and monitors equipment.</a:t>
+            </a:r>
+          </a:p>
+        </p:txBody>
+      </p:sp>
+      <p:sp>
+        <p:nvSpPr>
+          <p:cNvPr id="14" name="Rounded Rectangle 13"/>
           <p:cNvSpPr/>
           <p:nvPr/>
         </p:nvSpPr>
         <p:spPr>
           <a:xfrm>
-            <a:off x="548640" y="4009644"/>
-            <a:ext cx="411480" cy="411480"/>
+            <a:off x="548640" y="4023360"/>
+            <a:ext cx="5410047" cy="2148840"/>
+          </a:xfrm>
+          <a:prstGeom prst="roundRect">
+            <a:avLst>
+              <a:gd name="adj" fmla="val 6000"/>
+            </a:avLst>
+          </a:prstGeom>
+          <a:solidFill>
+            <a:srgbClr val="EAF3FF"/>
+          </a:solidFill>
+          <a:ln>
+            <a:noFill/>
+          </a:ln>
+          <a:effectLst/>
+        </p:spPr>
+        <p:style>
+          <a:lnRef idx="1">
+            <a:schemeClr val="accent1"/>
+          </a:lnRef>
+          <a:fillRef idx="3">
+            <a:schemeClr val="accent1"/>
+          </a:fillRef>
+          <a:effectRef idx="2">
+            <a:schemeClr val="accent1"/>
+          </a:effectRef>
+          <a:fontRef idx="minor">
+            <a:schemeClr val="lt1"/>
+          </a:fontRef>
+        </p:style>
+        <p:txBody>
+          <a:bodyPr rtlCol="0" anchor="ctr"/>
+          <a:lstStyle/>
+          <a:p/>
+        </p:txBody>
+      </p:sp>
+      <p:sp>
+        <p:nvSpPr>
+          <p:cNvPr id="15" name="Oval 14"/>
+          <p:cNvSpPr/>
+          <p:nvPr/>
+        </p:nvSpPr>
+        <p:spPr>
+          <a:xfrm>
+            <a:off x="777240" y="4251960"/>
+            <a:ext cx="457200" cy="457200"/>
           </a:xfrm>
           <a:prstGeom prst="ellipse">
             <a:avLst/>
@@ -6777,7 +9087,7 @@
           <a:p>
             <a:pPr algn="ctr"/>
             <a:r>
-              <a:rPr sz="1400" b="1">
+              <a:rPr sz="1500" b="1">
                 <a:solidFill>
                   <a:srgbClr val="202122"/>
                 </a:solidFill>
@@ -6790,14 +9100,14 @@
       </p:sp>
       <p:sp>
         <p:nvSpPr>
-          <p:cNvPr id="11" name="TextBox 10"/>
+          <p:cNvPr id="16" name="TextBox 15"/>
           <p:cNvSpPr txBox="1"/>
           <p:nvPr/>
         </p:nvSpPr>
         <p:spPr>
           <a:xfrm>
-            <a:off x="1234440" y="3991356"/>
-            <a:ext cx="10408615" cy="1030986"/>
+            <a:off x="1371600" y="4224528"/>
+            <a:ext cx="4404207" cy="512064"/>
           </a:xfrm>
           <a:prstGeom prst="rect">
             <a:avLst/>
@@ -6805,32 +9115,109 @@
           <a:noFill/>
         </p:spPr>
         <p:txBody>
+          <a:bodyPr wrap="square" anchor="ctr" lIns="0" rIns="0" tIns="0" bIns="0"/>
+          <a:lstStyle/>
+          <a:p>
+            <a:pPr algn="l"/>
+            <a:r>
+              <a:rPr sz="1900" b="1" i="0">
+                <a:solidFill>
+                  <a:srgbClr val="03306E"/>
+                </a:solidFill>
+                <a:latin typeface="Calibri"/>
+              </a:rPr>
+              <a:t>Maintenance manager</a:t>
+            </a:r>
+          </a:p>
+        </p:txBody>
+      </p:sp>
+      <p:sp>
+        <p:nvSpPr>
+          <p:cNvPr id="17" name="TextBox 16"/>
+          <p:cNvSpPr txBox="1"/>
+          <p:nvPr/>
+        </p:nvSpPr>
+        <p:spPr>
+          <a:xfrm>
+            <a:off x="777240" y="4892040"/>
+            <a:ext cx="4952847" cy="1143000"/>
+          </a:xfrm>
+          <a:prstGeom prst="rect">
+            <a:avLst/>
+          </a:prstGeom>
+          <a:noFill/>
+        </p:spPr>
+        <p:txBody>
           <a:bodyPr wrap="square" anchor="t" lIns="0" rIns="0" tIns="0" bIns="0"/>
           <a:lstStyle/>
           <a:p>
             <a:pPr algn="l"/>
             <a:r>
-              <a:rPr sz="2200" b="0" i="0">
+              <a:rPr sz="2000" b="0" i="0">
                 <a:solidFill>
                   <a:srgbClr val="202122"/>
                 </a:solidFill>
                 <a:latin typeface="Calibri"/>
               </a:rPr>
-              <a:t>Why commission new equipment?</a:t>
-            </a:r>
-          </a:p>
-        </p:txBody>
-      </p:sp>
-      <p:sp>
-        <p:nvSpPr>
-          <p:cNvPr id="12" name="Oval 11"/>
+              <a:t>Plans schedules, resources and priorities.</a:t>
+            </a:r>
+          </a:p>
+        </p:txBody>
+      </p:sp>
+      <p:sp>
+        <p:nvSpPr>
+          <p:cNvPr id="18" name="Rounded Rectangle 17"/>
           <p:cNvSpPr/>
           <p:nvPr/>
         </p:nvSpPr>
         <p:spPr>
           <a:xfrm>
-            <a:off x="548640" y="5205221"/>
-            <a:ext cx="411480" cy="411480"/>
+            <a:off x="6233007" y="4023360"/>
+            <a:ext cx="5410047" cy="2148840"/>
+          </a:xfrm>
+          <a:prstGeom prst="roundRect">
+            <a:avLst>
+              <a:gd name="adj" fmla="val 6000"/>
+            </a:avLst>
+          </a:prstGeom>
+          <a:solidFill>
+            <a:srgbClr val="EAF3FF"/>
+          </a:solidFill>
+          <a:ln>
+            <a:noFill/>
+          </a:ln>
+          <a:effectLst/>
+        </p:spPr>
+        <p:style>
+          <a:lnRef idx="1">
+            <a:schemeClr val="accent1"/>
+          </a:lnRef>
+          <a:fillRef idx="3">
+            <a:schemeClr val="accent1"/>
+          </a:fillRef>
+          <a:effectRef idx="2">
+            <a:schemeClr val="accent1"/>
+          </a:effectRef>
+          <a:fontRef idx="minor">
+            <a:schemeClr val="lt1"/>
+          </a:fontRef>
+        </p:style>
+        <p:txBody>
+          <a:bodyPr rtlCol="0" anchor="ctr"/>
+          <a:lstStyle/>
+          <a:p/>
+        </p:txBody>
+      </p:sp>
+      <p:sp>
+        <p:nvSpPr>
+          <p:cNvPr id="19" name="Oval 18"/>
+          <p:cNvSpPr/>
+          <p:nvPr/>
+        </p:nvSpPr>
+        <p:spPr>
+          <a:xfrm>
+            <a:off x="6461607" y="4251960"/>
+            <a:ext cx="457200" cy="457200"/>
           </a:xfrm>
           <a:prstGeom prst="ellipse">
             <a:avLst/>
@@ -6863,7 +9250,7 @@
           <a:p>
             <a:pPr algn="ctr"/>
             <a:r>
-              <a:rPr sz="1400" b="1">
+              <a:rPr sz="1500" b="1">
                 <a:solidFill>
                   <a:srgbClr val="202122"/>
                 </a:solidFill>
@@ -6876,14 +9263,14 @@
       </p:sp>
       <p:sp>
         <p:nvSpPr>
-          <p:cNvPr id="13" name="TextBox 12"/>
+          <p:cNvPr id="20" name="TextBox 19"/>
           <p:cNvSpPr txBox="1"/>
           <p:nvPr/>
         </p:nvSpPr>
         <p:spPr>
           <a:xfrm>
-            <a:off x="1234440" y="5186933"/>
-            <a:ext cx="10408615" cy="1030986"/>
+            <a:off x="7055967" y="4224528"/>
+            <a:ext cx="4404207" cy="512064"/>
           </a:xfrm>
           <a:prstGeom prst="rect">
             <a:avLst/>
@@ -6891,18 +9278,51 @@
           <a:noFill/>
         </p:spPr>
         <p:txBody>
+          <a:bodyPr wrap="square" anchor="ctr" lIns="0" rIns="0" tIns="0" bIns="0"/>
+          <a:lstStyle/>
+          <a:p>
+            <a:pPr algn="l"/>
+            <a:r>
+              <a:rPr sz="1900" b="1" i="0">
+                <a:solidFill>
+                  <a:srgbClr val="03306E"/>
+                </a:solidFill>
+                <a:latin typeface="Calibri"/>
+              </a:rPr>
+              <a:t>Operations</a:t>
+            </a:r>
+          </a:p>
+        </p:txBody>
+      </p:sp>
+      <p:sp>
+        <p:nvSpPr>
+          <p:cNvPr id="21" name="TextBox 20"/>
+          <p:cNvSpPr txBox="1"/>
+          <p:nvPr/>
+        </p:nvSpPr>
+        <p:spPr>
+          <a:xfrm>
+            <a:off x="6461607" y="4892040"/>
+            <a:ext cx="4952847" cy="1143000"/>
+          </a:xfrm>
+          <a:prstGeom prst="rect">
+            <a:avLst/>
+          </a:prstGeom>
+          <a:noFill/>
+        </p:spPr>
+        <p:txBody>
           <a:bodyPr wrap="square" anchor="t" lIns="0" rIns="0" tIns="0" bIns="0"/>
           <a:lstStyle/>
           <a:p>
             <a:pPr algn="l"/>
             <a:r>
-              <a:rPr sz="2200" b="0" i="0">
+              <a:rPr sz="2000" b="0" i="0">
                 <a:solidFill>
                   <a:srgbClr val="202122"/>
                 </a:solidFill>
                 <a:latin typeface="Calibri"/>
               </a:rPr>
-              <a:t>Who plans maintenance schedules?</a:t>
+              <a:t>Monitoring, repair, shutdown and servicing.</a:t>
             </a:r>
           </a:p>
         </p:txBody>
@@ -6994,7 +9414,7 @@
                 </a:solidFill>
                 <a:latin typeface="Cambria"/>
               </a:rPr>
-              <a:t>Answers</a:t>
+              <a:t>Installation and the future of maintenance</a:t>
             </a:r>
           </a:p>
         </p:txBody>
@@ -7067,14 +9487,129 @@
       </p:sp>
       <p:sp>
         <p:nvSpPr>
-          <p:cNvPr id="6" name="Oval 5"/>
+          <p:cNvPr id="6" name="TextBox 5"/>
+          <p:cNvSpPr txBox="1"/>
+          <p:nvPr/>
+        </p:nvSpPr>
+        <p:spPr>
+          <a:xfrm>
+            <a:off x="548640" y="1554480"/>
+            <a:ext cx="6720840" cy="4617720"/>
+          </a:xfrm>
+          <a:prstGeom prst="rect">
+            <a:avLst/>
+          </a:prstGeom>
+          <a:noFill/>
+        </p:spPr>
+        <p:txBody>
+          <a:bodyPr wrap="square" lIns="0" rIns="0" tIns="0" bIns="0">
+            <a:spAutoFit/>
+          </a:bodyPr>
+          <a:lstStyle/>
+          <a:p>
+            <a:pPr>
+              <a:spcAft>
+                <a:spcPts val="1260"/>
+              </a:spcAft>
+            </a:pPr>
+            <a:r>
+              <a:rPr sz="2100" b="0">
+                <a:solidFill>
+                  <a:srgbClr val="202122"/>
+                </a:solidFill>
+                <a:latin typeface="Calibri"/>
+              </a:rPr>
+              <a:t>New equipment must be installed to meet customer requirements, regulations and the manufacturer's specifications. Commissioning then checks it works safely and as intended before it goes into use.</a:t>
+            </a:r>
+          </a:p>
+          <a:p>
+            <a:pPr>
+              <a:spcAft>
+                <a:spcPts val="1260"/>
+              </a:spcAft>
+            </a:pPr>
+            <a:r>
+              <a:rPr sz="2100" b="0">
+                <a:solidFill>
+                  <a:srgbClr val="202122"/>
+                </a:solidFill>
+                <a:latin typeface="Calibri"/>
+              </a:rPr>
+              <a:t>Maintenance roles include the machine operator (who runs it and reports faults), the maintenance engineer (who services and repairs it) and the maintenance manager (who plans the work).</a:t>
+            </a:r>
+          </a:p>
+          <a:p>
+            <a:pPr>
+              <a:spcAft>
+                <a:spcPts val="1260"/>
+              </a:spcAft>
+            </a:pPr>
+            <a:r>
+              <a:rPr sz="2100" b="0">
+                <a:solidFill>
+                  <a:srgbClr val="202122"/>
+                </a:solidFill>
+                <a:latin typeface="Calibri"/>
+              </a:rPr>
+              <a:t>New technology, such as sensors, data and predictive software, is making maintenance smarter. Good maintenance also helps the environment: efficient machines use less energy, last longer and create less waste.</a:t>
+            </a:r>
+          </a:p>
+        </p:txBody>
+      </p:sp>
+      <p:sp>
+        <p:nvSpPr>
+          <p:cNvPr id="7" name="Rounded Rectangle 6"/>
           <p:cNvSpPr/>
           <p:nvPr/>
         </p:nvSpPr>
         <p:spPr>
           <a:xfrm>
-            <a:off x="548640" y="1618488"/>
-            <a:ext cx="411480" cy="411480"/>
+            <a:off x="7772400" y="1554480"/>
+            <a:ext cx="3867912" cy="4526280"/>
+          </a:xfrm>
+          <a:prstGeom prst="roundRect">
+            <a:avLst>
+              <a:gd name="adj" fmla="val 8000"/>
+            </a:avLst>
+          </a:prstGeom>
+          <a:solidFill>
+            <a:srgbClr val="03306E"/>
+          </a:solidFill>
+          <a:ln>
+            <a:noFill/>
+          </a:ln>
+          <a:effectLst/>
+        </p:spPr>
+        <p:style>
+          <a:lnRef idx="1">
+            <a:schemeClr val="accent1"/>
+          </a:lnRef>
+          <a:fillRef idx="3">
+            <a:schemeClr val="accent1"/>
+          </a:fillRef>
+          <a:effectRef idx="2">
+            <a:schemeClr val="accent1"/>
+          </a:effectRef>
+          <a:fontRef idx="minor">
+            <a:schemeClr val="lt1"/>
+          </a:fontRef>
+        </p:style>
+        <p:txBody>
+          <a:bodyPr rtlCol="0" anchor="ctr"/>
+          <a:lstStyle/>
+          <a:p/>
+        </p:txBody>
+      </p:sp>
+      <p:sp>
+        <p:nvSpPr>
+          <p:cNvPr id="8" name="Oval 7"/>
+          <p:cNvSpPr/>
+          <p:nvPr/>
+        </p:nvSpPr>
+        <p:spPr>
+          <a:xfrm>
+            <a:off x="8046720" y="1828800"/>
+            <a:ext cx="548640" cy="548640"/>
           </a:xfrm>
           <a:prstGeom prst="ellipse">
             <a:avLst/>
@@ -7107,110 +9642,13 @@
           <a:p>
             <a:pPr algn="ctr"/>
             <a:r>
-              <a:rPr sz="1400" b="1">
+              <a:rPr sz="1300" b="1">
                 <a:solidFill>
                   <a:srgbClr val="202122"/>
                 </a:solidFill>
                 <a:latin typeface="Calibri"/>
               </a:rPr>
-              <a:t>1</a:t>
-            </a:r>
-          </a:p>
-        </p:txBody>
-      </p:sp>
-      <p:sp>
-        <p:nvSpPr>
-          <p:cNvPr id="7" name="TextBox 6"/>
-          <p:cNvSpPr txBox="1"/>
-          <p:nvPr/>
-        </p:nvSpPr>
-        <p:spPr>
-          <a:xfrm>
-            <a:off x="1234440" y="1600200"/>
-            <a:ext cx="10408615" cy="1030986"/>
-          </a:xfrm>
-          <a:prstGeom prst="rect">
-            <a:avLst/>
-          </a:prstGeom>
-          <a:noFill/>
-        </p:spPr>
-        <p:txBody>
-          <a:bodyPr wrap="square" anchor="t" lIns="0" rIns="0" tIns="0" bIns="0"/>
-          <a:lstStyle/>
-          <a:p>
-            <a:pPr algn="l"/>
-            <a:r>
-              <a:rPr sz="1800" b="0" i="0">
-                <a:solidFill>
-                  <a:srgbClr val="54595D"/>
-                </a:solidFill>
-                <a:latin typeface="Calibri"/>
-              </a:rPr>
-              <a:t>Which maintenance type waits until something breaks?</a:t>
-            </a:r>
-          </a:p>
-          <a:p>
-            <a:r>
-              <a:rPr sz="1800" b="1">
-                <a:solidFill>
-                  <a:srgbClr val="03306E"/>
-                </a:solidFill>
-                <a:latin typeface="Calibri"/>
-              </a:rPr>
-              <a:t>Reactive.</a:t>
-            </a:r>
-          </a:p>
-        </p:txBody>
-      </p:sp>
-      <p:sp>
-        <p:nvSpPr>
-          <p:cNvPr id="8" name="Oval 7"/>
-          <p:cNvSpPr/>
-          <p:nvPr/>
-        </p:nvSpPr>
-        <p:spPr>
-          <a:xfrm>
-            <a:off x="548640" y="2814066"/>
-            <a:ext cx="411480" cy="411480"/>
-          </a:xfrm>
-          <a:prstGeom prst="ellipse">
-            <a:avLst/>
-          </a:prstGeom>
-          <a:solidFill>
-            <a:srgbClr val="F2B705"/>
-          </a:solidFill>
-          <a:ln>
-            <a:noFill/>
-          </a:ln>
-          <a:effectLst/>
-        </p:spPr>
-        <p:style>
-          <a:lnRef idx="1">
-            <a:schemeClr val="accent1"/>
-          </a:lnRef>
-          <a:fillRef idx="3">
-            <a:schemeClr val="accent1"/>
-          </a:fillRef>
-          <a:effectRef idx="2">
-            <a:schemeClr val="accent1"/>
-          </a:effectRef>
-          <a:fontRef idx="minor">
-            <a:schemeClr val="lt1"/>
-          </a:fontRef>
-        </p:style>
-        <p:txBody>
-          <a:bodyPr rtlCol="0" anchor="ctr" lIns="0" rIns="0" tIns="0" bIns="0"/>
-          <a:lstStyle/>
-          <a:p>
-            <a:pPr algn="ctr"/>
-            <a:r>
-              <a:rPr sz="1400" b="1">
-                <a:solidFill>
-                  <a:srgbClr val="202122"/>
-                </a:solidFill>
-                <a:latin typeface="Calibri"/>
-              </a:rPr>
-              <a:t>2</a:t>
+              <a:t>e.g.</a:t>
             </a:r>
           </a:p>
         </p:txBody>
@@ -7223,8 +9661,8 @@
         </p:nvSpPr>
         <p:spPr>
           <a:xfrm>
-            <a:off x="1234440" y="2795778"/>
-            <a:ext cx="10408615" cy="1030986"/>
+            <a:off x="8046720" y="2560320"/>
+            <a:ext cx="3291840" cy="365760"/>
           </a:xfrm>
           <a:prstGeom prst="rect">
             <a:avLst/>
@@ -7237,91 +9675,27 @@
           <a:p>
             <a:pPr algn="l"/>
             <a:r>
-              <a:rPr sz="1800" b="0" i="0">
-                <a:solidFill>
-                  <a:srgbClr val="54595D"/>
-                </a:solidFill>
-                <a:latin typeface="Calibri"/>
-              </a:rPr>
-              <a:t>What is condition-based monitoring?</a:t>
-            </a:r>
-          </a:p>
-          <a:p>
-            <a:r>
-              <a:rPr sz="1800" b="1">
-                <a:solidFill>
-                  <a:srgbClr val="03306E"/>
-                </a:solidFill>
-                <a:latin typeface="Calibri"/>
-              </a:rPr>
-              <a:t>Watching equipment readings and acting when they change.</a:t>
-            </a:r>
-          </a:p>
-        </p:txBody>
-      </p:sp>
-      <p:sp>
-        <p:nvSpPr>
-          <p:cNvPr id="10" name="Oval 9"/>
-          <p:cNvSpPr/>
-          <p:nvPr/>
-        </p:nvSpPr>
-        <p:spPr>
-          <a:xfrm>
-            <a:off x="548640" y="4009644"/>
-            <a:ext cx="411480" cy="411480"/>
-          </a:xfrm>
-          <a:prstGeom prst="ellipse">
-            <a:avLst/>
-          </a:prstGeom>
-          <a:solidFill>
-            <a:srgbClr val="F2B705"/>
-          </a:solidFill>
-          <a:ln>
-            <a:noFill/>
-          </a:ln>
-          <a:effectLst/>
-        </p:spPr>
-        <p:style>
-          <a:lnRef idx="1">
-            <a:schemeClr val="accent1"/>
-          </a:lnRef>
-          <a:fillRef idx="3">
-            <a:schemeClr val="accent1"/>
-          </a:fillRef>
-          <a:effectRef idx="2">
-            <a:schemeClr val="accent1"/>
-          </a:effectRef>
-          <a:fontRef idx="minor">
-            <a:schemeClr val="lt1"/>
-          </a:fontRef>
-        </p:style>
-        <p:txBody>
-          <a:bodyPr rtlCol="0" anchor="ctr" lIns="0" rIns="0" tIns="0" bIns="0"/>
-          <a:lstStyle/>
-          <a:p>
-            <a:pPr algn="ctr"/>
-            <a:r>
-              <a:rPr sz="1400" b="1">
-                <a:solidFill>
-                  <a:srgbClr val="202122"/>
-                </a:solidFill>
-                <a:latin typeface="Calibri"/>
-              </a:rPr>
-              <a:t>3</a:t>
-            </a:r>
-          </a:p>
-        </p:txBody>
-      </p:sp>
-      <p:sp>
-        <p:nvSpPr>
-          <p:cNvPr id="11" name="TextBox 10"/>
+              <a:rPr sz="1300" b="1" i="0">
+                <a:solidFill>
+                  <a:srgbClr val="A9C8F0"/>
+                </a:solidFill>
+                <a:latin typeface="Calibri"/>
+              </a:rPr>
+              <a:t>EXAMPLE</a:t>
+            </a:r>
+          </a:p>
+        </p:txBody>
+      </p:sp>
+      <p:sp>
+        <p:nvSpPr>
+          <p:cNvPr id="10" name="TextBox 9"/>
           <p:cNvSpPr txBox="1"/>
           <p:nvPr/>
         </p:nvSpPr>
         <p:spPr>
           <a:xfrm>
-            <a:off x="1234440" y="3991356"/>
-            <a:ext cx="10408615" cy="1030986"/>
+            <a:off x="8046720" y="2971800"/>
+            <a:ext cx="3291840" cy="2971800"/>
           </a:xfrm>
           <a:prstGeom prst="rect">
             <a:avLst/>
@@ -7334,121 +9708,13 @@
           <a:p>
             <a:pPr algn="l"/>
             <a:r>
-              <a:rPr sz="1800" b="0" i="0">
-                <a:solidFill>
-                  <a:srgbClr val="54595D"/>
-                </a:solidFill>
-                <a:latin typeface="Calibri"/>
-              </a:rPr>
-              <a:t>Why commission new equipment?</a:t>
-            </a:r>
-          </a:p>
-          <a:p>
-            <a:r>
-              <a:rPr sz="1800" b="1">
-                <a:solidFill>
-                  <a:srgbClr val="03306E"/>
-                </a:solidFill>
-                <a:latin typeface="Calibri"/>
-              </a:rPr>
-              <a:t>To prove it works safely and as specified before use.</a:t>
-            </a:r>
-          </a:p>
-        </p:txBody>
-      </p:sp>
-      <p:sp>
-        <p:nvSpPr>
-          <p:cNvPr id="12" name="Oval 11"/>
-          <p:cNvSpPr/>
-          <p:nvPr/>
-        </p:nvSpPr>
-        <p:spPr>
-          <a:xfrm>
-            <a:off x="548640" y="5205221"/>
-            <a:ext cx="411480" cy="411480"/>
-          </a:xfrm>
-          <a:prstGeom prst="ellipse">
-            <a:avLst/>
-          </a:prstGeom>
-          <a:solidFill>
-            <a:srgbClr val="F2B705"/>
-          </a:solidFill>
-          <a:ln>
-            <a:noFill/>
-          </a:ln>
-          <a:effectLst/>
-        </p:spPr>
-        <p:style>
-          <a:lnRef idx="1">
-            <a:schemeClr val="accent1"/>
-          </a:lnRef>
-          <a:fillRef idx="3">
-            <a:schemeClr val="accent1"/>
-          </a:fillRef>
-          <a:effectRef idx="2">
-            <a:schemeClr val="accent1"/>
-          </a:effectRef>
-          <a:fontRef idx="minor">
-            <a:schemeClr val="lt1"/>
-          </a:fontRef>
-        </p:style>
-        <p:txBody>
-          <a:bodyPr rtlCol="0" anchor="ctr" lIns="0" rIns="0" tIns="0" bIns="0"/>
-          <a:lstStyle/>
-          <a:p>
-            <a:pPr algn="ctr"/>
-            <a:r>
-              <a:rPr sz="1400" b="1">
-                <a:solidFill>
-                  <a:srgbClr val="202122"/>
-                </a:solidFill>
-                <a:latin typeface="Calibri"/>
-              </a:rPr>
-              <a:t>4</a:t>
-            </a:r>
-          </a:p>
-        </p:txBody>
-      </p:sp>
-      <p:sp>
-        <p:nvSpPr>
-          <p:cNvPr id="13" name="TextBox 12"/>
-          <p:cNvSpPr txBox="1"/>
-          <p:nvPr/>
-        </p:nvSpPr>
-        <p:spPr>
-          <a:xfrm>
-            <a:off x="1234440" y="5186933"/>
-            <a:ext cx="10408615" cy="1030986"/>
-          </a:xfrm>
-          <a:prstGeom prst="rect">
-            <a:avLst/>
-          </a:prstGeom>
-          <a:noFill/>
-        </p:spPr>
-        <p:txBody>
-          <a:bodyPr wrap="square" anchor="t" lIns="0" rIns="0" tIns="0" bIns="0"/>
-          <a:lstStyle/>
-          <a:p>
-            <a:pPr algn="l"/>
-            <a:r>
-              <a:rPr sz="1800" b="0" i="0">
-                <a:solidFill>
-                  <a:srgbClr val="54595D"/>
-                </a:solidFill>
-                <a:latin typeface="Calibri"/>
-              </a:rPr>
-              <a:t>Who plans maintenance schedules?</a:t>
-            </a:r>
-          </a:p>
-          <a:p>
-            <a:r>
-              <a:rPr sz="1800" b="1">
-                <a:solidFill>
-                  <a:srgbClr val="03306E"/>
-                </a:solidFill>
-                <a:latin typeface="Calibri"/>
-              </a:rPr>
-              <a:t>The maintenance manager.</a:t>
+              <a:rPr sz="1900" b="0" i="0">
+                <a:solidFill>
+                  <a:srgbClr val="FFFFFF"/>
+                </a:solidFill>
+                <a:latin typeface="Cambria"/>
+              </a:rPr>
+              <a:t>A new CNC machine is levelled and wired to the manufacturer's specification, then commissioned by running test parts and checking the dimensions before production starts.</a:t>
             </a:r>
           </a:p>
         </p:txBody>
@@ -7540,7 +9806,7 @@
                 </a:solidFill>
                 <a:latin typeface="Cambria"/>
               </a:rPr>
-              <a:t>Activity: Maintenance plan</a:t>
+              <a:t>Installation and the future of maintenance</a:t>
             </a:r>
           </a:p>
         </p:txBody>
@@ -7613,19 +9879,198 @@
       </p:sp>
       <p:sp>
         <p:nvSpPr>
-          <p:cNvPr id="6" name="Rounded Rectangle 5"/>
+          <p:cNvPr id="6" name="TextBox 5"/>
+          <p:cNvSpPr txBox="1"/>
+          <p:nvPr/>
+        </p:nvSpPr>
+        <p:spPr>
+          <a:xfrm>
+            <a:off x="548640" y="1600200"/>
+            <a:ext cx="6675120" cy="4572000"/>
+          </a:xfrm>
+          <a:prstGeom prst="rect">
+            <a:avLst/>
+          </a:prstGeom>
+          <a:noFill/>
+        </p:spPr>
+        <p:txBody>
+          <a:bodyPr wrap="square" lIns="0" rIns="0" tIns="0" bIns="0">
+            <a:spAutoFit/>
+          </a:bodyPr>
+          <a:lstStyle/>
+          <a:p>
+            <a:pPr marL="274320" indent="-274320">
+              <a:spcAft>
+                <a:spcPts val="1080"/>
+              </a:spcAft>
+              <a:buClr>
+                <a:srgbClr val="0645AD"/>
+              </a:buClr>
+              <a:buFont typeface="Arial"/>
+              <a:buChar char="•"/>
+            </a:pPr>
+            <a:r>
+              <a:rPr sz="2400" b="0">
+                <a:solidFill>
+                  <a:srgbClr val="202122"/>
+                </a:solidFill>
+                <a:latin typeface="Calibri"/>
+              </a:rPr>
+              <a:t>Installation must meet customer, regulatory and manufacturer requirements.</a:t>
+            </a:r>
+          </a:p>
+          <a:p>
+            <a:pPr marL="274320" indent="-274320">
+              <a:spcAft>
+                <a:spcPts val="1080"/>
+              </a:spcAft>
+              <a:buClr>
+                <a:srgbClr val="0645AD"/>
+              </a:buClr>
+              <a:buFont typeface="Arial"/>
+              <a:buChar char="•"/>
+            </a:pPr>
+            <a:r>
+              <a:rPr sz="2400" b="0">
+                <a:solidFill>
+                  <a:srgbClr val="202122"/>
+                </a:solidFill>
+                <a:latin typeface="Calibri"/>
+              </a:rPr>
+              <a:t>Commissioning checks new equipment works safely and as specified before use.</a:t>
+            </a:r>
+          </a:p>
+          <a:p>
+            <a:pPr marL="274320" indent="-274320">
+              <a:spcAft>
+                <a:spcPts val="1080"/>
+              </a:spcAft>
+              <a:buClr>
+                <a:srgbClr val="0645AD"/>
+              </a:buClr>
+              <a:buFont typeface="Arial"/>
+              <a:buChar char="•"/>
+            </a:pPr>
+            <a:r>
+              <a:rPr sz="2400" b="1">
+                <a:solidFill>
+                  <a:srgbClr val="202122"/>
+                </a:solidFill>
+                <a:latin typeface="Calibri"/>
+              </a:rPr>
+              <a:t>New technology:</a:t>
+            </a:r>
+            <a:r>
+              <a:rPr sz="2400" b="0">
+                <a:solidFill>
+                  <a:srgbClr val="202122"/>
+                </a:solidFill>
+                <a:latin typeface="Calibri"/>
+              </a:rPr>
+              <a:t> sensors and data make condition-based monitoring easier.</a:t>
+            </a:r>
+          </a:p>
+          <a:p>
+            <a:pPr marL="274320" indent="-274320">
+              <a:spcAft>
+                <a:spcPts val="1080"/>
+              </a:spcAft>
+              <a:buClr>
+                <a:srgbClr val="0645AD"/>
+              </a:buClr>
+              <a:buFont typeface="Arial"/>
+              <a:buChar char="•"/>
+            </a:pPr>
+            <a:r>
+              <a:rPr sz="2400" b="0">
+                <a:solidFill>
+                  <a:srgbClr val="202122"/>
+                </a:solidFill>
+                <a:latin typeface="Calibri"/>
+              </a:rPr>
+              <a:t>Good maintenance reduces waste, energy use and environmental impact.</a:t>
+            </a:r>
+          </a:p>
+          <a:p>
+            <a:pPr marL="274320" indent="-274320">
+              <a:spcAft>
+                <a:spcPts val="1080"/>
+              </a:spcAft>
+              <a:buClr>
+                <a:srgbClr val="0645AD"/>
+              </a:buClr>
+              <a:buFont typeface="Arial"/>
+              <a:buChar char="•"/>
+            </a:pPr>
+            <a:r>
+              <a:rPr sz="2400" b="0">
+                <a:solidFill>
+                  <a:srgbClr val="202122"/>
+                </a:solidFill>
+                <a:latin typeface="Calibri"/>
+              </a:rPr>
+              <a:t>Waste from maintenance must be disposed of safely.</a:t>
+            </a:r>
+          </a:p>
+        </p:txBody>
+      </p:sp>
+      <p:sp>
+        <p:nvSpPr>
+          <p:cNvPr id="7" name="Rounded Rectangle 6"/>
           <p:cNvSpPr/>
           <p:nvPr/>
         </p:nvSpPr>
         <p:spPr>
           <a:xfrm>
-            <a:off x="548640" y="1508760"/>
-            <a:ext cx="2011680" cy="457200"/>
+            <a:off x="7772400" y="1600200"/>
+            <a:ext cx="3867912" cy="4434840"/>
           </a:xfrm>
           <a:prstGeom prst="roundRect">
             <a:avLst>
-              <a:gd name="adj" fmla="val 50000"/>
+              <a:gd name="adj" fmla="val 8000"/>
             </a:avLst>
+          </a:prstGeom>
+          <a:solidFill>
+            <a:srgbClr val="03306E"/>
+          </a:solidFill>
+          <a:ln>
+            <a:noFill/>
+          </a:ln>
+          <a:effectLst/>
+        </p:spPr>
+        <p:style>
+          <a:lnRef idx="1">
+            <a:schemeClr val="accent1"/>
+          </a:lnRef>
+          <a:fillRef idx="3">
+            <a:schemeClr val="accent1"/>
+          </a:fillRef>
+          <a:effectRef idx="2">
+            <a:schemeClr val="accent1"/>
+          </a:effectRef>
+          <a:fontRef idx="minor">
+            <a:schemeClr val="lt1"/>
+          </a:fontRef>
+        </p:style>
+        <p:txBody>
+          <a:bodyPr rtlCol="0" anchor="ctr"/>
+          <a:lstStyle/>
+          <a:p/>
+        </p:txBody>
+      </p:sp>
+      <p:sp>
+        <p:nvSpPr>
+          <p:cNvPr id="8" name="Oval 7"/>
+          <p:cNvSpPr/>
+          <p:nvPr/>
+        </p:nvSpPr>
+        <p:spPr>
+          <a:xfrm>
+            <a:off x="8046720" y="1874519"/>
+            <a:ext cx="548640" cy="548640"/>
+          </a:xfrm>
+          <a:prstGeom prst="ellipse">
+            <a:avLst/>
           </a:prstGeom>
           <a:solidFill>
             <a:srgbClr val="F2B705"/>
@@ -7650,21 +10095,32 @@
           </a:fontRef>
         </p:style>
         <p:txBody>
-          <a:bodyPr rtlCol="0" anchor="ctr"/>
-          <a:lstStyle/>
-          <a:p/>
-        </p:txBody>
-      </p:sp>
-      <p:sp>
-        <p:nvSpPr>
-          <p:cNvPr id="7" name="TextBox 6"/>
+          <a:bodyPr rtlCol="0" anchor="ctr" lIns="0" rIns="0" tIns="0" bIns="0"/>
+          <a:lstStyle/>
+          <a:p>
+            <a:pPr algn="ctr"/>
+            <a:r>
+              <a:rPr sz="2000" b="1">
+                <a:solidFill>
+                  <a:srgbClr val="202122"/>
+                </a:solidFill>
+                <a:latin typeface="Calibri"/>
+              </a:rPr>
+              <a:t>!</a:t>
+            </a:r>
+          </a:p>
+        </p:txBody>
+      </p:sp>
+      <p:sp>
+        <p:nvSpPr>
+          <p:cNvPr id="9" name="TextBox 8"/>
           <p:cNvSpPr txBox="1"/>
           <p:nvPr/>
         </p:nvSpPr>
         <p:spPr>
           <a:xfrm>
-            <a:off x="548640" y="1508760"/>
-            <a:ext cx="2011680" cy="457200"/>
+            <a:off x="8046720" y="2606040"/>
+            <a:ext cx="3291840" cy="365760"/>
           </a:xfrm>
           <a:prstGeom prst="rect">
             <a:avLst/>
@@ -7672,104 +10128,18 @@
           <a:noFill/>
         </p:spPr>
         <p:txBody>
-          <a:bodyPr wrap="square" anchor="ctr" lIns="0" rIns="0" tIns="0" bIns="0"/>
-          <a:lstStyle/>
-          <a:p>
-            <a:pPr algn="ctr"/>
-            <a:r>
-              <a:rPr sz="1400" b="1" i="0">
-                <a:solidFill>
-                  <a:srgbClr val="202122"/>
-                </a:solidFill>
-                <a:latin typeface="Calibri"/>
-              </a:rPr>
-              <a:t>20 minutes</a:t>
-            </a:r>
-          </a:p>
-        </p:txBody>
-      </p:sp>
-      <p:sp>
-        <p:nvSpPr>
-          <p:cNvPr id="8" name="TextBox 7"/>
-          <p:cNvSpPr txBox="1"/>
-          <p:nvPr/>
-        </p:nvSpPr>
-        <p:spPr>
-          <a:xfrm>
-            <a:off x="2743200" y="1508760"/>
-            <a:ext cx="4754880" cy="457200"/>
-          </a:xfrm>
-          <a:prstGeom prst="rect">
-            <a:avLst/>
-          </a:prstGeom>
-          <a:noFill/>
-        </p:spPr>
-        <p:txBody>
-          <a:bodyPr wrap="square" anchor="ctr" lIns="0" rIns="0" tIns="0" bIns="0"/>
+          <a:bodyPr wrap="square" anchor="t" lIns="0" rIns="0" tIns="0" bIns="0"/>
           <a:lstStyle/>
           <a:p>
             <a:pPr algn="l"/>
             <a:r>
-              <a:rPr sz="1400" b="0" i="1">
-                <a:solidFill>
-                  <a:srgbClr val="54595D"/>
-                </a:solidFill>
-                <a:latin typeface="Calibri"/>
-              </a:rPr>
-              <a:t>Pairs</a:t>
-            </a:r>
-          </a:p>
-        </p:txBody>
-      </p:sp>
-      <p:sp>
-        <p:nvSpPr>
-          <p:cNvPr id="9" name="Oval 8"/>
-          <p:cNvSpPr/>
-          <p:nvPr/>
-        </p:nvSpPr>
-        <p:spPr>
-          <a:xfrm>
-            <a:off x="548640" y="2482596"/>
-            <a:ext cx="384048" cy="384048"/>
-          </a:xfrm>
-          <a:prstGeom prst="ellipse">
-            <a:avLst/>
-          </a:prstGeom>
-          <a:solidFill>
-            <a:srgbClr val="0645AD"/>
-          </a:solidFill>
-          <a:ln>
-            <a:noFill/>
-          </a:ln>
-          <a:effectLst/>
-        </p:spPr>
-        <p:style>
-          <a:lnRef idx="1">
-            <a:schemeClr val="accent1"/>
-          </a:lnRef>
-          <a:fillRef idx="3">
-            <a:schemeClr val="accent1"/>
-          </a:fillRef>
-          <a:effectRef idx="2">
-            <a:schemeClr val="accent1"/>
-          </a:effectRef>
-          <a:fontRef idx="minor">
-            <a:schemeClr val="lt1"/>
-          </a:fontRef>
-        </p:style>
-        <p:txBody>
-          <a:bodyPr rtlCol="0" anchor="ctr" lIns="0" rIns="0" tIns="0" bIns="0"/>
-          <a:lstStyle/>
-          <a:p>
-            <a:pPr algn="ctr"/>
-            <a:r>
-              <a:rPr sz="1300" b="1">
-                <a:solidFill>
-                  <a:srgbClr val="FFFFFF"/>
-                </a:solidFill>
-                <a:latin typeface="Calibri"/>
-              </a:rPr>
-              <a:t>1</a:t>
+              <a:rPr sz="1300" b="1" i="0">
+                <a:solidFill>
+                  <a:srgbClr val="A9C8F0"/>
+                </a:solidFill>
+                <a:latin typeface="Calibri"/>
+              </a:rPr>
+              <a:t>KEY IDEA</a:t>
             </a:r>
           </a:p>
         </p:txBody>
@@ -7782,8 +10152,8 @@
         </p:nvSpPr>
         <p:spPr>
           <a:xfrm>
-            <a:off x="1143000" y="2240280"/>
-            <a:ext cx="5943600" cy="868680"/>
+            <a:off x="8046720" y="3017520"/>
+            <a:ext cx="3291840" cy="2926080"/>
           </a:xfrm>
           <a:prstGeom prst="rect">
             <a:avLst/>
@@ -7791,439 +10161,18 @@
           <a:noFill/>
         </p:spPr>
         <p:txBody>
-          <a:bodyPr wrap="square" anchor="ctr" lIns="0" rIns="0" tIns="0" bIns="0"/>
+          <a:bodyPr wrap="square" anchor="t" lIns="0" rIns="0" tIns="0" bIns="0"/>
           <a:lstStyle/>
           <a:p>
             <a:pPr algn="l"/>
             <a:r>
-              <a:rPr sz="1700" b="0" i="0">
-                <a:solidFill>
-                  <a:srgbClr val="202122"/>
-                </a:solidFill>
-                <a:latin typeface="Calibri"/>
-              </a:rPr>
-              <a:t>Choose a workshop machine such as a pillar drill or lathe.</a:t>
-            </a:r>
-          </a:p>
-        </p:txBody>
-      </p:sp>
-      <p:sp>
-        <p:nvSpPr>
-          <p:cNvPr id="11" name="Oval 10"/>
-          <p:cNvSpPr/>
-          <p:nvPr/>
-        </p:nvSpPr>
-        <p:spPr>
-          <a:xfrm>
-            <a:off x="548640" y="3461004"/>
-            <a:ext cx="384048" cy="384048"/>
-          </a:xfrm>
-          <a:prstGeom prst="ellipse">
-            <a:avLst/>
-          </a:prstGeom>
-          <a:solidFill>
-            <a:srgbClr val="0645AD"/>
-          </a:solidFill>
-          <a:ln>
-            <a:noFill/>
-          </a:ln>
-          <a:effectLst/>
-        </p:spPr>
-        <p:style>
-          <a:lnRef idx="1">
-            <a:schemeClr val="accent1"/>
-          </a:lnRef>
-          <a:fillRef idx="3">
-            <a:schemeClr val="accent1"/>
-          </a:fillRef>
-          <a:effectRef idx="2">
-            <a:schemeClr val="accent1"/>
-          </a:effectRef>
-          <a:fontRef idx="minor">
-            <a:schemeClr val="lt1"/>
-          </a:fontRef>
-        </p:style>
-        <p:txBody>
-          <a:bodyPr rtlCol="0" anchor="ctr" lIns="0" rIns="0" tIns="0" bIns="0"/>
-          <a:lstStyle/>
-          <a:p>
-            <a:pPr algn="ctr"/>
-            <a:r>
-              <a:rPr sz="1300" b="1">
+              <a:rPr sz="2200" b="0" i="0">
                 <a:solidFill>
                   <a:srgbClr val="FFFFFF"/>
                 </a:solidFill>
-                <a:latin typeface="Calibri"/>
-              </a:rPr>
-              <a:t>2</a:t>
-            </a:r>
-          </a:p>
-        </p:txBody>
-      </p:sp>
-      <p:sp>
-        <p:nvSpPr>
-          <p:cNvPr id="12" name="TextBox 11"/>
-          <p:cNvSpPr txBox="1"/>
-          <p:nvPr/>
-        </p:nvSpPr>
-        <p:spPr>
-          <a:xfrm>
-            <a:off x="1143000" y="3218688"/>
-            <a:ext cx="5943600" cy="868680"/>
-          </a:xfrm>
-          <a:prstGeom prst="rect">
-            <a:avLst/>
-          </a:prstGeom>
-          <a:noFill/>
-        </p:spPr>
-        <p:txBody>
-          <a:bodyPr wrap="square" anchor="ctr" lIns="0" rIns="0" tIns="0" bIns="0"/>
-          <a:lstStyle/>
-          <a:p>
-            <a:pPr algn="l"/>
-            <a:r>
-              <a:rPr sz="1700" b="0" i="0">
-                <a:solidFill>
-                  <a:srgbClr val="202122"/>
-                </a:solidFill>
-                <a:latin typeface="Calibri"/>
-              </a:rPr>
-              <a:t>Write a preventative maintenance schedule.</a:t>
-            </a:r>
-          </a:p>
-        </p:txBody>
-      </p:sp>
-      <p:sp>
-        <p:nvSpPr>
-          <p:cNvPr id="13" name="Oval 12"/>
-          <p:cNvSpPr/>
-          <p:nvPr/>
-        </p:nvSpPr>
-        <p:spPr>
-          <a:xfrm>
-            <a:off x="548640" y="4439412"/>
-            <a:ext cx="384048" cy="384048"/>
-          </a:xfrm>
-          <a:prstGeom prst="ellipse">
-            <a:avLst/>
-          </a:prstGeom>
-          <a:solidFill>
-            <a:srgbClr val="0645AD"/>
-          </a:solidFill>
-          <a:ln>
-            <a:noFill/>
-          </a:ln>
-          <a:effectLst/>
-        </p:spPr>
-        <p:style>
-          <a:lnRef idx="1">
-            <a:schemeClr val="accent1"/>
-          </a:lnRef>
-          <a:fillRef idx="3">
-            <a:schemeClr val="accent1"/>
-          </a:fillRef>
-          <a:effectRef idx="2">
-            <a:schemeClr val="accent1"/>
-          </a:effectRef>
-          <a:fontRef idx="minor">
-            <a:schemeClr val="lt1"/>
-          </a:fontRef>
-        </p:style>
-        <p:txBody>
-          <a:bodyPr rtlCol="0" anchor="ctr" lIns="0" rIns="0" tIns="0" bIns="0"/>
-          <a:lstStyle/>
-          <a:p>
-            <a:pPr algn="ctr"/>
-            <a:r>
-              <a:rPr sz="1300" b="1">
-                <a:solidFill>
-                  <a:srgbClr val="FFFFFF"/>
-                </a:solidFill>
-                <a:latin typeface="Calibri"/>
-              </a:rPr>
-              <a:t>3</a:t>
-            </a:r>
-          </a:p>
-        </p:txBody>
-      </p:sp>
-      <p:sp>
-        <p:nvSpPr>
-          <p:cNvPr id="14" name="TextBox 13"/>
-          <p:cNvSpPr txBox="1"/>
-          <p:nvPr/>
-        </p:nvSpPr>
-        <p:spPr>
-          <a:xfrm>
-            <a:off x="1143000" y="4197096"/>
-            <a:ext cx="5943600" cy="868680"/>
-          </a:xfrm>
-          <a:prstGeom prst="rect">
-            <a:avLst/>
-          </a:prstGeom>
-          <a:noFill/>
-        </p:spPr>
-        <p:txBody>
-          <a:bodyPr wrap="square" anchor="ctr" lIns="0" rIns="0" tIns="0" bIns="0"/>
-          <a:lstStyle/>
-          <a:p>
-            <a:pPr algn="l"/>
-            <a:r>
-              <a:rPr sz="1700" b="0" i="0">
-                <a:solidFill>
-                  <a:srgbClr val="202122"/>
-                </a:solidFill>
-                <a:latin typeface="Calibri"/>
-              </a:rPr>
-              <a:t>Suggest one condition you could monitor.</a:t>
-            </a:r>
-          </a:p>
-        </p:txBody>
-      </p:sp>
-      <p:sp>
-        <p:nvSpPr>
-          <p:cNvPr id="15" name="Oval 14"/>
-          <p:cNvSpPr/>
-          <p:nvPr/>
-        </p:nvSpPr>
-        <p:spPr>
-          <a:xfrm>
-            <a:off x="548640" y="5417820"/>
-            <a:ext cx="384048" cy="384048"/>
-          </a:xfrm>
-          <a:prstGeom prst="ellipse">
-            <a:avLst/>
-          </a:prstGeom>
-          <a:solidFill>
-            <a:srgbClr val="0645AD"/>
-          </a:solidFill>
-          <a:ln>
-            <a:noFill/>
-          </a:ln>
-          <a:effectLst/>
-        </p:spPr>
-        <p:style>
-          <a:lnRef idx="1">
-            <a:schemeClr val="accent1"/>
-          </a:lnRef>
-          <a:fillRef idx="3">
-            <a:schemeClr val="accent1"/>
-          </a:fillRef>
-          <a:effectRef idx="2">
-            <a:schemeClr val="accent1"/>
-          </a:effectRef>
-          <a:fontRef idx="minor">
-            <a:schemeClr val="lt1"/>
-          </a:fontRef>
-        </p:style>
-        <p:txBody>
-          <a:bodyPr rtlCol="0" anchor="ctr" lIns="0" rIns="0" tIns="0" bIns="0"/>
-          <a:lstStyle/>
-          <a:p>
-            <a:pPr algn="ctr"/>
-            <a:r>
-              <a:rPr sz="1300" b="1">
-                <a:solidFill>
-                  <a:srgbClr val="FFFFFF"/>
-                </a:solidFill>
-                <a:latin typeface="Calibri"/>
-              </a:rPr>
-              <a:t>4</a:t>
-            </a:r>
-          </a:p>
-        </p:txBody>
-      </p:sp>
-      <p:sp>
-        <p:nvSpPr>
-          <p:cNvPr id="16" name="TextBox 15"/>
-          <p:cNvSpPr txBox="1"/>
-          <p:nvPr/>
-        </p:nvSpPr>
-        <p:spPr>
-          <a:xfrm>
-            <a:off x="1143000" y="5175504"/>
-            <a:ext cx="5943600" cy="868680"/>
-          </a:xfrm>
-          <a:prstGeom prst="rect">
-            <a:avLst/>
-          </a:prstGeom>
-          <a:noFill/>
-        </p:spPr>
-        <p:txBody>
-          <a:bodyPr wrap="square" anchor="ctr" lIns="0" rIns="0" tIns="0" bIns="0"/>
-          <a:lstStyle/>
-          <a:p>
-            <a:pPr algn="l"/>
-            <a:r>
-              <a:rPr sz="1700" b="0" i="0">
-                <a:solidFill>
-                  <a:srgbClr val="202122"/>
-                </a:solidFill>
-                <a:latin typeface="Calibri"/>
-              </a:rPr>
-              <a:t>Explain how your plan reduces environmental impact.</a:t>
-            </a:r>
-          </a:p>
-        </p:txBody>
-      </p:sp>
-      <p:sp>
-        <p:nvSpPr>
-          <p:cNvPr id="17" name="Rounded Rectangle 16"/>
-          <p:cNvSpPr/>
-          <p:nvPr/>
-        </p:nvSpPr>
-        <p:spPr>
-          <a:xfrm>
-            <a:off x="7772400" y="1508760"/>
-            <a:ext cx="3867912" cy="4572000"/>
-          </a:xfrm>
-          <a:prstGeom prst="roundRect">
-            <a:avLst>
-              <a:gd name="adj" fmla="val 8000"/>
-            </a:avLst>
-          </a:prstGeom>
-          <a:solidFill>
-            <a:srgbClr val="EAF3FF"/>
-          </a:solidFill>
-          <a:ln>
-            <a:noFill/>
-          </a:ln>
-          <a:effectLst/>
-        </p:spPr>
-        <p:style>
-          <a:lnRef idx="1">
-            <a:schemeClr val="accent1"/>
-          </a:lnRef>
-          <a:fillRef idx="3">
-            <a:schemeClr val="accent1"/>
-          </a:fillRef>
-          <a:effectRef idx="2">
-            <a:schemeClr val="accent1"/>
-          </a:effectRef>
-          <a:fontRef idx="minor">
-            <a:schemeClr val="lt1"/>
-          </a:fontRef>
-        </p:style>
-        <p:txBody>
-          <a:bodyPr rtlCol="0" anchor="ctr"/>
-          <a:lstStyle/>
-          <a:p/>
-        </p:txBody>
-      </p:sp>
-      <p:sp>
-        <p:nvSpPr>
-          <p:cNvPr id="18" name="TextBox 17"/>
-          <p:cNvSpPr txBox="1"/>
-          <p:nvPr/>
-        </p:nvSpPr>
-        <p:spPr>
-          <a:xfrm>
-            <a:off x="8046720" y="1737360"/>
-            <a:ext cx="3291840" cy="365760"/>
-          </a:xfrm>
-          <a:prstGeom prst="rect">
-            <a:avLst/>
-          </a:prstGeom>
-          <a:noFill/>
-        </p:spPr>
-        <p:txBody>
-          <a:bodyPr wrap="square" anchor="t" lIns="0" rIns="0" tIns="0" bIns="0"/>
-          <a:lstStyle/>
-          <a:p>
-            <a:pPr algn="l"/>
-            <a:r>
-              <a:rPr sz="1300" b="1" i="0">
-                <a:solidFill>
-                  <a:srgbClr val="0645AD"/>
-                </a:solidFill>
-                <a:latin typeface="Calibri"/>
-              </a:rPr>
-              <a:t>SUCCESS CRITERIA</a:t>
-            </a:r>
-          </a:p>
-        </p:txBody>
-      </p:sp>
-      <p:sp>
-        <p:nvSpPr>
-          <p:cNvPr id="19" name="TextBox 18"/>
-          <p:cNvSpPr txBox="1"/>
-          <p:nvPr/>
-        </p:nvSpPr>
-        <p:spPr>
-          <a:xfrm>
-            <a:off x="8046720" y="2240280"/>
-            <a:ext cx="3337560" cy="3657600"/>
-          </a:xfrm>
-          <a:prstGeom prst="rect">
-            <a:avLst/>
-          </a:prstGeom>
-          <a:noFill/>
-        </p:spPr>
-        <p:txBody>
-          <a:bodyPr wrap="square" lIns="0" rIns="0" tIns="0" bIns="0">
-            <a:spAutoFit/>
-          </a:bodyPr>
-          <a:lstStyle/>
-          <a:p>
-            <a:pPr marL="274320" indent="-274320">
-              <a:spcAft>
-                <a:spcPts val="810"/>
-              </a:spcAft>
-              <a:buClr>
-                <a:srgbClr val="0645AD"/>
-              </a:buClr>
-              <a:buFont typeface="Arial"/>
-              <a:buChar char="•"/>
-            </a:pPr>
-            <a:r>
-              <a:rPr sz="1800" b="0">
-                <a:solidFill>
-                  <a:srgbClr val="202122"/>
-                </a:solidFill>
-                <a:latin typeface="Calibri"/>
-              </a:rPr>
-              <a:t>Tasks and frequencies realistic</a:t>
-            </a:r>
-          </a:p>
-          <a:p>
-            <a:pPr marL="274320" indent="-274320">
-              <a:spcAft>
-                <a:spcPts val="810"/>
-              </a:spcAft>
-              <a:buClr>
-                <a:srgbClr val="0645AD"/>
-              </a:buClr>
-              <a:buFont typeface="Arial"/>
-              <a:buChar char="•"/>
-            </a:pPr>
-            <a:r>
-              <a:rPr sz="1800" b="0">
-                <a:solidFill>
-                  <a:srgbClr val="202122"/>
-                </a:solidFill>
-                <a:latin typeface="Calibri"/>
-              </a:rPr>
-              <a:t>Monitoring idea is practical</a:t>
-            </a:r>
-          </a:p>
-          <a:p>
-            <a:pPr marL="274320" indent="-274320">
-              <a:spcAft>
-                <a:spcPts val="810"/>
-              </a:spcAft>
-              <a:buClr>
-                <a:srgbClr val="0645AD"/>
-              </a:buClr>
-              <a:buFont typeface="Arial"/>
-              <a:buChar char="•"/>
-            </a:pPr>
-            <a:r>
-              <a:rPr sz="1800" b="0">
-                <a:solidFill>
-                  <a:srgbClr val="202122"/>
-                </a:solidFill>
-                <a:latin typeface="Calibri"/>
-              </a:rPr>
-              <a:t>Environmental benefit explained</a:t>
+                <a:latin typeface="Cambria"/>
+              </a:rPr>
+              <a:t>Well-maintained machines last longer, waste less and are safer.</a:t>
             </a:r>
           </a:p>
         </p:txBody>
@@ -8242,7 +10191,7 @@
     <p:bg>
       <p:bgPr>
         <a:solidFill>
-          <a:srgbClr val="03306E"/>
+          <a:srgbClr val="FFFFFF"/>
         </a:solidFill>
         <a:effectLst/>
       </p:bgPr>
@@ -8278,7 +10227,7 @@
             <a:r>
               <a:rPr sz="1100" b="1" i="0">
                 <a:solidFill>
-                  <a:srgbClr val="A9C8F0"/>
+                  <a:srgbClr val="54595D"/>
                 </a:solidFill>
                 <a:latin typeface="Calibri"/>
               </a:rPr>
@@ -8309,26 +10258,92 @@
           <a:p>
             <a:pPr algn="l"/>
             <a:r>
-              <a:rPr sz="3200" b="1" i="0">
-                <a:solidFill>
-                  <a:srgbClr val="FFFFFF"/>
+              <a:rPr sz="3000" b="1" i="0">
+                <a:solidFill>
+                  <a:srgbClr val="03306E"/>
                 </a:solidFill>
                 <a:latin typeface="Cambria"/>
               </a:rPr>
-              <a:t>Exit ticket</a:t>
-            </a:r>
-          </a:p>
-        </p:txBody>
-      </p:sp>
-      <p:sp>
-        <p:nvSpPr>
-          <p:cNvPr id="4" name="Oval 3"/>
+              <a:t>Quick check: Installation and the future of maintenance</a:t>
+            </a:r>
+          </a:p>
+        </p:txBody>
+      </p:sp>
+      <p:sp>
+        <p:nvSpPr>
+          <p:cNvPr id="4" name="TextBox 3"/>
+          <p:cNvSpPr txBox="1"/>
+          <p:nvPr/>
+        </p:nvSpPr>
+        <p:spPr>
+          <a:xfrm>
+            <a:off x="548640" y="6446520"/>
+            <a:ext cx="8229600" cy="274320"/>
+          </a:xfrm>
+          <a:prstGeom prst="rect">
+            <a:avLst/>
+          </a:prstGeom>
+          <a:noFill/>
+        </p:spPr>
+        <p:txBody>
+          <a:bodyPr wrap="square" anchor="t" lIns="0" rIns="0" tIns="0" bIns="0"/>
+          <a:lstStyle/>
+          <a:p>
+            <a:pPr algn="l"/>
+            <a:r>
+              <a:rPr sz="1000" b="0" i="0">
+                <a:solidFill>
+                  <a:srgbClr val="54595D"/>
+                </a:solidFill>
+                <a:latin typeface="Calibri"/>
+              </a:rPr>
+              <a:t>Design and Development for Engineering and Manufacturing T Level  ·  Maintenance, Repair and Installation</a:t>
+            </a:r>
+          </a:p>
+        </p:txBody>
+      </p:sp>
+      <p:sp>
+        <p:nvSpPr>
+          <p:cNvPr id="5" name="TextBox 4"/>
+          <p:cNvSpPr txBox="1"/>
+          <p:nvPr/>
+        </p:nvSpPr>
+        <p:spPr>
+          <a:xfrm>
+            <a:off x="10728655" y="6446520"/>
+            <a:ext cx="914400" cy="274320"/>
+          </a:xfrm>
+          <a:prstGeom prst="rect">
+            <a:avLst/>
+          </a:prstGeom>
+          <a:noFill/>
+        </p:spPr>
+        <p:txBody>
+          <a:bodyPr wrap="square" anchor="t" lIns="0" rIns="0" tIns="0" bIns="0"/>
+          <a:lstStyle/>
+          <a:p>
+            <a:pPr algn="r"/>
+            <a:r>
+              <a:rPr sz="1000" b="0" i="0">
+                <a:solidFill>
+                  <a:srgbClr val="54595D"/>
+                </a:solidFill>
+                <a:latin typeface="Calibri"/>
+              </a:rPr>
+              <a:t>9</a:t>
+            </a:r>
+          </a:p>
+        </p:txBody>
+      </p:sp>
+      <p:sp>
+        <p:nvSpPr>
+          <p:cNvPr id="6" name="Oval 5"/>
           <p:cNvSpPr/>
           <p:nvPr/>
         </p:nvSpPr>
         <p:spPr>
           <a:xfrm>
-            <a:off x="548640" y="1737360"/>
+            <a:off x="548640" y="1691640"/>
             <a:ext cx="502920" cy="502920"/>
           </a:xfrm>
           <a:prstGeom prst="ellipse">
@@ -8362,7 +10377,7 @@
           <a:p>
             <a:pPr algn="ctr"/>
             <a:r>
-              <a:rPr sz="1700" b="1">
+              <a:rPr sz="1600" b="1">
                 <a:solidFill>
                   <a:srgbClr val="202122"/>
                 </a:solidFill>
@@ -8375,14 +10390,14 @@
       </p:sp>
       <p:sp>
         <p:nvSpPr>
-          <p:cNvPr id="5" name="TextBox 4"/>
+          <p:cNvPr id="7" name="TextBox 6"/>
           <p:cNvSpPr txBox="1"/>
           <p:nvPr/>
         </p:nvSpPr>
         <p:spPr>
           <a:xfrm>
-            <a:off x="1325880" y="1645920"/>
-            <a:ext cx="6583680" cy="822960"/>
+            <a:off x="1371600" y="1645920"/>
+            <a:ext cx="10271455" cy="1188720"/>
           </a:xfrm>
           <a:prstGeom prst="rect">
             <a:avLst/>
@@ -8390,31 +10405,31 @@
           <a:noFill/>
         </p:spPr>
         <p:txBody>
-          <a:bodyPr wrap="square" anchor="ctr" lIns="0" rIns="0" tIns="0" bIns="0"/>
+          <a:bodyPr wrap="square" anchor="t" lIns="0" rIns="0" tIns="0" bIns="0"/>
           <a:lstStyle/>
           <a:p>
             <a:pPr algn="l"/>
             <a:r>
-              <a:rPr sz="2000" b="0" i="0">
-                <a:solidFill>
-                  <a:srgbClr val="FFFFFF"/>
-                </a:solidFill>
-                <a:latin typeface="Calibri"/>
-              </a:rPr>
-              <a:t>When is reactive maintenance acceptable?</a:t>
-            </a:r>
-          </a:p>
-        </p:txBody>
-      </p:sp>
-      <p:sp>
-        <p:nvSpPr>
-          <p:cNvPr id="6" name="Oval 5"/>
+              <a:rPr sz="2400" b="0" i="0">
+                <a:solidFill>
+                  <a:srgbClr val="202122"/>
+                </a:solidFill>
+                <a:latin typeface="Calibri"/>
+              </a:rPr>
+              <a:t>What is commissioning?</a:t>
+            </a:r>
+          </a:p>
+        </p:txBody>
+      </p:sp>
+      <p:sp>
+        <p:nvSpPr>
+          <p:cNvPr id="8" name="Oval 7"/>
           <p:cNvSpPr/>
           <p:nvPr/>
         </p:nvSpPr>
         <p:spPr>
           <a:xfrm>
-            <a:off x="548640" y="2697480"/>
+            <a:off x="548640" y="3108960"/>
             <a:ext cx="502920" cy="502920"/>
           </a:xfrm>
           <a:prstGeom prst="ellipse">
@@ -8448,7 +10463,7 @@
           <a:p>
             <a:pPr algn="ctr"/>
             <a:r>
-              <a:rPr sz="1700" b="1">
+              <a:rPr sz="1600" b="1">
                 <a:solidFill>
                   <a:srgbClr val="202122"/>
                 </a:solidFill>
@@ -8461,14 +10476,14 @@
       </p:sp>
       <p:sp>
         <p:nvSpPr>
-          <p:cNvPr id="7" name="TextBox 6"/>
+          <p:cNvPr id="9" name="TextBox 8"/>
           <p:cNvSpPr txBox="1"/>
           <p:nvPr/>
         </p:nvSpPr>
         <p:spPr>
           <a:xfrm>
-            <a:off x="1325880" y="2606040"/>
-            <a:ext cx="6583680" cy="822960"/>
+            <a:off x="1371600" y="3063240"/>
+            <a:ext cx="10271455" cy="1188720"/>
           </a:xfrm>
           <a:prstGeom prst="rect">
             <a:avLst/>
@@ -8476,31 +10491,31 @@
           <a:noFill/>
         </p:spPr>
         <p:txBody>
-          <a:bodyPr wrap="square" anchor="ctr" lIns="0" rIns="0" tIns="0" bIns="0"/>
+          <a:bodyPr wrap="square" anchor="t" lIns="0" rIns="0" tIns="0" bIns="0"/>
           <a:lstStyle/>
           <a:p>
             <a:pPr algn="l"/>
             <a:r>
-              <a:rPr sz="2000" b="0" i="0">
-                <a:solidFill>
-                  <a:srgbClr val="FFFFFF"/>
-                </a:solidFill>
-                <a:latin typeface="Calibri"/>
-              </a:rPr>
-              <a:t>What happens during a shutdown?</a:t>
-            </a:r>
-          </a:p>
-        </p:txBody>
-      </p:sp>
-      <p:sp>
-        <p:nvSpPr>
-          <p:cNvPr id="8" name="Oval 7"/>
+              <a:rPr sz="2400" b="0" i="0">
+                <a:solidFill>
+                  <a:srgbClr val="202122"/>
+                </a:solidFill>
+                <a:latin typeface="Calibri"/>
+              </a:rPr>
+              <a:t>Who plans maintenance work?</a:t>
+            </a:r>
+          </a:p>
+        </p:txBody>
+      </p:sp>
+      <p:sp>
+        <p:nvSpPr>
+          <p:cNvPr id="10" name="Oval 9"/>
           <p:cNvSpPr/>
           <p:nvPr/>
         </p:nvSpPr>
         <p:spPr>
           <a:xfrm>
-            <a:off x="548640" y="3657600"/>
+            <a:off x="548640" y="4526280"/>
             <a:ext cx="502920" cy="502920"/>
           </a:xfrm>
           <a:prstGeom prst="ellipse">
@@ -8534,7 +10549,7 @@
           <a:p>
             <a:pPr algn="ctr"/>
             <a:r>
-              <a:rPr sz="1700" b="1">
+              <a:rPr sz="1600" b="1">
                 <a:solidFill>
                   <a:srgbClr val="202122"/>
                 </a:solidFill>
@@ -8543,83 +10558,6 @@
               <a:t>3</a:t>
             </a:r>
           </a:p>
-        </p:txBody>
-      </p:sp>
-      <p:sp>
-        <p:nvSpPr>
-          <p:cNvPr id="9" name="TextBox 8"/>
-          <p:cNvSpPr txBox="1"/>
-          <p:nvPr/>
-        </p:nvSpPr>
-        <p:spPr>
-          <a:xfrm>
-            <a:off x="1325880" y="3566160"/>
-            <a:ext cx="6583680" cy="822960"/>
-          </a:xfrm>
-          <a:prstGeom prst="rect">
-            <a:avLst/>
-          </a:prstGeom>
-          <a:noFill/>
-        </p:spPr>
-        <p:txBody>
-          <a:bodyPr wrap="square" anchor="ctr" lIns="0" rIns="0" tIns="0" bIns="0"/>
-          <a:lstStyle/>
-          <a:p>
-            <a:pPr algn="l"/>
-            <a:r>
-              <a:rPr sz="2000" b="0" i="0">
-                <a:solidFill>
-                  <a:srgbClr val="FFFFFF"/>
-                </a:solidFill>
-                <a:latin typeface="Calibri"/>
-              </a:rPr>
-              <a:t>Name one tool used in maintenance.</a:t>
-            </a:r>
-          </a:p>
-        </p:txBody>
-      </p:sp>
-      <p:sp>
-        <p:nvSpPr>
-          <p:cNvPr id="10" name="Rounded Rectangle 9"/>
-          <p:cNvSpPr/>
-          <p:nvPr/>
-        </p:nvSpPr>
-        <p:spPr>
-          <a:xfrm>
-            <a:off x="8229600" y="1645920"/>
-            <a:ext cx="3410712" cy="2926080"/>
-          </a:xfrm>
-          <a:prstGeom prst="roundRect">
-            <a:avLst>
-              <a:gd name="adj" fmla="val 8000"/>
-            </a:avLst>
-          </a:prstGeom>
-          <a:solidFill>
-            <a:srgbClr val="0645AD"/>
-          </a:solidFill>
-          <a:ln>
-            <a:noFill/>
-          </a:ln>
-          <a:effectLst/>
-        </p:spPr>
-        <p:style>
-          <a:lnRef idx="1">
-            <a:schemeClr val="accent1"/>
-          </a:lnRef>
-          <a:fillRef idx="3">
-            <a:schemeClr val="accent1"/>
-          </a:fillRef>
-          <a:effectRef idx="2">
-            <a:schemeClr val="accent1"/>
-          </a:effectRef>
-          <a:fontRef idx="minor">
-            <a:schemeClr val="lt1"/>
-          </a:fontRef>
-        </p:style>
-        <p:txBody>
-          <a:bodyPr rtlCol="0" anchor="ctr"/>
-          <a:lstStyle/>
-          <a:p/>
         </p:txBody>
       </p:sp>
       <p:sp>
@@ -8630,8 +10568,8 @@
         </p:nvSpPr>
         <p:spPr>
           <a:xfrm>
-            <a:off x="8503920" y="1874519"/>
-            <a:ext cx="2926080" cy="365760"/>
+            <a:off x="1371600" y="4480560"/>
+            <a:ext cx="10271455" cy="1188720"/>
           </a:xfrm>
           <a:prstGeom prst="rect">
             <a:avLst/>
@@ -8644,13 +10582,13 @@
           <a:p>
             <a:pPr algn="l"/>
             <a:r>
-              <a:rPr sz="1300" b="1" i="0">
-                <a:solidFill>
-                  <a:srgbClr val="A9C8F0"/>
-                </a:solidFill>
-                <a:latin typeface="Calibri"/>
-              </a:rPr>
-              <a:t>REVISE THIS TOPIC</a:t>
+              <a:rPr sz="2400" b="0" i="0">
+                <a:solidFill>
+                  <a:srgbClr val="202122"/>
+                </a:solidFill>
+                <a:latin typeface="Calibri"/>
+              </a:rPr>
+              <a:t>How does maintenance help the environment?</a:t>
             </a:r>
           </a:p>
         </p:txBody>
@@ -8663,8 +10601,8 @@
         </p:nvSpPr>
         <p:spPr>
           <a:xfrm>
-            <a:off x="8503920" y="2286000"/>
-            <a:ext cx="2926080" cy="548640"/>
+            <a:off x="548640" y="5852160"/>
+            <a:ext cx="11094415" cy="365760"/>
           </a:xfrm>
           <a:prstGeom prst="rect">
             <a:avLst/>
@@ -8677,79 +10615,13 @@
           <a:p>
             <a:pPr algn="l"/>
             <a:r>
-              <a:rPr sz="1400" b="0" i="0">
-                <a:solidFill>
-                  <a:srgbClr val="FFFFFF"/>
-                </a:solidFill>
-                <a:latin typeface="Calibri"/>
-              </a:rPr>
-              <a:t>Revision notes for this lesson are on the study wiki:</a:t>
-            </a:r>
-          </a:p>
-        </p:txBody>
-      </p:sp>
-      <p:sp>
-        <p:nvSpPr>
-          <p:cNvPr id="13" name="TextBox 12"/>
-          <p:cNvSpPr txBox="1"/>
-          <p:nvPr/>
-        </p:nvSpPr>
-        <p:spPr>
-          <a:xfrm>
-            <a:off x="8503920" y="2926080"/>
-            <a:ext cx="2926080" cy="1463040"/>
-          </a:xfrm>
-          <a:prstGeom prst="rect">
-            <a:avLst/>
-          </a:prstGeom>
-          <a:noFill/>
-        </p:spPr>
-        <p:txBody>
-          <a:bodyPr wrap="square" anchor="t" lIns="0" rIns="0" tIns="0" bIns="0"/>
-          <a:lstStyle/>
-          <a:p>
-            <a:pPr algn="l"/>
-            <a:r>
-              <a:rPr sz="2000" b="1" i="0">
-                <a:solidFill>
-                  <a:srgbClr val="FFFFFF"/>
-                </a:solidFill>
-                <a:latin typeface="Cambria"/>
-              </a:rPr>
-              <a:t>Engineering Core, Part 1</a:t>
-            </a:r>
-          </a:p>
-        </p:txBody>
-      </p:sp>
-      <p:sp>
-        <p:nvSpPr>
-          <p:cNvPr id="14" name="TextBox 13"/>
-          <p:cNvSpPr txBox="1"/>
-          <p:nvPr/>
-        </p:nvSpPr>
-        <p:spPr>
-          <a:xfrm>
-            <a:off x="548640" y="5669280"/>
-            <a:ext cx="11094415" cy="548640"/>
-          </a:xfrm>
-          <a:prstGeom prst="rect">
-            <a:avLst/>
-          </a:prstGeom>
-          <a:noFill/>
-        </p:spPr>
-        <p:txBody>
-          <a:bodyPr wrap="square" anchor="t" lIns="0" rIns="0" tIns="0" bIns="0"/>
-          <a:lstStyle/>
-          <a:p>
-            <a:pPr algn="l"/>
-            <a:r>
-              <a:rPr sz="1200" b="0" i="0">
-                <a:solidFill>
-                  <a:srgbClr val="A9C8F0"/>
-                </a:solidFill>
-                <a:latin typeface="Calibri"/>
-              </a:rPr>
-              <a:t>https://lana6478.github.io/T-level-Design-Development-Engineering-Manufacturing/#/01-core-component/01-engineering-core-part1.md</a:t>
+              <a:rPr sz="1300" b="0" i="1">
+                <a:solidFill>
+                  <a:srgbClr val="54595D"/>
+                </a:solidFill>
+                <a:latin typeface="Calibri"/>
+              </a:rPr>
+              <a:t>Answer on mini whiteboards or in your book. Answers are in the speaker notes.</a:t>
             </a:r>
           </a:p>
         </p:txBody>
